--- a/submission/NEE/figures/Fig1.pptx
+++ b/submission/NEE/figures/Fig1.pptx
@@ -650,7 +650,7 @@
         </p:nvSpPr>
         <p:spPr>
           <a:xfrm flipV="1">
-            <a:off x="2491200" y="538560"/>
+            <a:off x="2494440" y="538560"/>
             <a:ext cx="0" cy="1872360"/>
           </a:xfrm>
           <a:prstGeom prst="line">
@@ -696,8 +696,8 @@
         </p:nvSpPr>
         <p:spPr>
           <a:xfrm>
-            <a:off x="3327480" y="895320"/>
-            <a:ext cx="913320" cy="0"/>
+            <a:off x="3364200" y="895320"/>
+            <a:ext cx="876600" cy="0"/>
           </a:xfrm>
           <a:prstGeom prst="line">
             <a:avLst/>
@@ -739,8 +739,8 @@
         </p:nvSpPr>
         <p:spPr>
           <a:xfrm>
-            <a:off x="3328920" y="806040"/>
-            <a:ext cx="916920" cy="0"/>
+            <a:off x="3366360" y="806040"/>
+            <a:ext cx="879840" cy="0"/>
           </a:xfrm>
           <a:prstGeom prst="line">
             <a:avLst/>
@@ -782,8 +782,8 @@
         </p:nvSpPr>
         <p:spPr>
           <a:xfrm>
-            <a:off x="3341880" y="716760"/>
-            <a:ext cx="921240" cy="0"/>
+            <a:off x="3379320" y="716760"/>
+            <a:ext cx="883800" cy="0"/>
           </a:xfrm>
           <a:prstGeom prst="line">
             <a:avLst/>
@@ -825,8 +825,8 @@
         </p:nvSpPr>
         <p:spPr>
           <a:xfrm>
-            <a:off x="3237480" y="1341000"/>
-            <a:ext cx="860760" cy="0"/>
+            <a:off x="3218760" y="1341000"/>
+            <a:ext cx="828720" cy="0"/>
           </a:xfrm>
           <a:prstGeom prst="line">
             <a:avLst/>
@@ -868,8 +868,8 @@
         </p:nvSpPr>
         <p:spPr>
           <a:xfrm>
-            <a:off x="3268440" y="1252080"/>
-            <a:ext cx="878400" cy="0"/>
+            <a:off x="3247920" y="1252080"/>
+            <a:ext cx="846000" cy="0"/>
           </a:xfrm>
           <a:prstGeom prst="line">
             <a:avLst/>
@@ -911,8 +911,8 @@
         </p:nvSpPr>
         <p:spPr>
           <a:xfrm>
-            <a:off x="3246480" y="1162800"/>
-            <a:ext cx="898920" cy="0"/>
+            <a:off x="3226680" y="1162800"/>
+            <a:ext cx="865440" cy="0"/>
           </a:xfrm>
           <a:prstGeom prst="line">
             <a:avLst/>
@@ -954,8 +954,8 @@
         </p:nvSpPr>
         <p:spPr>
           <a:xfrm>
-            <a:off x="2125440" y="1787040"/>
-            <a:ext cx="693720" cy="0"/>
+            <a:off x="2140560" y="1787040"/>
+            <a:ext cx="667080" cy="0"/>
           </a:xfrm>
           <a:prstGeom prst="line">
             <a:avLst/>
@@ -997,8 +997,8 @@
         </p:nvSpPr>
         <p:spPr>
           <a:xfrm>
-            <a:off x="2125080" y="1697760"/>
-            <a:ext cx="696960" cy="0"/>
+            <a:off x="2140200" y="1697760"/>
+            <a:ext cx="669960" cy="0"/>
           </a:xfrm>
           <a:prstGeom prst="line">
             <a:avLst/>
@@ -1040,8 +1040,8 @@
         </p:nvSpPr>
         <p:spPr>
           <a:xfrm>
-            <a:off x="2124720" y="1608480"/>
-            <a:ext cx="699480" cy="0"/>
+            <a:off x="2139840" y="1608480"/>
+            <a:ext cx="672480" cy="0"/>
           </a:xfrm>
           <a:prstGeom prst="line">
             <a:avLst/>
@@ -1083,8 +1083,8 @@
         </p:nvSpPr>
         <p:spPr>
           <a:xfrm>
-            <a:off x="1448280" y="2232720"/>
-            <a:ext cx="839880" cy="0"/>
+            <a:off x="1448640" y="2232720"/>
+            <a:ext cx="804960" cy="0"/>
           </a:xfrm>
           <a:prstGeom prst="line">
             <a:avLst/>
@@ -1126,8 +1126,8 @@
         </p:nvSpPr>
         <p:spPr>
           <a:xfrm>
-            <a:off x="1453680" y="2143440"/>
-            <a:ext cx="842400" cy="0"/>
+            <a:off x="1452600" y="2143440"/>
+            <a:ext cx="807840" cy="0"/>
           </a:xfrm>
           <a:prstGeom prst="line">
             <a:avLst/>
@@ -1170,7 +1170,7 @@
         <p:spPr>
           <a:xfrm>
             <a:off x="1447920" y="2054520"/>
-            <a:ext cx="844560" cy="0"/>
+            <a:ext cx="809280" cy="0"/>
           </a:xfrm>
           <a:prstGeom prst="line">
             <a:avLst/>
@@ -1212,8 +1212,8 @@
         </p:nvSpPr>
         <p:spPr>
           <a:xfrm>
-            <a:off x="3754440" y="865440"/>
-            <a:ext cx="59760" cy="60120"/>
+            <a:off x="3772440" y="865440"/>
+            <a:ext cx="60120" cy="60120"/>
           </a:xfrm>
           <a:custGeom>
             <a:avLst/>
@@ -1221,17 +1221,17 @@
             <a:ahLst/>
             <a:rect l="0" t="0" r="r" b="b"/>
             <a:pathLst>
-              <a:path w="166" h="167">
+              <a:path w="167" h="167">
                 <a:moveTo>
                   <a:pt x="0" y="84"/>
                 </a:moveTo>
                 <a:cubicBezTo>
                   <a:pt x="0" y="-28"/>
-                  <a:pt x="166" y="-28"/>
-                  <a:pt x="166" y="84"/>
+                  <a:pt x="167" y="-28"/>
+                  <a:pt x="167" y="84"/>
                 </a:cubicBezTo>
                 <a:cubicBezTo>
-                  <a:pt x="166" y="195"/>
+                  <a:pt x="167" y="195"/>
                   <a:pt x="0" y="195"/>
                   <a:pt x="0" y="84"/>
                 </a:cubicBezTo>
@@ -1270,8 +1270,8 @@
         </p:nvSpPr>
         <p:spPr>
           <a:xfrm>
-            <a:off x="3754440" y="865440"/>
-            <a:ext cx="59760" cy="60120"/>
+            <a:off x="3772440" y="865440"/>
+            <a:ext cx="60120" cy="60120"/>
           </a:xfrm>
           <a:custGeom>
             <a:avLst/>
@@ -1279,19 +1279,19 @@
             <a:ahLst/>
             <a:rect l="0" t="0" r="r" b="b"/>
             <a:pathLst>
-              <a:path fill="none" w="166" h="167">
+              <a:path fill="none" w="167" h="167">
                 <a:moveTo>
-                  <a:pt x="166" y="84"/>
+                  <a:pt x="167" y="84"/>
                 </a:moveTo>
                 <a:cubicBezTo>
-                  <a:pt x="166" y="195"/>
+                  <a:pt x="167" y="195"/>
                   <a:pt x="0" y="195"/>
                   <a:pt x="0" y="84"/>
                 </a:cubicBezTo>
                 <a:cubicBezTo>
                   <a:pt x="0" y="-28"/>
-                  <a:pt x="166" y="-28"/>
-                  <a:pt x="166" y="84"/>
+                  <a:pt x="167" y="-28"/>
+                  <a:pt x="167" y="84"/>
                 </a:cubicBezTo>
               </a:path>
             </a:pathLst>
@@ -1327,7 +1327,7 @@
         </p:nvSpPr>
         <p:spPr>
           <a:xfrm>
-            <a:off x="3757680" y="776160"/>
+            <a:off x="3776400" y="776160"/>
             <a:ext cx="60120" cy="60120"/>
           </a:xfrm>
           <a:custGeom>
@@ -1385,7 +1385,7 @@
         </p:nvSpPr>
         <p:spPr>
           <a:xfrm>
-            <a:off x="3757680" y="776160"/>
+            <a:off x="3776400" y="776160"/>
             <a:ext cx="60120" cy="60120"/>
           </a:xfrm>
           <a:custGeom>
@@ -1442,7 +1442,7 @@
         </p:nvSpPr>
         <p:spPr>
           <a:xfrm>
-            <a:off x="3772800" y="686880"/>
+            <a:off x="3791520" y="686880"/>
             <a:ext cx="59760" cy="60120"/>
           </a:xfrm>
           <a:custGeom>
@@ -1500,7 +1500,7 @@
         </p:nvSpPr>
         <p:spPr>
           <a:xfrm>
-            <a:off x="3772800" y="686880"/>
+            <a:off x="3791520" y="686880"/>
             <a:ext cx="59760" cy="60120"/>
           </a:xfrm>
           <a:custGeom>
@@ -1557,8 +1557,8 @@
         </p:nvSpPr>
         <p:spPr>
           <a:xfrm>
-            <a:off x="3638160" y="1311120"/>
-            <a:ext cx="59760" cy="60120"/>
+            <a:off x="3603240" y="1311120"/>
+            <a:ext cx="60120" cy="60120"/>
           </a:xfrm>
           <a:custGeom>
             <a:avLst/>
@@ -1566,17 +1566,17 @@
             <a:ahLst/>
             <a:rect l="0" t="0" r="r" b="b"/>
             <a:pathLst>
-              <a:path w="166" h="167">
+              <a:path w="167" h="167">
                 <a:moveTo>
                   <a:pt x="0" y="83"/>
                 </a:moveTo>
                 <a:cubicBezTo>
                   <a:pt x="0" y="-28"/>
-                  <a:pt x="166" y="-28"/>
-                  <a:pt x="166" y="83"/>
+                  <a:pt x="167" y="-28"/>
+                  <a:pt x="167" y="83"/>
                 </a:cubicBezTo>
                 <a:cubicBezTo>
-                  <a:pt x="166" y="194"/>
+                  <a:pt x="167" y="194"/>
                   <a:pt x="0" y="194"/>
                   <a:pt x="0" y="83"/>
                 </a:cubicBezTo>
@@ -1615,8 +1615,8 @@
         </p:nvSpPr>
         <p:spPr>
           <a:xfrm>
-            <a:off x="3638160" y="1311120"/>
-            <a:ext cx="59760" cy="60120"/>
+            <a:off x="3603240" y="1311120"/>
+            <a:ext cx="60120" cy="60120"/>
           </a:xfrm>
           <a:custGeom>
             <a:avLst/>
@@ -1624,19 +1624,19 @@
             <a:ahLst/>
             <a:rect l="0" t="0" r="r" b="b"/>
             <a:pathLst>
-              <a:path fill="none" w="166" h="167">
+              <a:path fill="none" w="167" h="167">
                 <a:moveTo>
-                  <a:pt x="166" y="83"/>
+                  <a:pt x="167" y="83"/>
                 </a:moveTo>
                 <a:cubicBezTo>
-                  <a:pt x="166" y="194"/>
+                  <a:pt x="167" y="194"/>
                   <a:pt x="0" y="194"/>
                   <a:pt x="0" y="83"/>
                 </a:cubicBezTo>
                 <a:cubicBezTo>
                   <a:pt x="0" y="-28"/>
-                  <a:pt x="166" y="-28"/>
-                  <a:pt x="166" y="83"/>
+                  <a:pt x="167" y="-28"/>
+                  <a:pt x="167" y="83"/>
                 </a:cubicBezTo>
               </a:path>
             </a:pathLst>
@@ -1672,7 +1672,7 @@
         </p:nvSpPr>
         <p:spPr>
           <a:xfrm>
-            <a:off x="3677760" y="1222200"/>
+            <a:off x="3641040" y="1222200"/>
             <a:ext cx="60120" cy="60120"/>
           </a:xfrm>
           <a:custGeom>
@@ -1730,7 +1730,7 @@
         </p:nvSpPr>
         <p:spPr>
           <a:xfrm>
-            <a:off x="3677760" y="1222200"/>
+            <a:off x="3641040" y="1222200"/>
             <a:ext cx="60120" cy="60120"/>
           </a:xfrm>
           <a:custGeom>
@@ -1787,8 +1787,8 @@
         </p:nvSpPr>
         <p:spPr>
           <a:xfrm>
-            <a:off x="3666240" y="1132920"/>
-            <a:ext cx="59760" cy="60120"/>
+            <a:off x="3629520" y="1132920"/>
+            <a:ext cx="60120" cy="60120"/>
           </a:xfrm>
           <a:custGeom>
             <a:avLst/>
@@ -1796,17 +1796,17 @@
             <a:ahLst/>
             <a:rect l="0" t="0" r="r" b="b"/>
             <a:pathLst>
-              <a:path w="166" h="167">
+              <a:path w="167" h="167">
                 <a:moveTo>
                   <a:pt x="0" y="84"/>
                 </a:moveTo>
                 <a:cubicBezTo>
                   <a:pt x="0" y="-28"/>
-                  <a:pt x="166" y="-28"/>
-                  <a:pt x="166" y="84"/>
+                  <a:pt x="167" y="-28"/>
+                  <a:pt x="167" y="84"/>
                 </a:cubicBezTo>
                 <a:cubicBezTo>
-                  <a:pt x="166" y="194"/>
+                  <a:pt x="167" y="194"/>
                   <a:pt x="0" y="194"/>
                   <a:pt x="0" y="84"/>
                 </a:cubicBezTo>
@@ -1845,8 +1845,8 @@
         </p:nvSpPr>
         <p:spPr>
           <a:xfrm>
-            <a:off x="3666240" y="1132920"/>
-            <a:ext cx="59760" cy="60120"/>
+            <a:off x="3629520" y="1132920"/>
+            <a:ext cx="60120" cy="60120"/>
           </a:xfrm>
           <a:custGeom>
             <a:avLst/>
@@ -1854,19 +1854,19 @@
             <a:ahLst/>
             <a:rect l="0" t="0" r="r" b="b"/>
             <a:pathLst>
-              <a:path fill="none" w="166" h="167">
+              <a:path fill="none" w="167" h="167">
                 <a:moveTo>
-                  <a:pt x="166" y="84"/>
+                  <a:pt x="167" y="84"/>
                 </a:moveTo>
                 <a:cubicBezTo>
-                  <a:pt x="166" y="194"/>
+                  <a:pt x="167" y="194"/>
                   <a:pt x="0" y="194"/>
                   <a:pt x="0" y="84"/>
                 </a:cubicBezTo>
                 <a:cubicBezTo>
                   <a:pt x="0" y="-28"/>
-                  <a:pt x="166" y="-28"/>
-                  <a:pt x="166" y="84"/>
+                  <a:pt x="167" y="-28"/>
+                  <a:pt x="167" y="84"/>
                 </a:cubicBezTo>
               </a:path>
             </a:pathLst>
@@ -1902,7 +1902,7 @@
         </p:nvSpPr>
         <p:spPr>
           <a:xfrm>
-            <a:off x="2442600" y="1757160"/>
+            <a:off x="2444400" y="1757160"/>
             <a:ext cx="60120" cy="60120"/>
           </a:xfrm>
           <a:custGeom>
@@ -1960,7 +1960,7 @@
         </p:nvSpPr>
         <p:spPr>
           <a:xfrm>
-            <a:off x="2442600" y="1757160"/>
+            <a:off x="2444400" y="1757160"/>
             <a:ext cx="60120" cy="60120"/>
           </a:xfrm>
           <a:custGeom>
@@ -2017,8 +2017,8 @@
         </p:nvSpPr>
         <p:spPr>
           <a:xfrm>
-            <a:off x="2443680" y="1667880"/>
-            <a:ext cx="60120" cy="60120"/>
+            <a:off x="2445480" y="1667880"/>
+            <a:ext cx="59760" cy="60120"/>
           </a:xfrm>
           <a:custGeom>
             <a:avLst/>
@@ -2026,17 +2026,17 @@
             <a:ahLst/>
             <a:rect l="0" t="0" r="r" b="b"/>
             <a:pathLst>
-              <a:path w="167" h="167">
+              <a:path w="166" h="167">
                 <a:moveTo>
                   <a:pt x="0" y="84"/>
                 </a:moveTo>
                 <a:cubicBezTo>
                   <a:pt x="0" y="-28"/>
-                  <a:pt x="167" y="-28"/>
-                  <a:pt x="167" y="84"/>
+                  <a:pt x="166" y="-28"/>
+                  <a:pt x="166" y="84"/>
                 </a:cubicBezTo>
                 <a:cubicBezTo>
-                  <a:pt x="167" y="194"/>
+                  <a:pt x="166" y="194"/>
                   <a:pt x="0" y="194"/>
                   <a:pt x="0" y="84"/>
                 </a:cubicBezTo>
@@ -2075,8 +2075,8 @@
         </p:nvSpPr>
         <p:spPr>
           <a:xfrm>
-            <a:off x="2443680" y="1667880"/>
-            <a:ext cx="60120" cy="60120"/>
+            <a:off x="2445480" y="1667880"/>
+            <a:ext cx="59760" cy="60120"/>
           </a:xfrm>
           <a:custGeom>
             <a:avLst/>
@@ -2084,19 +2084,19 @@
             <a:ahLst/>
             <a:rect l="0" t="0" r="r" b="b"/>
             <a:pathLst>
-              <a:path fill="none" w="167" h="167">
+              <a:path fill="none" w="166" h="167">
                 <a:moveTo>
-                  <a:pt x="167" y="84"/>
+                  <a:pt x="166" y="84"/>
                 </a:moveTo>
                 <a:cubicBezTo>
-                  <a:pt x="167" y="194"/>
+                  <a:pt x="166" y="194"/>
                   <a:pt x="0" y="194"/>
                   <a:pt x="0" y="84"/>
                 </a:cubicBezTo>
                 <a:cubicBezTo>
                   <a:pt x="0" y="-28"/>
-                  <a:pt x="167" y="-28"/>
-                  <a:pt x="167" y="84"/>
+                  <a:pt x="166" y="-28"/>
+                  <a:pt x="166" y="84"/>
                 </a:cubicBezTo>
               </a:path>
             </a:pathLst>
@@ -2132,7 +2132,7 @@
         </p:nvSpPr>
         <p:spPr>
           <a:xfrm>
-            <a:off x="2444760" y="1578600"/>
+            <a:off x="2446200" y="1578600"/>
             <a:ext cx="60120" cy="60120"/>
           </a:xfrm>
           <a:custGeom>
@@ -2190,7 +2190,7 @@
         </p:nvSpPr>
         <p:spPr>
           <a:xfrm>
-            <a:off x="2444760" y="1578600"/>
+            <a:off x="2446200" y="1578600"/>
             <a:ext cx="60120" cy="60120"/>
           </a:xfrm>
           <a:custGeom>
@@ -2247,8 +2247,8 @@
         </p:nvSpPr>
         <p:spPr>
           <a:xfrm>
-            <a:off x="1838520" y="2202840"/>
-            <a:ext cx="59760" cy="60120"/>
+            <a:off x="1821240" y="2202840"/>
+            <a:ext cx="60120" cy="60120"/>
           </a:xfrm>
           <a:custGeom>
             <a:avLst/>
@@ -2256,17 +2256,17 @@
             <a:ahLst/>
             <a:rect l="0" t="0" r="r" b="b"/>
             <a:pathLst>
-              <a:path w="166" h="167">
+              <a:path w="167" h="167">
                 <a:moveTo>
                   <a:pt x="0" y="83"/>
                 </a:moveTo>
                 <a:cubicBezTo>
                   <a:pt x="0" y="-28"/>
-                  <a:pt x="166" y="-28"/>
-                  <a:pt x="166" y="83"/>
+                  <a:pt x="167" y="-28"/>
+                  <a:pt x="167" y="83"/>
                 </a:cubicBezTo>
                 <a:cubicBezTo>
-                  <a:pt x="166" y="194"/>
+                  <a:pt x="167" y="194"/>
                   <a:pt x="0" y="194"/>
                   <a:pt x="0" y="83"/>
                 </a:cubicBezTo>
@@ -2305,8 +2305,8 @@
         </p:nvSpPr>
         <p:spPr>
           <a:xfrm>
-            <a:off x="1838520" y="2202840"/>
-            <a:ext cx="59760" cy="60120"/>
+            <a:off x="1821240" y="2202840"/>
+            <a:ext cx="60120" cy="60120"/>
           </a:xfrm>
           <a:custGeom>
             <a:avLst/>
@@ -2314,19 +2314,19 @@
             <a:ahLst/>
             <a:rect l="0" t="0" r="r" b="b"/>
             <a:pathLst>
-              <a:path fill="none" w="166" h="167">
+              <a:path fill="none" w="167" h="167">
                 <a:moveTo>
-                  <a:pt x="166" y="83"/>
+                  <a:pt x="167" y="83"/>
                 </a:moveTo>
                 <a:cubicBezTo>
-                  <a:pt x="166" y="194"/>
+                  <a:pt x="167" y="194"/>
                   <a:pt x="0" y="194"/>
                   <a:pt x="0" y="83"/>
                 </a:cubicBezTo>
                 <a:cubicBezTo>
                   <a:pt x="0" y="-28"/>
-                  <a:pt x="166" y="-28"/>
-                  <a:pt x="166" y="83"/>
+                  <a:pt x="167" y="-28"/>
+                  <a:pt x="167" y="83"/>
                 </a:cubicBezTo>
               </a:path>
             </a:pathLst>
@@ -2362,7 +2362,7 @@
         </p:nvSpPr>
         <p:spPr>
           <a:xfrm>
-            <a:off x="1845000" y="2113920"/>
+            <a:off x="1826640" y="2113920"/>
             <a:ext cx="60120" cy="60120"/>
           </a:xfrm>
           <a:custGeom>
@@ -2420,7 +2420,7 @@
         </p:nvSpPr>
         <p:spPr>
           <a:xfrm>
-            <a:off x="1845000" y="2113920"/>
+            <a:off x="1826640" y="2113920"/>
             <a:ext cx="60120" cy="60120"/>
           </a:xfrm>
           <a:custGeom>
@@ -2477,7 +2477,7 @@
         </p:nvSpPr>
         <p:spPr>
           <a:xfrm>
-            <a:off x="1840320" y="2024640"/>
+            <a:off x="1822680" y="2024640"/>
             <a:ext cx="60120" cy="60120"/>
           </a:xfrm>
           <a:custGeom>
@@ -2535,7 +2535,7 @@
         </p:nvSpPr>
         <p:spPr>
           <a:xfrm>
-            <a:off x="1840320" y="2024640"/>
+            <a:off x="1822680" y="2024640"/>
             <a:ext cx="60120" cy="60120"/>
           </a:xfrm>
           <a:custGeom>
@@ -2994,7 +2994,7 @@
         </p:nvSpPr>
         <p:spPr>
           <a:xfrm flipV="1">
-            <a:off x="1640520" y="2411280"/>
+            <a:off x="1677240" y="2411280"/>
             <a:ext cx="0" cy="31320"/>
           </a:xfrm>
           <a:prstGeom prst="line">
@@ -3037,7 +3037,7 @@
         </p:nvSpPr>
         <p:spPr>
           <a:xfrm flipV="1">
-            <a:off x="2089440" y="2411280"/>
+            <a:off x="2108520" y="2411280"/>
             <a:ext cx="0" cy="31320"/>
           </a:xfrm>
           <a:prstGeom prst="line">
@@ -3080,7 +3080,7 @@
         </p:nvSpPr>
         <p:spPr>
           <a:xfrm flipV="1">
-            <a:off x="2491200" y="2411280"/>
+            <a:off x="2494440" y="2411280"/>
             <a:ext cx="0" cy="31320"/>
           </a:xfrm>
           <a:prstGeom prst="line">
@@ -3123,7 +3123,7 @@
         </p:nvSpPr>
         <p:spPr>
           <a:xfrm flipV="1">
-            <a:off x="3186000" y="2411280"/>
+            <a:off x="3161880" y="2411280"/>
             <a:ext cx="0" cy="31320"/>
           </a:xfrm>
           <a:prstGeom prst="line">
@@ -3166,7 +3166,7 @@
         </p:nvSpPr>
         <p:spPr>
           <a:xfrm flipV="1">
-            <a:off x="3773880" y="2411280"/>
+            <a:off x="3726360" y="2411280"/>
             <a:ext cx="0" cy="31320"/>
           </a:xfrm>
           <a:prstGeom prst="line">
@@ -3209,7 +3209,7 @@
         </p:nvSpPr>
         <p:spPr>
           <a:xfrm flipV="1">
-            <a:off x="4282920" y="2411280"/>
+            <a:off x="4215240" y="2411280"/>
             <a:ext cx="0" cy="31320"/>
           </a:xfrm>
           <a:prstGeom prst="line">
@@ -3300,7 +3300,7 @@
         </p:nvSpPr>
         <p:spPr>
           <a:xfrm>
-            <a:off x="1577160" y="2455560"/>
+            <a:off x="1613880" y="2455560"/>
             <a:ext cx="142560" cy="102600"/>
           </a:xfrm>
           <a:prstGeom prst="rect">
@@ -3348,7 +3348,7 @@
         </p:nvSpPr>
         <p:spPr>
           <a:xfrm>
-            <a:off x="2026080" y="2455560"/>
+            <a:off x="2045160" y="2455560"/>
             <a:ext cx="142560" cy="102600"/>
           </a:xfrm>
           <a:prstGeom prst="rect">
@@ -3396,7 +3396,7 @@
         </p:nvSpPr>
         <p:spPr>
           <a:xfrm>
-            <a:off x="2427840" y="2455560"/>
+            <a:off x="2431080" y="2455560"/>
             <a:ext cx="142560" cy="102600"/>
           </a:xfrm>
           <a:prstGeom prst="rect">
@@ -3444,7 +3444,7 @@
         </p:nvSpPr>
         <p:spPr>
           <a:xfrm>
-            <a:off x="3122640" y="2455560"/>
+            <a:off x="3098520" y="2455560"/>
             <a:ext cx="142560" cy="102600"/>
           </a:xfrm>
           <a:prstGeom prst="rect">
@@ -3492,7 +3492,7 @@
         </p:nvSpPr>
         <p:spPr>
           <a:xfrm>
-            <a:off x="3710520" y="2455560"/>
+            <a:off x="3663000" y="2455560"/>
             <a:ext cx="142560" cy="102600"/>
           </a:xfrm>
           <a:prstGeom prst="rect">
@@ -3540,7 +3540,7 @@
         </p:nvSpPr>
         <p:spPr>
           <a:xfrm>
-            <a:off x="4219560" y="2455560"/>
+            <a:off x="4151880" y="2455560"/>
             <a:ext cx="142560" cy="102600"/>
           </a:xfrm>
           <a:prstGeom prst="rect">
@@ -4746,7 +4746,7 @@
         </p:nvSpPr>
         <p:spPr>
           <a:xfrm>
-            <a:off x="4961520" y="2406960"/>
+            <a:off x="4961520" y="2401920"/>
             <a:ext cx="3097080" cy="0"/>
           </a:xfrm>
           <a:prstGeom prst="line">
@@ -4789,7 +4789,7 @@
         </p:nvSpPr>
         <p:spPr>
           <a:xfrm>
-            <a:off x="4961520" y="1881360"/>
+            <a:off x="4961520" y="1879560"/>
             <a:ext cx="3097080" cy="0"/>
           </a:xfrm>
           <a:prstGeom prst="line">
@@ -4832,7 +4832,7 @@
         </p:nvSpPr>
         <p:spPr>
           <a:xfrm>
-            <a:off x="4961520" y="1355760"/>
+            <a:off x="4961520" y="1356840"/>
             <a:ext cx="3097080" cy="0"/>
           </a:xfrm>
           <a:prstGeom prst="line">
@@ -4875,7 +4875,7 @@
         </p:nvSpPr>
         <p:spPr>
           <a:xfrm>
-            <a:off x="4961520" y="830520"/>
+            <a:off x="4961520" y="834480"/>
             <a:ext cx="3097080" cy="0"/>
           </a:xfrm>
           <a:prstGeom prst="line">
@@ -4918,8 +4918,8 @@
         </p:nvSpPr>
         <p:spPr>
           <a:xfrm>
-            <a:off x="5102280" y="660960"/>
-            <a:ext cx="2815920" cy="1665360"/>
+            <a:off x="5102280" y="643320"/>
+            <a:ext cx="2815920" cy="1683000"/>
           </a:xfrm>
           <a:custGeom>
             <a:avLst/>
@@ -4927,369 +4927,369 @@
             <a:ahLst/>
             <a:rect l="0" t="0" r="r" b="b"/>
             <a:pathLst>
-              <a:path w="7822" h="4626">
+              <a:path w="7822" h="4675">
                 <a:moveTo>
-                  <a:pt x="0" y="4204"/>
+                  <a:pt x="0" y="4279"/>
                 </a:moveTo>
                 <a:lnTo>
-                  <a:pt x="133" y="4189"/>
-                </a:lnTo>
-                <a:lnTo>
-                  <a:pt x="266" y="4173"/>
-                </a:lnTo>
-                <a:lnTo>
-                  <a:pt x="398" y="4156"/>
-                </a:lnTo>
-                <a:lnTo>
-                  <a:pt x="531" y="4139"/>
-                </a:lnTo>
-                <a:lnTo>
-                  <a:pt x="663" y="4122"/>
-                </a:lnTo>
-                <a:lnTo>
-                  <a:pt x="796" y="4104"/>
-                </a:lnTo>
-                <a:lnTo>
-                  <a:pt x="928" y="4085"/>
-                </a:lnTo>
-                <a:lnTo>
-                  <a:pt x="1061" y="4066"/>
-                </a:lnTo>
-                <a:lnTo>
-                  <a:pt x="1193" y="4046"/>
-                </a:lnTo>
-                <a:lnTo>
-                  <a:pt x="1326" y="4026"/>
-                </a:lnTo>
-                <a:lnTo>
-                  <a:pt x="1459" y="4005"/>
-                </a:lnTo>
-                <a:lnTo>
-                  <a:pt x="1591" y="3983"/>
-                </a:lnTo>
-                <a:lnTo>
-                  <a:pt x="1724" y="3961"/>
-                </a:lnTo>
-                <a:lnTo>
-                  <a:pt x="1856" y="3937"/>
-                </a:lnTo>
-                <a:lnTo>
-                  <a:pt x="1989" y="3913"/>
-                </a:lnTo>
-                <a:lnTo>
-                  <a:pt x="2121" y="3888"/>
-                </a:lnTo>
-                <a:lnTo>
-                  <a:pt x="2254" y="3863"/>
-                </a:lnTo>
-                <a:lnTo>
-                  <a:pt x="2386" y="3836"/>
-                </a:lnTo>
-                <a:lnTo>
-                  <a:pt x="2519" y="3808"/>
-                </a:lnTo>
-                <a:lnTo>
-                  <a:pt x="2652" y="3779"/>
-                </a:lnTo>
-                <a:lnTo>
-                  <a:pt x="2784" y="3749"/>
-                </a:lnTo>
-                <a:lnTo>
-                  <a:pt x="2917" y="3717"/>
-                </a:lnTo>
-                <a:lnTo>
-                  <a:pt x="3049" y="3684"/>
-                </a:lnTo>
-                <a:lnTo>
-                  <a:pt x="3182" y="3650"/>
-                </a:lnTo>
-                <a:lnTo>
-                  <a:pt x="3314" y="3614"/>
-                </a:lnTo>
-                <a:lnTo>
-                  <a:pt x="3447" y="3576"/>
-                </a:lnTo>
-                <a:lnTo>
-                  <a:pt x="3579" y="3536"/>
-                </a:lnTo>
-                <a:lnTo>
-                  <a:pt x="3712" y="3494"/>
-                </a:lnTo>
-                <a:lnTo>
-                  <a:pt x="3844" y="3450"/>
-                </a:lnTo>
-                <a:lnTo>
-                  <a:pt x="3977" y="3404"/>
-                </a:lnTo>
-                <a:lnTo>
-                  <a:pt x="4110" y="3355"/>
-                </a:lnTo>
-                <a:lnTo>
-                  <a:pt x="4242" y="3303"/>
-                </a:lnTo>
-                <a:lnTo>
-                  <a:pt x="4375" y="3248"/>
-                </a:lnTo>
-                <a:lnTo>
-                  <a:pt x="4507" y="3190"/>
-                </a:lnTo>
-                <a:lnTo>
-                  <a:pt x="4640" y="3129"/>
-                </a:lnTo>
-                <a:lnTo>
-                  <a:pt x="4772" y="3064"/>
-                </a:lnTo>
-                <a:lnTo>
-                  <a:pt x="4905" y="2995"/>
-                </a:lnTo>
-                <a:lnTo>
-                  <a:pt x="5037" y="2922"/>
-                </a:lnTo>
-                <a:lnTo>
-                  <a:pt x="5170" y="2845"/>
-                </a:lnTo>
-                <a:lnTo>
-                  <a:pt x="5303" y="2763"/>
-                </a:lnTo>
-                <a:lnTo>
-                  <a:pt x="5436" y="2677"/>
-                </a:lnTo>
-                <a:lnTo>
-                  <a:pt x="5569" y="2586"/>
-                </a:lnTo>
-                <a:lnTo>
-                  <a:pt x="5701" y="2489"/>
-                </a:lnTo>
-                <a:lnTo>
-                  <a:pt x="5834" y="2387"/>
-                </a:lnTo>
-                <a:lnTo>
-                  <a:pt x="5966" y="2280"/>
-                </a:lnTo>
-                <a:lnTo>
-                  <a:pt x="6099" y="2166"/>
-                </a:lnTo>
-                <a:lnTo>
-                  <a:pt x="6231" y="2046"/>
-                </a:lnTo>
-                <a:lnTo>
-                  <a:pt x="6364" y="1920"/>
-                </a:lnTo>
-                <a:lnTo>
-                  <a:pt x="6497" y="1787"/>
-                </a:lnTo>
-                <a:lnTo>
-                  <a:pt x="6629" y="1647"/>
-                </a:lnTo>
-                <a:lnTo>
-                  <a:pt x="6762" y="1499"/>
-                </a:lnTo>
-                <a:lnTo>
-                  <a:pt x="6894" y="1343"/>
-                </a:lnTo>
-                <a:lnTo>
-                  <a:pt x="7027" y="1179"/>
-                </a:lnTo>
-                <a:lnTo>
-                  <a:pt x="7159" y="1007"/>
-                </a:lnTo>
-                <a:lnTo>
-                  <a:pt x="7292" y="825"/>
-                </a:lnTo>
-                <a:lnTo>
-                  <a:pt x="7424" y="635"/>
-                </a:lnTo>
-                <a:lnTo>
-                  <a:pt x="7557" y="433"/>
-                </a:lnTo>
-                <a:lnTo>
-                  <a:pt x="7689" y="222"/>
+                  <a:pt x="133" y="4263"/>
+                </a:lnTo>
+                <a:lnTo>
+                  <a:pt x="266" y="4247"/>
+                </a:lnTo>
+                <a:lnTo>
+                  <a:pt x="398" y="4231"/>
+                </a:lnTo>
+                <a:lnTo>
+                  <a:pt x="531" y="4214"/>
+                </a:lnTo>
+                <a:lnTo>
+                  <a:pt x="663" y="4196"/>
+                </a:lnTo>
+                <a:lnTo>
+                  <a:pt x="796" y="4178"/>
+                </a:lnTo>
+                <a:lnTo>
+                  <a:pt x="928" y="4160"/>
+                </a:lnTo>
+                <a:lnTo>
+                  <a:pt x="1061" y="4141"/>
+                </a:lnTo>
+                <a:lnTo>
+                  <a:pt x="1193" y="4121"/>
+                </a:lnTo>
+                <a:lnTo>
+                  <a:pt x="1326" y="4101"/>
+                </a:lnTo>
+                <a:lnTo>
+                  <a:pt x="1459" y="4080"/>
+                </a:lnTo>
+                <a:lnTo>
+                  <a:pt x="1591" y="4058"/>
+                </a:lnTo>
+                <a:lnTo>
+                  <a:pt x="1724" y="4036"/>
+                </a:lnTo>
+                <a:lnTo>
+                  <a:pt x="1856" y="4013"/>
+                </a:lnTo>
+                <a:lnTo>
+                  <a:pt x="1989" y="3989"/>
+                </a:lnTo>
+                <a:lnTo>
+                  <a:pt x="2121" y="3964"/>
+                </a:lnTo>
+                <a:lnTo>
+                  <a:pt x="2254" y="3938"/>
+                </a:lnTo>
+                <a:lnTo>
+                  <a:pt x="2386" y="3911"/>
+                </a:lnTo>
+                <a:lnTo>
+                  <a:pt x="2519" y="3883"/>
+                </a:lnTo>
+                <a:lnTo>
+                  <a:pt x="2652" y="3854"/>
+                </a:lnTo>
+                <a:lnTo>
+                  <a:pt x="2784" y="3823"/>
+                </a:lnTo>
+                <a:lnTo>
+                  <a:pt x="2917" y="3792"/>
+                </a:lnTo>
+                <a:lnTo>
+                  <a:pt x="3049" y="3758"/>
+                </a:lnTo>
+                <a:lnTo>
+                  <a:pt x="3182" y="3724"/>
+                </a:lnTo>
+                <a:lnTo>
+                  <a:pt x="3314" y="3687"/>
+                </a:lnTo>
+                <a:lnTo>
+                  <a:pt x="3447" y="3649"/>
+                </a:lnTo>
+                <a:lnTo>
+                  <a:pt x="3579" y="3609"/>
+                </a:lnTo>
+                <a:lnTo>
+                  <a:pt x="3712" y="3567"/>
+                </a:lnTo>
+                <a:lnTo>
+                  <a:pt x="3844" y="3523"/>
+                </a:lnTo>
+                <a:lnTo>
+                  <a:pt x="3977" y="3476"/>
+                </a:lnTo>
+                <a:lnTo>
+                  <a:pt x="4110" y="3426"/>
+                </a:lnTo>
+                <a:lnTo>
+                  <a:pt x="4242" y="3374"/>
+                </a:lnTo>
+                <a:lnTo>
+                  <a:pt x="4375" y="3319"/>
+                </a:lnTo>
+                <a:lnTo>
+                  <a:pt x="4507" y="3260"/>
+                </a:lnTo>
+                <a:lnTo>
+                  <a:pt x="4640" y="3198"/>
+                </a:lnTo>
+                <a:lnTo>
+                  <a:pt x="4772" y="3132"/>
+                </a:lnTo>
+                <a:lnTo>
+                  <a:pt x="4905" y="3063"/>
+                </a:lnTo>
+                <a:lnTo>
+                  <a:pt x="5037" y="2989"/>
+                </a:lnTo>
+                <a:lnTo>
+                  <a:pt x="5170" y="2911"/>
+                </a:lnTo>
+                <a:lnTo>
+                  <a:pt x="5303" y="2828"/>
+                </a:lnTo>
+                <a:lnTo>
+                  <a:pt x="5436" y="2741"/>
+                </a:lnTo>
+                <a:lnTo>
+                  <a:pt x="5569" y="2648"/>
+                </a:lnTo>
+                <a:lnTo>
+                  <a:pt x="5701" y="2550"/>
+                </a:lnTo>
+                <a:lnTo>
+                  <a:pt x="5834" y="2447"/>
+                </a:lnTo>
+                <a:lnTo>
+                  <a:pt x="5966" y="2337"/>
+                </a:lnTo>
+                <a:lnTo>
+                  <a:pt x="6099" y="2222"/>
+                </a:lnTo>
+                <a:lnTo>
+                  <a:pt x="6231" y="2100"/>
+                </a:lnTo>
+                <a:lnTo>
+                  <a:pt x="6364" y="1971"/>
+                </a:lnTo>
+                <a:lnTo>
+                  <a:pt x="6497" y="1835"/>
+                </a:lnTo>
+                <a:lnTo>
+                  <a:pt x="6629" y="1692"/>
+                </a:lnTo>
+                <a:lnTo>
+                  <a:pt x="6762" y="1540"/>
+                </a:lnTo>
+                <a:lnTo>
+                  <a:pt x="6894" y="1381"/>
+                </a:lnTo>
+                <a:lnTo>
+                  <a:pt x="7027" y="1213"/>
+                </a:lnTo>
+                <a:lnTo>
+                  <a:pt x="7159" y="1036"/>
+                </a:lnTo>
+                <a:lnTo>
+                  <a:pt x="7292" y="850"/>
+                </a:lnTo>
+                <a:lnTo>
+                  <a:pt x="7424" y="654"/>
+                </a:lnTo>
+                <a:lnTo>
+                  <a:pt x="7557" y="446"/>
+                </a:lnTo>
+                <a:lnTo>
+                  <a:pt x="7689" y="229"/>
                 </a:lnTo>
                 <a:lnTo>
                   <a:pt x="7822" y="0"/>
                 </a:lnTo>
                 <a:lnTo>
-                  <a:pt x="7822" y="2761"/>
-                </a:lnTo>
-                <a:lnTo>
-                  <a:pt x="7689" y="2813"/>
-                </a:lnTo>
-                <a:lnTo>
-                  <a:pt x="7557" y="2864"/>
-                </a:lnTo>
-                <a:lnTo>
-                  <a:pt x="7424" y="2913"/>
-                </a:lnTo>
-                <a:lnTo>
-                  <a:pt x="7292" y="2962"/>
-                </a:lnTo>
-                <a:lnTo>
-                  <a:pt x="7159" y="3010"/>
-                </a:lnTo>
-                <a:lnTo>
-                  <a:pt x="7027" y="3057"/>
-                </a:lnTo>
-                <a:lnTo>
-                  <a:pt x="6894" y="3104"/>
-                </a:lnTo>
-                <a:lnTo>
-                  <a:pt x="6762" y="3150"/>
-                </a:lnTo>
-                <a:lnTo>
-                  <a:pt x="6629" y="3195"/>
-                </a:lnTo>
-                <a:lnTo>
-                  <a:pt x="6497" y="3239"/>
-                </a:lnTo>
-                <a:lnTo>
-                  <a:pt x="6364" y="3283"/>
-                </a:lnTo>
-                <a:lnTo>
-                  <a:pt x="6231" y="3326"/>
-                </a:lnTo>
-                <a:lnTo>
-                  <a:pt x="6099" y="3368"/>
-                </a:lnTo>
-                <a:lnTo>
-                  <a:pt x="5966" y="3410"/>
-                </a:lnTo>
-                <a:lnTo>
-                  <a:pt x="5834" y="3451"/>
-                </a:lnTo>
-                <a:lnTo>
-                  <a:pt x="5701" y="3492"/>
-                </a:lnTo>
-                <a:lnTo>
-                  <a:pt x="5569" y="3533"/>
-                </a:lnTo>
-                <a:lnTo>
-                  <a:pt x="5436" y="3573"/>
-                </a:lnTo>
-                <a:lnTo>
-                  <a:pt x="5303" y="3612"/>
-                </a:lnTo>
-                <a:lnTo>
-                  <a:pt x="5170" y="3652"/>
-                </a:lnTo>
-                <a:lnTo>
-                  <a:pt x="5037" y="3690"/>
-                </a:lnTo>
-                <a:lnTo>
-                  <a:pt x="4905" y="3728"/>
-                </a:lnTo>
-                <a:lnTo>
-                  <a:pt x="4772" y="3766"/>
-                </a:lnTo>
-                <a:lnTo>
-                  <a:pt x="4640" y="3803"/>
-                </a:lnTo>
-                <a:lnTo>
-                  <a:pt x="4507" y="3840"/>
-                </a:lnTo>
-                <a:lnTo>
-                  <a:pt x="4375" y="3876"/>
-                </a:lnTo>
-                <a:lnTo>
-                  <a:pt x="4242" y="3912"/>
-                </a:lnTo>
-                <a:lnTo>
-                  <a:pt x="4110" y="3947"/>
-                </a:lnTo>
-                <a:lnTo>
-                  <a:pt x="3977" y="3981"/>
-                </a:lnTo>
-                <a:lnTo>
-                  <a:pt x="3844" y="4015"/>
-                </a:lnTo>
-                <a:lnTo>
-                  <a:pt x="3712" y="4047"/>
-                </a:lnTo>
-                <a:lnTo>
-                  <a:pt x="3579" y="4079"/>
-                </a:lnTo>
-                <a:lnTo>
-                  <a:pt x="3447" y="4110"/>
-                </a:lnTo>
-                <a:lnTo>
-                  <a:pt x="3314" y="4141"/>
-                </a:lnTo>
-                <a:lnTo>
-                  <a:pt x="3182" y="4170"/>
-                </a:lnTo>
-                <a:lnTo>
-                  <a:pt x="3049" y="4199"/>
-                </a:lnTo>
-                <a:lnTo>
-                  <a:pt x="2917" y="4226"/>
-                </a:lnTo>
-                <a:lnTo>
-                  <a:pt x="2784" y="4253"/>
-                </a:lnTo>
-                <a:lnTo>
-                  <a:pt x="2652" y="4279"/>
-                </a:lnTo>
-                <a:lnTo>
-                  <a:pt x="2519" y="4304"/>
-                </a:lnTo>
-                <a:lnTo>
-                  <a:pt x="2386" y="4328"/>
-                </a:lnTo>
-                <a:lnTo>
-                  <a:pt x="2254" y="4351"/>
-                </a:lnTo>
-                <a:lnTo>
-                  <a:pt x="2121" y="4373"/>
-                </a:lnTo>
-                <a:lnTo>
-                  <a:pt x="1989" y="4395"/>
-                </a:lnTo>
-                <a:lnTo>
-                  <a:pt x="1856" y="4415"/>
-                </a:lnTo>
-                <a:lnTo>
-                  <a:pt x="1724" y="4435"/>
-                </a:lnTo>
-                <a:lnTo>
-                  <a:pt x="1591" y="4454"/>
-                </a:lnTo>
-                <a:lnTo>
-                  <a:pt x="1459" y="4472"/>
-                </a:lnTo>
-                <a:lnTo>
-                  <a:pt x="1326" y="4489"/>
-                </a:lnTo>
-                <a:lnTo>
-                  <a:pt x="1193" y="4506"/>
-                </a:lnTo>
-                <a:lnTo>
-                  <a:pt x="1061" y="4522"/>
-                </a:lnTo>
-                <a:lnTo>
-                  <a:pt x="928" y="4537"/>
-                </a:lnTo>
-                <a:lnTo>
-                  <a:pt x="796" y="4551"/>
-                </a:lnTo>
-                <a:lnTo>
-                  <a:pt x="663" y="4565"/>
-                </a:lnTo>
-                <a:lnTo>
-                  <a:pt x="531" y="4579"/>
-                </a:lnTo>
-                <a:lnTo>
-                  <a:pt x="398" y="4591"/>
-                </a:lnTo>
-                <a:lnTo>
-                  <a:pt x="266" y="4604"/>
-                </a:lnTo>
-                <a:lnTo>
-                  <a:pt x="133" y="4615"/>
-                </a:lnTo>
-                <a:lnTo>
-                  <a:pt x="0" y="4626"/>
-                </a:lnTo>
-                <a:lnTo>
-                  <a:pt x="0" y="4204"/>
+                  <a:pt x="7822" y="2780"/>
+                </a:lnTo>
+                <a:lnTo>
+                  <a:pt x="7689" y="2834"/>
+                </a:lnTo>
+                <a:lnTo>
+                  <a:pt x="7557" y="2888"/>
+                </a:lnTo>
+                <a:lnTo>
+                  <a:pt x="7424" y="2940"/>
+                </a:lnTo>
+                <a:lnTo>
+                  <a:pt x="7292" y="2991"/>
+                </a:lnTo>
+                <a:lnTo>
+                  <a:pt x="7159" y="3042"/>
+                </a:lnTo>
+                <a:lnTo>
+                  <a:pt x="7027" y="3091"/>
+                </a:lnTo>
+                <a:lnTo>
+                  <a:pt x="6894" y="3140"/>
+                </a:lnTo>
+                <a:lnTo>
+                  <a:pt x="6762" y="3188"/>
+                </a:lnTo>
+                <a:lnTo>
+                  <a:pt x="6629" y="3235"/>
+                </a:lnTo>
+                <a:lnTo>
+                  <a:pt x="6497" y="3281"/>
+                </a:lnTo>
+                <a:lnTo>
+                  <a:pt x="6364" y="3326"/>
+                </a:lnTo>
+                <a:lnTo>
+                  <a:pt x="6231" y="3371"/>
+                </a:lnTo>
+                <a:lnTo>
+                  <a:pt x="6099" y="3415"/>
+                </a:lnTo>
+                <a:lnTo>
+                  <a:pt x="5966" y="3459"/>
+                </a:lnTo>
+                <a:lnTo>
+                  <a:pt x="5834" y="3501"/>
+                </a:lnTo>
+                <a:lnTo>
+                  <a:pt x="5701" y="3544"/>
+                </a:lnTo>
+                <a:lnTo>
+                  <a:pt x="5569" y="3585"/>
+                </a:lnTo>
+                <a:lnTo>
+                  <a:pt x="5436" y="3626"/>
+                </a:lnTo>
+                <a:lnTo>
+                  <a:pt x="5303" y="3667"/>
+                </a:lnTo>
+                <a:lnTo>
+                  <a:pt x="5170" y="3707"/>
+                </a:lnTo>
+                <a:lnTo>
+                  <a:pt x="5037" y="3746"/>
+                </a:lnTo>
+                <a:lnTo>
+                  <a:pt x="4905" y="3785"/>
+                </a:lnTo>
+                <a:lnTo>
+                  <a:pt x="4772" y="3823"/>
+                </a:lnTo>
+                <a:lnTo>
+                  <a:pt x="4640" y="3861"/>
+                </a:lnTo>
+                <a:lnTo>
+                  <a:pt x="4507" y="3898"/>
+                </a:lnTo>
+                <a:lnTo>
+                  <a:pt x="4375" y="3935"/>
+                </a:lnTo>
+                <a:lnTo>
+                  <a:pt x="4242" y="3971"/>
+                </a:lnTo>
+                <a:lnTo>
+                  <a:pt x="4110" y="4006"/>
+                </a:lnTo>
+                <a:lnTo>
+                  <a:pt x="3977" y="4040"/>
+                </a:lnTo>
+                <a:lnTo>
+                  <a:pt x="3844" y="4074"/>
+                </a:lnTo>
+                <a:lnTo>
+                  <a:pt x="3712" y="4107"/>
+                </a:lnTo>
+                <a:lnTo>
+                  <a:pt x="3579" y="4139"/>
+                </a:lnTo>
+                <a:lnTo>
+                  <a:pt x="3447" y="4170"/>
+                </a:lnTo>
+                <a:lnTo>
+                  <a:pt x="3314" y="4200"/>
+                </a:lnTo>
+                <a:lnTo>
+                  <a:pt x="3182" y="4229"/>
+                </a:lnTo>
+                <a:lnTo>
+                  <a:pt x="3049" y="4257"/>
+                </a:lnTo>
+                <a:lnTo>
+                  <a:pt x="2917" y="4285"/>
+                </a:lnTo>
+                <a:lnTo>
+                  <a:pt x="2784" y="4311"/>
+                </a:lnTo>
+                <a:lnTo>
+                  <a:pt x="2652" y="4337"/>
+                </a:lnTo>
+                <a:lnTo>
+                  <a:pt x="2519" y="4361"/>
+                </a:lnTo>
+                <a:lnTo>
+                  <a:pt x="2386" y="4385"/>
+                </a:lnTo>
+                <a:lnTo>
+                  <a:pt x="2254" y="4408"/>
+                </a:lnTo>
+                <a:lnTo>
+                  <a:pt x="2121" y="4429"/>
+                </a:lnTo>
+                <a:lnTo>
+                  <a:pt x="1989" y="4450"/>
+                </a:lnTo>
+                <a:lnTo>
+                  <a:pt x="1856" y="4470"/>
+                </a:lnTo>
+                <a:lnTo>
+                  <a:pt x="1724" y="4490"/>
+                </a:lnTo>
+                <a:lnTo>
+                  <a:pt x="1591" y="4508"/>
+                </a:lnTo>
+                <a:lnTo>
+                  <a:pt x="1459" y="4526"/>
+                </a:lnTo>
+                <a:lnTo>
+                  <a:pt x="1326" y="4543"/>
+                </a:lnTo>
+                <a:lnTo>
+                  <a:pt x="1193" y="4559"/>
+                </a:lnTo>
+                <a:lnTo>
+                  <a:pt x="1061" y="4574"/>
+                </a:lnTo>
+                <a:lnTo>
+                  <a:pt x="928" y="4589"/>
+                </a:lnTo>
+                <a:lnTo>
+                  <a:pt x="796" y="4603"/>
+                </a:lnTo>
+                <a:lnTo>
+                  <a:pt x="663" y="4617"/>
+                </a:lnTo>
+                <a:lnTo>
+                  <a:pt x="531" y="4629"/>
+                </a:lnTo>
+                <a:lnTo>
+                  <a:pt x="398" y="4642"/>
+                </a:lnTo>
+                <a:lnTo>
+                  <a:pt x="266" y="4653"/>
+                </a:lnTo>
+                <a:lnTo>
+                  <a:pt x="133" y="4665"/>
+                </a:lnTo>
+                <a:lnTo>
+                  <a:pt x="0" y="4675"/>
+                </a:lnTo>
+                <a:lnTo>
+                  <a:pt x="0" y="4279"/>
                 </a:lnTo>
                 <a:close/>
               </a:path>
@@ -5328,8 +5328,8 @@
         </p:nvSpPr>
         <p:spPr>
           <a:xfrm>
-            <a:off x="5102280" y="859320"/>
-            <a:ext cx="2815920" cy="1310040"/>
+            <a:off x="5102280" y="852480"/>
+            <a:ext cx="2815920" cy="1315800"/>
           </a:xfrm>
           <a:custGeom>
             <a:avLst/>
@@ -5337,366 +5337,360 @@
             <a:ahLst/>
             <a:rect l="0" t="0" r="r" b="b"/>
             <a:pathLst>
-              <a:path w="7822" h="3639">
+              <a:path w="7822" h="3655">
                 <a:moveTo>
-                  <a:pt x="0" y="3047"/>
+                  <a:pt x="0" y="3069"/>
                 </a:moveTo>
                 <a:lnTo>
-                  <a:pt x="133" y="3028"/>
-                </a:lnTo>
-                <a:lnTo>
-                  <a:pt x="266" y="3008"/>
-                </a:lnTo>
-                <a:lnTo>
-                  <a:pt x="398" y="2988"/>
-                </a:lnTo>
-                <a:lnTo>
-                  <a:pt x="531" y="2967"/>
-                </a:lnTo>
-                <a:lnTo>
-                  <a:pt x="663" y="2946"/>
-                </a:lnTo>
-                <a:lnTo>
-                  <a:pt x="796" y="2925"/>
-                </a:lnTo>
-                <a:lnTo>
-                  <a:pt x="928" y="2903"/>
-                </a:lnTo>
-                <a:lnTo>
-                  <a:pt x="1061" y="2881"/>
-                </a:lnTo>
-                <a:lnTo>
-                  <a:pt x="1193" y="2858"/>
-                </a:lnTo>
-                <a:lnTo>
-                  <a:pt x="1326" y="2834"/>
-                </a:lnTo>
-                <a:lnTo>
-                  <a:pt x="1459" y="2810"/>
-                </a:lnTo>
-                <a:lnTo>
-                  <a:pt x="1591" y="2786"/>
-                </a:lnTo>
-                <a:lnTo>
-                  <a:pt x="1724" y="2761"/>
-                </a:lnTo>
-                <a:lnTo>
-                  <a:pt x="1856" y="2735"/>
-                </a:lnTo>
-                <a:lnTo>
-                  <a:pt x="1989" y="2708"/>
-                </a:lnTo>
-                <a:lnTo>
-                  <a:pt x="2121" y="2681"/>
-                </a:lnTo>
-                <a:lnTo>
-                  <a:pt x="2254" y="2653"/>
-                </a:lnTo>
-                <a:lnTo>
-                  <a:pt x="2386" y="2624"/>
-                </a:lnTo>
-                <a:lnTo>
-                  <a:pt x="2519" y="2594"/>
-                </a:lnTo>
-                <a:lnTo>
-                  <a:pt x="2652" y="2564"/>
-                </a:lnTo>
-                <a:lnTo>
-                  <a:pt x="2784" y="2532"/>
-                </a:lnTo>
-                <a:lnTo>
-                  <a:pt x="2917" y="2500"/>
-                </a:lnTo>
-                <a:lnTo>
-                  <a:pt x="3049" y="2466"/>
-                </a:lnTo>
-                <a:lnTo>
-                  <a:pt x="3182" y="2431"/>
-                </a:lnTo>
-                <a:lnTo>
-                  <a:pt x="3314" y="2396"/>
-                </a:lnTo>
-                <a:lnTo>
-                  <a:pt x="3447" y="2358"/>
-                </a:lnTo>
-                <a:lnTo>
-                  <a:pt x="3579" y="2320"/>
-                </a:lnTo>
-                <a:lnTo>
-                  <a:pt x="3712" y="2280"/>
-                </a:lnTo>
-                <a:lnTo>
-                  <a:pt x="3844" y="2239"/>
-                </a:lnTo>
-                <a:lnTo>
-                  <a:pt x="3977" y="2196"/>
-                </a:lnTo>
-                <a:lnTo>
-                  <a:pt x="4110" y="2152"/>
-                </a:lnTo>
-                <a:lnTo>
-                  <a:pt x="4242" y="2106"/>
-                </a:lnTo>
-                <a:lnTo>
-                  <a:pt x="4375" y="2059"/>
-                </a:lnTo>
-                <a:lnTo>
-                  <a:pt x="4507" y="2009"/>
-                </a:lnTo>
-                <a:lnTo>
-                  <a:pt x="4640" y="1958"/>
-                </a:lnTo>
-                <a:lnTo>
-                  <a:pt x="4772" y="1905"/>
-                </a:lnTo>
-                <a:lnTo>
-                  <a:pt x="4905" y="1850"/>
-                </a:lnTo>
-                <a:lnTo>
-                  <a:pt x="5037" y="1792"/>
-                </a:lnTo>
-                <a:lnTo>
-                  <a:pt x="5170" y="1733"/>
-                </a:lnTo>
-                <a:lnTo>
-                  <a:pt x="5303" y="1672"/>
-                </a:lnTo>
-                <a:lnTo>
-                  <a:pt x="5436" y="1608"/>
-                </a:lnTo>
-                <a:lnTo>
-                  <a:pt x="5569" y="1542"/>
-                </a:lnTo>
-                <a:lnTo>
-                  <a:pt x="5701" y="1473"/>
-                </a:lnTo>
-                <a:lnTo>
-                  <a:pt x="5834" y="1402"/>
-                </a:lnTo>
-                <a:lnTo>
-                  <a:pt x="5966" y="1329"/>
-                </a:lnTo>
-                <a:lnTo>
-                  <a:pt x="6099" y="1253"/>
-                </a:lnTo>
-                <a:lnTo>
-                  <a:pt x="6231" y="1174"/>
-                </a:lnTo>
-                <a:lnTo>
-                  <a:pt x="6364" y="1093"/>
-                </a:lnTo>
-                <a:lnTo>
-                  <a:pt x="6497" y="1009"/>
-                </a:lnTo>
-                <a:lnTo>
-                  <a:pt x="6629" y="922"/>
-                </a:lnTo>
-                <a:lnTo>
-                  <a:pt x="6762" y="832"/>
-                </a:lnTo>
-                <a:lnTo>
-                  <a:pt x="6894" y="739"/>
-                </a:lnTo>
-                <a:lnTo>
-                  <a:pt x="7027" y="644"/>
-                </a:lnTo>
-                <a:lnTo>
-                  <a:pt x="7159" y="545"/>
-                </a:lnTo>
-                <a:lnTo>
-                  <a:pt x="7292" y="442"/>
-                </a:lnTo>
-                <a:lnTo>
-                  <a:pt x="7424" y="337"/>
-                </a:lnTo>
-                <a:lnTo>
-                  <a:pt x="7557" y="228"/>
-                </a:lnTo>
-                <a:lnTo>
-                  <a:pt x="7689" y="116"/>
+                  <a:pt x="133" y="3050"/>
+                </a:lnTo>
+                <a:lnTo>
+                  <a:pt x="266" y="3030"/>
+                </a:lnTo>
+                <a:lnTo>
+                  <a:pt x="398" y="3010"/>
+                </a:lnTo>
+                <a:lnTo>
+                  <a:pt x="531" y="2989"/>
+                </a:lnTo>
+                <a:lnTo>
+                  <a:pt x="663" y="2968"/>
+                </a:lnTo>
+                <a:lnTo>
+                  <a:pt x="796" y="2947"/>
+                </a:lnTo>
+                <a:lnTo>
+                  <a:pt x="928" y="2925"/>
+                </a:lnTo>
+                <a:lnTo>
+                  <a:pt x="1061" y="2902"/>
+                </a:lnTo>
+                <a:lnTo>
+                  <a:pt x="1193" y="2879"/>
+                </a:lnTo>
+                <a:lnTo>
+                  <a:pt x="1326" y="2856"/>
+                </a:lnTo>
+                <a:lnTo>
+                  <a:pt x="1459" y="2832"/>
+                </a:lnTo>
+                <a:lnTo>
+                  <a:pt x="1591" y="2807"/>
+                </a:lnTo>
+                <a:lnTo>
+                  <a:pt x="1724" y="2781"/>
+                </a:lnTo>
+                <a:lnTo>
+                  <a:pt x="1856" y="2756"/>
+                </a:lnTo>
+                <a:lnTo>
+                  <a:pt x="1989" y="2729"/>
+                </a:lnTo>
+                <a:lnTo>
+                  <a:pt x="2121" y="2701"/>
+                </a:lnTo>
+                <a:lnTo>
+                  <a:pt x="2254" y="2673"/>
+                </a:lnTo>
+                <a:lnTo>
+                  <a:pt x="2386" y="2644"/>
+                </a:lnTo>
+                <a:lnTo>
+                  <a:pt x="2519" y="2614"/>
+                </a:lnTo>
+                <a:lnTo>
+                  <a:pt x="2652" y="2584"/>
+                </a:lnTo>
+                <a:lnTo>
+                  <a:pt x="2784" y="2552"/>
+                </a:lnTo>
+                <a:lnTo>
+                  <a:pt x="2917" y="2519"/>
+                </a:lnTo>
+                <a:lnTo>
+                  <a:pt x="3049" y="2486"/>
+                </a:lnTo>
+                <a:lnTo>
+                  <a:pt x="3182" y="2451"/>
+                </a:lnTo>
+                <a:lnTo>
+                  <a:pt x="3314" y="2415"/>
+                </a:lnTo>
+                <a:lnTo>
+                  <a:pt x="3447" y="2377"/>
+                </a:lnTo>
+                <a:lnTo>
+                  <a:pt x="3579" y="2339"/>
+                </a:lnTo>
+                <a:lnTo>
+                  <a:pt x="3712" y="2299"/>
+                </a:lnTo>
+                <a:lnTo>
+                  <a:pt x="3844" y="2258"/>
+                </a:lnTo>
+                <a:lnTo>
+                  <a:pt x="3977" y="2215"/>
+                </a:lnTo>
+                <a:lnTo>
+                  <a:pt x="4110" y="2170"/>
+                </a:lnTo>
+                <a:lnTo>
+                  <a:pt x="4242" y="2124"/>
+                </a:lnTo>
+                <a:lnTo>
+                  <a:pt x="4375" y="2076"/>
+                </a:lnTo>
+                <a:lnTo>
+                  <a:pt x="4507" y="2026"/>
+                </a:lnTo>
+                <a:lnTo>
+                  <a:pt x="4640" y="1975"/>
+                </a:lnTo>
+                <a:lnTo>
+                  <a:pt x="4772" y="1921"/>
+                </a:lnTo>
+                <a:lnTo>
+                  <a:pt x="4905" y="1866"/>
+                </a:lnTo>
+                <a:lnTo>
+                  <a:pt x="5037" y="1808"/>
+                </a:lnTo>
+                <a:lnTo>
+                  <a:pt x="5170" y="1749"/>
+                </a:lnTo>
+                <a:lnTo>
+                  <a:pt x="5303" y="1687"/>
+                </a:lnTo>
+                <a:lnTo>
+                  <a:pt x="5436" y="1623"/>
+                </a:lnTo>
+                <a:lnTo>
+                  <a:pt x="5569" y="1556"/>
+                </a:lnTo>
+                <a:lnTo>
+                  <a:pt x="5701" y="1487"/>
+                </a:lnTo>
+                <a:lnTo>
+                  <a:pt x="5834" y="1416"/>
+                </a:lnTo>
+                <a:lnTo>
+                  <a:pt x="5966" y="1342"/>
+                </a:lnTo>
+                <a:lnTo>
+                  <a:pt x="6099" y="1265"/>
+                </a:lnTo>
+                <a:lnTo>
+                  <a:pt x="6231" y="1186"/>
+                </a:lnTo>
+                <a:lnTo>
+                  <a:pt x="6364" y="1104"/>
+                </a:lnTo>
+                <a:lnTo>
+                  <a:pt x="6497" y="1019"/>
+                </a:lnTo>
+                <a:lnTo>
+                  <a:pt x="6629" y="932"/>
+                </a:lnTo>
+                <a:lnTo>
+                  <a:pt x="6762" y="841"/>
+                </a:lnTo>
+                <a:lnTo>
+                  <a:pt x="6894" y="747"/>
+                </a:lnTo>
+                <a:lnTo>
+                  <a:pt x="7027" y="651"/>
+                </a:lnTo>
+                <a:lnTo>
+                  <a:pt x="7159" y="551"/>
+                </a:lnTo>
+                <a:lnTo>
+                  <a:pt x="7292" y="448"/>
+                </a:lnTo>
+                <a:lnTo>
+                  <a:pt x="7424" y="341"/>
+                </a:lnTo>
+                <a:lnTo>
+                  <a:pt x="7557" y="231"/>
+                </a:lnTo>
+                <a:lnTo>
+                  <a:pt x="7689" y="117"/>
                 </a:lnTo>
                 <a:lnTo>
                   <a:pt x="7822" y="0"/>
                 </a:lnTo>
                 <a:lnTo>
-                  <a:pt x="7822" y="1827"/>
-                </a:lnTo>
-                <a:lnTo>
-                  <a:pt x="7689" y="1866"/>
-                </a:lnTo>
-                <a:lnTo>
-                  <a:pt x="7557" y="1904"/>
-                </a:lnTo>
-                <a:lnTo>
-                  <a:pt x="7424" y="1942"/>
-                </a:lnTo>
-                <a:lnTo>
-                  <a:pt x="7292" y="1980"/>
-                </a:lnTo>
-                <a:lnTo>
-                  <a:pt x="7159" y="2018"/>
-                </a:lnTo>
-                <a:lnTo>
-                  <a:pt x="7027" y="2055"/>
-                </a:lnTo>
-                <a:lnTo>
-                  <a:pt x="6894" y="2092"/>
-                </a:lnTo>
-                <a:lnTo>
-                  <a:pt x="6762" y="2129"/>
-                </a:lnTo>
-                <a:lnTo>
-                  <a:pt x="6629" y="2166"/>
-                </a:lnTo>
-                <a:lnTo>
-                  <a:pt x="6497" y="2202"/>
-                </a:lnTo>
-                <a:lnTo>
-                  <a:pt x="6364" y="2238"/>
-                </a:lnTo>
-                <a:lnTo>
-                  <a:pt x="6231" y="2274"/>
-                </a:lnTo>
-                <a:lnTo>
-                  <a:pt x="6099" y="2310"/>
-                </a:lnTo>
-                <a:lnTo>
-                  <a:pt x="5966" y="2345"/>
-                </a:lnTo>
-                <a:lnTo>
-                  <a:pt x="5834" y="2381"/>
-                </a:lnTo>
-                <a:lnTo>
-                  <a:pt x="5701" y="2416"/>
-                </a:lnTo>
-                <a:lnTo>
-                  <a:pt x="5569" y="2451"/>
-                </a:lnTo>
-                <a:lnTo>
-                  <a:pt x="5436" y="2485"/>
-                </a:lnTo>
-                <a:lnTo>
-                  <a:pt x="5303" y="2520"/>
-                </a:lnTo>
-                <a:lnTo>
-                  <a:pt x="5170" y="2554"/>
-                </a:lnTo>
-                <a:lnTo>
-                  <a:pt x="5037" y="2589"/>
-                </a:lnTo>
-                <a:lnTo>
-                  <a:pt x="4905" y="2623"/>
-                </a:lnTo>
-                <a:lnTo>
-                  <a:pt x="4640" y="2691"/>
-                </a:lnTo>
-                <a:lnTo>
-                  <a:pt x="4507" y="2724"/>
-                </a:lnTo>
-                <a:lnTo>
-                  <a:pt x="4375" y="2758"/>
-                </a:lnTo>
-                <a:lnTo>
-                  <a:pt x="4242" y="2791"/>
-                </a:lnTo>
-                <a:lnTo>
-                  <a:pt x="4110" y="2824"/>
-                </a:lnTo>
-                <a:lnTo>
-                  <a:pt x="3977" y="2857"/>
-                </a:lnTo>
-                <a:lnTo>
-                  <a:pt x="3844" y="2889"/>
-                </a:lnTo>
-                <a:lnTo>
-                  <a:pt x="3712" y="2921"/>
-                </a:lnTo>
-                <a:lnTo>
-                  <a:pt x="3579" y="2953"/>
-                </a:lnTo>
-                <a:lnTo>
-                  <a:pt x="3447" y="2985"/>
-                </a:lnTo>
-                <a:lnTo>
-                  <a:pt x="3314" y="3016"/>
-                </a:lnTo>
-                <a:lnTo>
-                  <a:pt x="3182" y="3047"/>
-                </a:lnTo>
-                <a:lnTo>
-                  <a:pt x="3049" y="3078"/>
-                </a:lnTo>
-                <a:lnTo>
-                  <a:pt x="2917" y="3108"/>
-                </a:lnTo>
-                <a:lnTo>
-                  <a:pt x="2784" y="3137"/>
-                </a:lnTo>
-                <a:lnTo>
-                  <a:pt x="2652" y="3166"/>
-                </a:lnTo>
-                <a:lnTo>
-                  <a:pt x="2519" y="3195"/>
-                </a:lnTo>
-                <a:lnTo>
-                  <a:pt x="2386" y="3223"/>
-                </a:lnTo>
-                <a:lnTo>
-                  <a:pt x="2254" y="3251"/>
-                </a:lnTo>
-                <a:lnTo>
-                  <a:pt x="2121" y="3278"/>
-                </a:lnTo>
-                <a:lnTo>
-                  <a:pt x="1989" y="3304"/>
-                </a:lnTo>
-                <a:lnTo>
-                  <a:pt x="1856" y="3330"/>
-                </a:lnTo>
-                <a:lnTo>
-                  <a:pt x="1724" y="3356"/>
-                </a:lnTo>
-                <a:lnTo>
-                  <a:pt x="1591" y="3380"/>
-                </a:lnTo>
-                <a:lnTo>
-                  <a:pt x="1459" y="3405"/>
-                </a:lnTo>
-                <a:lnTo>
-                  <a:pt x="1326" y="3429"/>
-                </a:lnTo>
-                <a:lnTo>
-                  <a:pt x="1193" y="3452"/>
-                </a:lnTo>
-                <a:lnTo>
-                  <a:pt x="1061" y="3475"/>
-                </a:lnTo>
-                <a:lnTo>
-                  <a:pt x="928" y="3497"/>
-                </a:lnTo>
-                <a:lnTo>
-                  <a:pt x="796" y="3519"/>
-                </a:lnTo>
-                <a:lnTo>
-                  <a:pt x="663" y="3540"/>
-                </a:lnTo>
-                <a:lnTo>
-                  <a:pt x="531" y="3561"/>
-                </a:lnTo>
-                <a:lnTo>
-                  <a:pt x="398" y="3581"/>
-                </a:lnTo>
-                <a:lnTo>
-                  <a:pt x="266" y="3601"/>
-                </a:lnTo>
-                <a:lnTo>
-                  <a:pt x="133" y="3620"/>
-                </a:lnTo>
-                <a:lnTo>
-                  <a:pt x="0" y="3639"/>
-                </a:lnTo>
-                <a:lnTo>
-                  <a:pt x="0" y="3047"/>
+                  <a:pt x="7822" y="1834"/>
+                </a:lnTo>
+                <a:lnTo>
+                  <a:pt x="7689" y="1873"/>
+                </a:lnTo>
+                <a:lnTo>
+                  <a:pt x="7557" y="1912"/>
+                </a:lnTo>
+                <a:lnTo>
+                  <a:pt x="7424" y="1951"/>
+                </a:lnTo>
+                <a:lnTo>
+                  <a:pt x="7292" y="1990"/>
+                </a:lnTo>
+                <a:lnTo>
+                  <a:pt x="7159" y="2028"/>
+                </a:lnTo>
+                <a:lnTo>
+                  <a:pt x="7027" y="2066"/>
+                </a:lnTo>
+                <a:lnTo>
+                  <a:pt x="6894" y="2103"/>
+                </a:lnTo>
+                <a:lnTo>
+                  <a:pt x="6762" y="2141"/>
+                </a:lnTo>
+                <a:lnTo>
+                  <a:pt x="6629" y="2178"/>
+                </a:lnTo>
+                <a:lnTo>
+                  <a:pt x="6497" y="2214"/>
+                </a:lnTo>
+                <a:lnTo>
+                  <a:pt x="6364" y="2251"/>
+                </a:lnTo>
+                <a:lnTo>
+                  <a:pt x="6231" y="2287"/>
+                </a:lnTo>
+                <a:lnTo>
+                  <a:pt x="6099" y="2323"/>
+                </a:lnTo>
+                <a:lnTo>
+                  <a:pt x="5966" y="2359"/>
+                </a:lnTo>
+                <a:lnTo>
+                  <a:pt x="5701" y="2430"/>
+                </a:lnTo>
+                <a:lnTo>
+                  <a:pt x="5569" y="2465"/>
+                </a:lnTo>
+                <a:lnTo>
+                  <a:pt x="5436" y="2500"/>
+                </a:lnTo>
+                <a:lnTo>
+                  <a:pt x="5170" y="2570"/>
+                </a:lnTo>
+                <a:lnTo>
+                  <a:pt x="4905" y="2639"/>
+                </a:lnTo>
+                <a:lnTo>
+                  <a:pt x="4772" y="2673"/>
+                </a:lnTo>
+                <a:lnTo>
+                  <a:pt x="4640" y="2707"/>
+                </a:lnTo>
+                <a:lnTo>
+                  <a:pt x="4507" y="2741"/>
+                </a:lnTo>
+                <a:lnTo>
+                  <a:pt x="4375" y="2775"/>
+                </a:lnTo>
+                <a:lnTo>
+                  <a:pt x="4242" y="2808"/>
+                </a:lnTo>
+                <a:lnTo>
+                  <a:pt x="4110" y="2841"/>
+                </a:lnTo>
+                <a:lnTo>
+                  <a:pt x="3977" y="2874"/>
+                </a:lnTo>
+                <a:lnTo>
+                  <a:pt x="3844" y="2907"/>
+                </a:lnTo>
+                <a:lnTo>
+                  <a:pt x="3712" y="2939"/>
+                </a:lnTo>
+                <a:lnTo>
+                  <a:pt x="3579" y="2971"/>
+                </a:lnTo>
+                <a:lnTo>
+                  <a:pt x="3447" y="3003"/>
+                </a:lnTo>
+                <a:lnTo>
+                  <a:pt x="3314" y="3034"/>
+                </a:lnTo>
+                <a:lnTo>
+                  <a:pt x="3182" y="3065"/>
+                </a:lnTo>
+                <a:lnTo>
+                  <a:pt x="3049" y="3095"/>
+                </a:lnTo>
+                <a:lnTo>
+                  <a:pt x="2917" y="3126"/>
+                </a:lnTo>
+                <a:lnTo>
+                  <a:pt x="2784" y="3155"/>
+                </a:lnTo>
+                <a:lnTo>
+                  <a:pt x="2652" y="3184"/>
+                </a:lnTo>
+                <a:lnTo>
+                  <a:pt x="2519" y="3213"/>
+                </a:lnTo>
+                <a:lnTo>
+                  <a:pt x="2386" y="3241"/>
+                </a:lnTo>
+                <a:lnTo>
+                  <a:pt x="2254" y="3268"/>
+                </a:lnTo>
+                <a:lnTo>
+                  <a:pt x="2121" y="3295"/>
+                </a:lnTo>
+                <a:lnTo>
+                  <a:pt x="1989" y="3322"/>
+                </a:lnTo>
+                <a:lnTo>
+                  <a:pt x="1856" y="3348"/>
+                </a:lnTo>
+                <a:lnTo>
+                  <a:pt x="1724" y="3373"/>
+                </a:lnTo>
+                <a:lnTo>
+                  <a:pt x="1591" y="3398"/>
+                </a:lnTo>
+                <a:lnTo>
+                  <a:pt x="1459" y="3422"/>
+                </a:lnTo>
+                <a:lnTo>
+                  <a:pt x="1326" y="3446"/>
+                </a:lnTo>
+                <a:lnTo>
+                  <a:pt x="1193" y="3469"/>
+                </a:lnTo>
+                <a:lnTo>
+                  <a:pt x="1061" y="3492"/>
+                </a:lnTo>
+                <a:lnTo>
+                  <a:pt x="928" y="3514"/>
+                </a:lnTo>
+                <a:lnTo>
+                  <a:pt x="796" y="3536"/>
+                </a:lnTo>
+                <a:lnTo>
+                  <a:pt x="663" y="3557"/>
+                </a:lnTo>
+                <a:lnTo>
+                  <a:pt x="531" y="3578"/>
+                </a:lnTo>
+                <a:lnTo>
+                  <a:pt x="398" y="3598"/>
+                </a:lnTo>
+                <a:lnTo>
+                  <a:pt x="266" y="3617"/>
+                </a:lnTo>
+                <a:lnTo>
+                  <a:pt x="133" y="3636"/>
+                </a:lnTo>
+                <a:lnTo>
+                  <a:pt x="0" y="3655"/>
+                </a:lnTo>
+                <a:lnTo>
+                  <a:pt x="0" y="3069"/>
                 </a:lnTo>
                 <a:close/>
               </a:path>
@@ -5736,7 +5730,7 @@
         <p:spPr>
           <a:xfrm>
             <a:off x="5102280" y="623520"/>
-            <a:ext cx="2815920" cy="1241280"/>
+            <a:ext cx="2815920" cy="1198800"/>
           </a:xfrm>
           <a:custGeom>
             <a:avLst/>
@@ -5744,354 +5738,360 @@
             <a:ahLst/>
             <a:rect l="0" t="0" r="r" b="b"/>
             <a:pathLst>
-              <a:path w="7822" h="3448">
+              <a:path w="7822" h="3330">
                 <a:moveTo>
-                  <a:pt x="0" y="1233"/>
+                  <a:pt x="0" y="942"/>
                 </a:moveTo>
                 <a:lnTo>
-                  <a:pt x="133" y="1248"/>
-                </a:lnTo>
-                <a:lnTo>
-                  <a:pt x="266" y="1263"/>
-                </a:lnTo>
-                <a:lnTo>
-                  <a:pt x="398" y="1277"/>
-                </a:lnTo>
-                <a:lnTo>
-                  <a:pt x="531" y="1291"/>
-                </a:lnTo>
-                <a:lnTo>
-                  <a:pt x="663" y="1305"/>
-                </a:lnTo>
-                <a:lnTo>
-                  <a:pt x="796" y="1318"/>
-                </a:lnTo>
-                <a:lnTo>
-                  <a:pt x="928" y="1331"/>
-                </a:lnTo>
-                <a:lnTo>
-                  <a:pt x="1061" y="1343"/>
-                </a:lnTo>
-                <a:lnTo>
-                  <a:pt x="1193" y="1354"/>
-                </a:lnTo>
-                <a:lnTo>
-                  <a:pt x="1326" y="1365"/>
-                </a:lnTo>
-                <a:lnTo>
-                  <a:pt x="1459" y="1375"/>
-                </a:lnTo>
-                <a:lnTo>
-                  <a:pt x="1591" y="1385"/>
-                </a:lnTo>
-                <a:lnTo>
-                  <a:pt x="1724" y="1393"/>
-                </a:lnTo>
-                <a:lnTo>
-                  <a:pt x="1856" y="1401"/>
-                </a:lnTo>
-                <a:lnTo>
-                  <a:pt x="1989" y="1408"/>
-                </a:lnTo>
-                <a:lnTo>
-                  <a:pt x="2121" y="1415"/>
-                </a:lnTo>
-                <a:lnTo>
-                  <a:pt x="2254" y="1420"/>
-                </a:lnTo>
-                <a:lnTo>
-                  <a:pt x="2386" y="1424"/>
-                </a:lnTo>
-                <a:lnTo>
-                  <a:pt x="2519" y="1427"/>
-                </a:lnTo>
-                <a:lnTo>
-                  <a:pt x="2652" y="1429"/>
-                </a:lnTo>
-                <a:lnTo>
-                  <a:pt x="2784" y="1430"/>
-                </a:lnTo>
-                <a:lnTo>
-                  <a:pt x="2917" y="1429"/>
-                </a:lnTo>
-                <a:lnTo>
-                  <a:pt x="3049" y="1427"/>
-                </a:lnTo>
-                <a:lnTo>
-                  <a:pt x="3182" y="1423"/>
-                </a:lnTo>
-                <a:lnTo>
-                  <a:pt x="3314" y="1418"/>
-                </a:lnTo>
-                <a:lnTo>
-                  <a:pt x="3447" y="1411"/>
-                </a:lnTo>
-                <a:lnTo>
-                  <a:pt x="3579" y="1402"/>
-                </a:lnTo>
-                <a:lnTo>
-                  <a:pt x="3712" y="1392"/>
-                </a:lnTo>
-                <a:lnTo>
-                  <a:pt x="3844" y="1379"/>
-                </a:lnTo>
-                <a:lnTo>
-                  <a:pt x="3977" y="1365"/>
-                </a:lnTo>
-                <a:lnTo>
-                  <a:pt x="4110" y="1348"/>
-                </a:lnTo>
-                <a:lnTo>
-                  <a:pt x="4242" y="1329"/>
-                </a:lnTo>
-                <a:lnTo>
-                  <a:pt x="4375" y="1308"/>
-                </a:lnTo>
-                <a:lnTo>
-                  <a:pt x="4507" y="1284"/>
-                </a:lnTo>
-                <a:lnTo>
-                  <a:pt x="4640" y="1258"/>
-                </a:lnTo>
-                <a:lnTo>
-                  <a:pt x="4772" y="1230"/>
-                </a:lnTo>
-                <a:lnTo>
-                  <a:pt x="4905" y="1200"/>
-                </a:lnTo>
-                <a:lnTo>
-                  <a:pt x="5037" y="1167"/>
-                </a:lnTo>
-                <a:lnTo>
-                  <a:pt x="5170" y="1132"/>
-                </a:lnTo>
-                <a:lnTo>
-                  <a:pt x="5303" y="1095"/>
-                </a:lnTo>
-                <a:lnTo>
-                  <a:pt x="5436" y="1056"/>
-                </a:lnTo>
-                <a:lnTo>
-                  <a:pt x="5569" y="1014"/>
-                </a:lnTo>
-                <a:lnTo>
-                  <a:pt x="5701" y="970"/>
-                </a:lnTo>
-                <a:lnTo>
-                  <a:pt x="5834" y="924"/>
-                </a:lnTo>
-                <a:lnTo>
-                  <a:pt x="5966" y="876"/>
-                </a:lnTo>
-                <a:lnTo>
-                  <a:pt x="6099" y="826"/>
-                </a:lnTo>
-                <a:lnTo>
-                  <a:pt x="6231" y="774"/>
-                </a:lnTo>
-                <a:lnTo>
-                  <a:pt x="6364" y="720"/>
-                </a:lnTo>
-                <a:lnTo>
-                  <a:pt x="6497" y="664"/>
-                </a:lnTo>
-                <a:lnTo>
-                  <a:pt x="6629" y="606"/>
-                </a:lnTo>
-                <a:lnTo>
-                  <a:pt x="6762" y="546"/>
-                </a:lnTo>
-                <a:lnTo>
-                  <a:pt x="6894" y="484"/>
-                </a:lnTo>
-                <a:lnTo>
-                  <a:pt x="7027" y="420"/>
-                </a:lnTo>
-                <a:lnTo>
-                  <a:pt x="7159" y="355"/>
-                </a:lnTo>
-                <a:lnTo>
-                  <a:pt x="7292" y="288"/>
-                </a:lnTo>
-                <a:lnTo>
-                  <a:pt x="7424" y="219"/>
-                </a:lnTo>
-                <a:lnTo>
-                  <a:pt x="7557" y="148"/>
-                </a:lnTo>
-                <a:lnTo>
-                  <a:pt x="7689" y="75"/>
+                  <a:pt x="133" y="964"/>
+                </a:lnTo>
+                <a:lnTo>
+                  <a:pt x="266" y="986"/>
+                </a:lnTo>
+                <a:lnTo>
+                  <a:pt x="398" y="1007"/>
+                </a:lnTo>
+                <a:lnTo>
+                  <a:pt x="531" y="1027"/>
+                </a:lnTo>
+                <a:lnTo>
+                  <a:pt x="663" y="1047"/>
+                </a:lnTo>
+                <a:lnTo>
+                  <a:pt x="796" y="1066"/>
+                </a:lnTo>
+                <a:lnTo>
+                  <a:pt x="928" y="1085"/>
+                </a:lnTo>
+                <a:lnTo>
+                  <a:pt x="1061" y="1103"/>
+                </a:lnTo>
+                <a:lnTo>
+                  <a:pt x="1193" y="1120"/>
+                </a:lnTo>
+                <a:lnTo>
+                  <a:pt x="1326" y="1137"/>
+                </a:lnTo>
+                <a:lnTo>
+                  <a:pt x="1459" y="1153"/>
+                </a:lnTo>
+                <a:lnTo>
+                  <a:pt x="1591" y="1168"/>
+                </a:lnTo>
+                <a:lnTo>
+                  <a:pt x="1724" y="1182"/>
+                </a:lnTo>
+                <a:lnTo>
+                  <a:pt x="1856" y="1196"/>
+                </a:lnTo>
+                <a:lnTo>
+                  <a:pt x="1989" y="1208"/>
+                </a:lnTo>
+                <a:lnTo>
+                  <a:pt x="2121" y="1220"/>
+                </a:lnTo>
+                <a:lnTo>
+                  <a:pt x="2254" y="1230"/>
+                </a:lnTo>
+                <a:lnTo>
+                  <a:pt x="2386" y="1240"/>
+                </a:lnTo>
+                <a:lnTo>
+                  <a:pt x="2519" y="1248"/>
+                </a:lnTo>
+                <a:lnTo>
+                  <a:pt x="2652" y="1255"/>
+                </a:lnTo>
+                <a:lnTo>
+                  <a:pt x="2784" y="1260"/>
+                </a:lnTo>
+                <a:lnTo>
+                  <a:pt x="2917" y="1264"/>
+                </a:lnTo>
+                <a:lnTo>
+                  <a:pt x="3049" y="1267"/>
+                </a:lnTo>
+                <a:lnTo>
+                  <a:pt x="3182" y="1268"/>
+                </a:lnTo>
+                <a:lnTo>
+                  <a:pt x="3314" y="1267"/>
+                </a:lnTo>
+                <a:lnTo>
+                  <a:pt x="3447" y="1264"/>
+                </a:lnTo>
+                <a:lnTo>
+                  <a:pt x="3579" y="1260"/>
+                </a:lnTo>
+                <a:lnTo>
+                  <a:pt x="3712" y="1254"/>
+                </a:lnTo>
+                <a:lnTo>
+                  <a:pt x="3844" y="1245"/>
+                </a:lnTo>
+                <a:lnTo>
+                  <a:pt x="3977" y="1235"/>
+                </a:lnTo>
+                <a:lnTo>
+                  <a:pt x="4110" y="1222"/>
+                </a:lnTo>
+                <a:lnTo>
+                  <a:pt x="4242" y="1207"/>
+                </a:lnTo>
+                <a:lnTo>
+                  <a:pt x="4375" y="1189"/>
+                </a:lnTo>
+                <a:lnTo>
+                  <a:pt x="4507" y="1170"/>
+                </a:lnTo>
+                <a:lnTo>
+                  <a:pt x="4640" y="1148"/>
+                </a:lnTo>
+                <a:lnTo>
+                  <a:pt x="4772" y="1124"/>
+                </a:lnTo>
+                <a:lnTo>
+                  <a:pt x="4905" y="1097"/>
+                </a:lnTo>
+                <a:lnTo>
+                  <a:pt x="5037" y="1069"/>
+                </a:lnTo>
+                <a:lnTo>
+                  <a:pt x="5170" y="1038"/>
+                </a:lnTo>
+                <a:lnTo>
+                  <a:pt x="5303" y="1004"/>
+                </a:lnTo>
+                <a:lnTo>
+                  <a:pt x="5436" y="969"/>
+                </a:lnTo>
+                <a:lnTo>
+                  <a:pt x="5569" y="931"/>
+                </a:lnTo>
+                <a:lnTo>
+                  <a:pt x="5701" y="891"/>
+                </a:lnTo>
+                <a:lnTo>
+                  <a:pt x="5834" y="849"/>
+                </a:lnTo>
+                <a:lnTo>
+                  <a:pt x="5966" y="805"/>
+                </a:lnTo>
+                <a:lnTo>
+                  <a:pt x="6099" y="760"/>
+                </a:lnTo>
+                <a:lnTo>
+                  <a:pt x="6231" y="712"/>
+                </a:lnTo>
+                <a:lnTo>
+                  <a:pt x="6364" y="662"/>
+                </a:lnTo>
+                <a:lnTo>
+                  <a:pt x="6497" y="611"/>
+                </a:lnTo>
+                <a:lnTo>
+                  <a:pt x="6629" y="557"/>
+                </a:lnTo>
+                <a:lnTo>
+                  <a:pt x="6762" y="502"/>
+                </a:lnTo>
+                <a:lnTo>
+                  <a:pt x="6894" y="445"/>
+                </a:lnTo>
+                <a:lnTo>
+                  <a:pt x="7027" y="387"/>
+                </a:lnTo>
+                <a:lnTo>
+                  <a:pt x="7159" y="326"/>
+                </a:lnTo>
+                <a:lnTo>
+                  <a:pt x="7292" y="265"/>
+                </a:lnTo>
+                <a:lnTo>
+                  <a:pt x="7424" y="201"/>
+                </a:lnTo>
+                <a:lnTo>
+                  <a:pt x="7557" y="136"/>
+                </a:lnTo>
+                <a:lnTo>
+                  <a:pt x="7689" y="69"/>
                 </a:lnTo>
                 <a:lnTo>
                   <a:pt x="7822" y="0"/>
                 </a:lnTo>
                 <a:lnTo>
-                  <a:pt x="7822" y="2694"/>
-                </a:lnTo>
-                <a:lnTo>
-                  <a:pt x="7689" y="2686"/>
-                </a:lnTo>
-                <a:lnTo>
-                  <a:pt x="7557" y="2678"/>
-                </a:lnTo>
-                <a:lnTo>
-                  <a:pt x="7424" y="2671"/>
-                </a:lnTo>
-                <a:lnTo>
-                  <a:pt x="7292" y="2664"/>
-                </a:lnTo>
-                <a:lnTo>
-                  <a:pt x="7159" y="2658"/>
-                </a:lnTo>
-                <a:lnTo>
-                  <a:pt x="7027" y="2652"/>
-                </a:lnTo>
-                <a:lnTo>
-                  <a:pt x="6894" y="2646"/>
-                </a:lnTo>
-                <a:lnTo>
-                  <a:pt x="6762" y="2641"/>
-                </a:lnTo>
-                <a:lnTo>
-                  <a:pt x="6629" y="2637"/>
-                </a:lnTo>
-                <a:lnTo>
-                  <a:pt x="6497" y="2633"/>
-                </a:lnTo>
-                <a:lnTo>
-                  <a:pt x="6364" y="2629"/>
-                </a:lnTo>
-                <a:lnTo>
-                  <a:pt x="6231" y="2626"/>
-                </a:lnTo>
-                <a:lnTo>
-                  <a:pt x="6099" y="2625"/>
-                </a:lnTo>
-                <a:lnTo>
-                  <a:pt x="5966" y="2623"/>
-                </a:lnTo>
-                <a:lnTo>
-                  <a:pt x="5834" y="2623"/>
-                </a:lnTo>
-                <a:lnTo>
-                  <a:pt x="5701" y="2624"/>
-                </a:lnTo>
-                <a:lnTo>
-                  <a:pt x="5569" y="2625"/>
-                </a:lnTo>
-                <a:lnTo>
-                  <a:pt x="5436" y="2628"/>
-                </a:lnTo>
-                <a:lnTo>
-                  <a:pt x="5303" y="2631"/>
-                </a:lnTo>
-                <a:lnTo>
-                  <a:pt x="5170" y="2636"/>
-                </a:lnTo>
-                <a:lnTo>
-                  <a:pt x="5037" y="2642"/>
-                </a:lnTo>
-                <a:lnTo>
-                  <a:pt x="4905" y="2649"/>
-                </a:lnTo>
-                <a:lnTo>
-                  <a:pt x="4772" y="2657"/>
-                </a:lnTo>
-                <a:lnTo>
-                  <a:pt x="4640" y="2667"/>
-                </a:lnTo>
-                <a:lnTo>
-                  <a:pt x="4507" y="2677"/>
-                </a:lnTo>
-                <a:lnTo>
-                  <a:pt x="4375" y="2689"/>
-                </a:lnTo>
-                <a:lnTo>
-                  <a:pt x="4242" y="2703"/>
-                </a:lnTo>
-                <a:lnTo>
-                  <a:pt x="4110" y="2717"/>
-                </a:lnTo>
-                <a:lnTo>
-                  <a:pt x="3977" y="2733"/>
-                </a:lnTo>
-                <a:lnTo>
-                  <a:pt x="3844" y="2750"/>
-                </a:lnTo>
-                <a:lnTo>
-                  <a:pt x="3712" y="2768"/>
-                </a:lnTo>
-                <a:lnTo>
-                  <a:pt x="3579" y="2787"/>
-                </a:lnTo>
-                <a:lnTo>
-                  <a:pt x="3447" y="2807"/>
-                </a:lnTo>
-                <a:lnTo>
-                  <a:pt x="3314" y="2828"/>
-                </a:lnTo>
-                <a:lnTo>
-                  <a:pt x="3182" y="2849"/>
-                </a:lnTo>
-                <a:lnTo>
-                  <a:pt x="3049" y="2872"/>
-                </a:lnTo>
-                <a:lnTo>
-                  <a:pt x="2917" y="2895"/>
-                </a:lnTo>
-                <a:lnTo>
-                  <a:pt x="2784" y="2918"/>
-                </a:lnTo>
-                <a:lnTo>
-                  <a:pt x="2652" y="2943"/>
-                </a:lnTo>
-                <a:lnTo>
-                  <a:pt x="2519" y="2967"/>
-                </a:lnTo>
-                <a:lnTo>
-                  <a:pt x="2386" y="2992"/>
-                </a:lnTo>
-                <a:lnTo>
-                  <a:pt x="2254" y="3017"/>
-                </a:lnTo>
-                <a:lnTo>
-                  <a:pt x="2121" y="3043"/>
-                </a:lnTo>
-                <a:lnTo>
-                  <a:pt x="1989" y="3068"/>
-                </a:lnTo>
-                <a:lnTo>
-                  <a:pt x="1724" y="3120"/>
-                </a:lnTo>
-                <a:lnTo>
-                  <a:pt x="1591" y="3146"/>
-                </a:lnTo>
-                <a:lnTo>
-                  <a:pt x="1193" y="3223"/>
-                </a:lnTo>
-                <a:lnTo>
-                  <a:pt x="1061" y="3249"/>
-                </a:lnTo>
-                <a:lnTo>
-                  <a:pt x="928" y="3274"/>
-                </a:lnTo>
-                <a:lnTo>
-                  <a:pt x="796" y="3299"/>
-                </a:lnTo>
-                <a:lnTo>
-                  <a:pt x="531" y="3350"/>
-                </a:lnTo>
-                <a:lnTo>
-                  <a:pt x="266" y="3399"/>
-                </a:lnTo>
-                <a:lnTo>
-                  <a:pt x="133" y="3423"/>
-                </a:lnTo>
-                <a:lnTo>
-                  <a:pt x="0" y="3448"/>
-                </a:lnTo>
-                <a:lnTo>
-                  <a:pt x="0" y="1233"/>
+                  <a:pt x="7822" y="2707"/>
+                </a:lnTo>
+                <a:lnTo>
+                  <a:pt x="7689" y="2697"/>
+                </a:lnTo>
+                <a:lnTo>
+                  <a:pt x="7557" y="2686"/>
+                </a:lnTo>
+                <a:lnTo>
+                  <a:pt x="7424" y="2676"/>
+                </a:lnTo>
+                <a:lnTo>
+                  <a:pt x="7292" y="2666"/>
+                </a:lnTo>
+                <a:lnTo>
+                  <a:pt x="7159" y="2656"/>
+                </a:lnTo>
+                <a:lnTo>
+                  <a:pt x="7027" y="2647"/>
+                </a:lnTo>
+                <a:lnTo>
+                  <a:pt x="6894" y="2638"/>
+                </a:lnTo>
+                <a:lnTo>
+                  <a:pt x="6762" y="2629"/>
+                </a:lnTo>
+                <a:lnTo>
+                  <a:pt x="6629" y="2622"/>
+                </a:lnTo>
+                <a:lnTo>
+                  <a:pt x="6497" y="2614"/>
+                </a:lnTo>
+                <a:lnTo>
+                  <a:pt x="6364" y="2608"/>
+                </a:lnTo>
+                <a:lnTo>
+                  <a:pt x="6231" y="2602"/>
+                </a:lnTo>
+                <a:lnTo>
+                  <a:pt x="6099" y="2596"/>
+                </a:lnTo>
+                <a:lnTo>
+                  <a:pt x="5966" y="2592"/>
+                </a:lnTo>
+                <a:lnTo>
+                  <a:pt x="5834" y="2588"/>
+                </a:lnTo>
+                <a:lnTo>
+                  <a:pt x="5701" y="2585"/>
+                </a:lnTo>
+                <a:lnTo>
+                  <a:pt x="5569" y="2583"/>
+                </a:lnTo>
+                <a:lnTo>
+                  <a:pt x="5436" y="2583"/>
+                </a:lnTo>
+                <a:lnTo>
+                  <a:pt x="5303" y="2583"/>
+                </a:lnTo>
+                <a:lnTo>
+                  <a:pt x="5170" y="2584"/>
+                </a:lnTo>
+                <a:lnTo>
+                  <a:pt x="5037" y="2587"/>
+                </a:lnTo>
+                <a:lnTo>
+                  <a:pt x="4905" y="2591"/>
+                </a:lnTo>
+                <a:lnTo>
+                  <a:pt x="4772" y="2596"/>
+                </a:lnTo>
+                <a:lnTo>
+                  <a:pt x="4640" y="2602"/>
+                </a:lnTo>
+                <a:lnTo>
+                  <a:pt x="4507" y="2610"/>
+                </a:lnTo>
+                <a:lnTo>
+                  <a:pt x="4375" y="2619"/>
+                </a:lnTo>
+                <a:lnTo>
+                  <a:pt x="4242" y="2630"/>
+                </a:lnTo>
+                <a:lnTo>
+                  <a:pt x="4110" y="2642"/>
+                </a:lnTo>
+                <a:lnTo>
+                  <a:pt x="3977" y="2654"/>
+                </a:lnTo>
+                <a:lnTo>
+                  <a:pt x="3844" y="2669"/>
+                </a:lnTo>
+                <a:lnTo>
+                  <a:pt x="3712" y="2684"/>
+                </a:lnTo>
+                <a:lnTo>
+                  <a:pt x="3579" y="2701"/>
+                </a:lnTo>
+                <a:lnTo>
+                  <a:pt x="3447" y="2718"/>
+                </a:lnTo>
+                <a:lnTo>
+                  <a:pt x="3314" y="2737"/>
+                </a:lnTo>
+                <a:lnTo>
+                  <a:pt x="3182" y="2757"/>
+                </a:lnTo>
+                <a:lnTo>
+                  <a:pt x="3049" y="2777"/>
+                </a:lnTo>
+                <a:lnTo>
+                  <a:pt x="2917" y="2798"/>
+                </a:lnTo>
+                <a:lnTo>
+                  <a:pt x="2784" y="2820"/>
+                </a:lnTo>
+                <a:lnTo>
+                  <a:pt x="2652" y="2842"/>
+                </a:lnTo>
+                <a:lnTo>
+                  <a:pt x="2519" y="2865"/>
+                </a:lnTo>
+                <a:lnTo>
+                  <a:pt x="2386" y="2889"/>
+                </a:lnTo>
+                <a:lnTo>
+                  <a:pt x="2254" y="2912"/>
+                </a:lnTo>
+                <a:lnTo>
+                  <a:pt x="2121" y="2936"/>
+                </a:lnTo>
+                <a:lnTo>
+                  <a:pt x="1989" y="2961"/>
+                </a:lnTo>
+                <a:lnTo>
+                  <a:pt x="1856" y="2985"/>
+                </a:lnTo>
+                <a:lnTo>
+                  <a:pt x="1459" y="3060"/>
+                </a:lnTo>
+                <a:lnTo>
+                  <a:pt x="1326" y="3085"/>
+                </a:lnTo>
+                <a:lnTo>
+                  <a:pt x="1193" y="3109"/>
+                </a:lnTo>
+                <a:lnTo>
+                  <a:pt x="1061" y="3134"/>
+                </a:lnTo>
+                <a:lnTo>
+                  <a:pt x="928" y="3159"/>
+                </a:lnTo>
+                <a:lnTo>
+                  <a:pt x="796" y="3184"/>
+                </a:lnTo>
+                <a:lnTo>
+                  <a:pt x="531" y="3233"/>
+                </a:lnTo>
+                <a:lnTo>
+                  <a:pt x="398" y="3257"/>
+                </a:lnTo>
+                <a:lnTo>
+                  <a:pt x="266" y="3282"/>
+                </a:lnTo>
+                <a:lnTo>
+                  <a:pt x="133" y="3306"/>
+                </a:lnTo>
+                <a:lnTo>
+                  <a:pt x="0" y="3330"/>
+                </a:lnTo>
+                <a:lnTo>
+                  <a:pt x="0" y="942"/>
                 </a:lnTo>
                 <a:close/>
               </a:path>
@@ -6130,8 +6130,8 @@
         </p:nvSpPr>
         <p:spPr>
           <a:xfrm>
-            <a:off x="5102280" y="1260720"/>
-            <a:ext cx="2815920" cy="1009440"/>
+            <a:off x="5102280" y="1246680"/>
+            <a:ext cx="2815920" cy="1026720"/>
           </a:xfrm>
           <a:custGeom>
             <a:avLst/>
@@ -6139,183 +6139,183 @@
             <a:ahLst/>
             <a:rect l="0" t="0" r="r" b="b"/>
             <a:pathLst>
-              <a:path fill="none" w="7822" h="2804">
+              <a:path fill="none" w="7822" h="2852">
                 <a:moveTo>
-                  <a:pt x="0" y="2804"/>
+                  <a:pt x="0" y="2852"/>
                 </a:moveTo>
                 <a:lnTo>
-                  <a:pt x="133" y="2790"/>
-                </a:lnTo>
-                <a:lnTo>
-                  <a:pt x="266" y="2775"/>
-                </a:lnTo>
-                <a:lnTo>
-                  <a:pt x="398" y="2760"/>
-                </a:lnTo>
-                <a:lnTo>
-                  <a:pt x="531" y="2745"/>
-                </a:lnTo>
-                <a:lnTo>
-                  <a:pt x="663" y="2729"/>
-                </a:lnTo>
-                <a:lnTo>
-                  <a:pt x="796" y="2712"/>
-                </a:lnTo>
-                <a:lnTo>
-                  <a:pt x="928" y="2695"/>
-                </a:lnTo>
-                <a:lnTo>
-                  <a:pt x="1061" y="2677"/>
-                </a:lnTo>
-                <a:lnTo>
-                  <a:pt x="1193" y="2658"/>
-                </a:lnTo>
-                <a:lnTo>
-                  <a:pt x="1326" y="2639"/>
-                </a:lnTo>
-                <a:lnTo>
-                  <a:pt x="1459" y="2619"/>
-                </a:lnTo>
-                <a:lnTo>
-                  <a:pt x="1591" y="2598"/>
-                </a:lnTo>
-                <a:lnTo>
-                  <a:pt x="1724" y="2576"/>
-                </a:lnTo>
-                <a:lnTo>
-                  <a:pt x="1856" y="2554"/>
-                </a:lnTo>
-                <a:lnTo>
-                  <a:pt x="1989" y="2531"/>
-                </a:lnTo>
-                <a:lnTo>
-                  <a:pt x="2121" y="2507"/>
-                </a:lnTo>
-                <a:lnTo>
-                  <a:pt x="2254" y="2482"/>
-                </a:lnTo>
-                <a:lnTo>
-                  <a:pt x="2386" y="2456"/>
-                </a:lnTo>
-                <a:lnTo>
-                  <a:pt x="2519" y="2430"/>
-                </a:lnTo>
-                <a:lnTo>
-                  <a:pt x="2652" y="2402"/>
-                </a:lnTo>
-                <a:lnTo>
-                  <a:pt x="2784" y="2373"/>
-                </a:lnTo>
-                <a:lnTo>
-                  <a:pt x="2917" y="2344"/>
-                </a:lnTo>
-                <a:lnTo>
-                  <a:pt x="3049" y="2313"/>
-                </a:lnTo>
-                <a:lnTo>
-                  <a:pt x="3182" y="2281"/>
-                </a:lnTo>
-                <a:lnTo>
-                  <a:pt x="3314" y="2248"/>
-                </a:lnTo>
-                <a:lnTo>
-                  <a:pt x="3447" y="2213"/>
-                </a:lnTo>
-                <a:lnTo>
-                  <a:pt x="3579" y="2178"/>
-                </a:lnTo>
-                <a:lnTo>
-                  <a:pt x="3712" y="2141"/>
-                </a:lnTo>
-                <a:lnTo>
-                  <a:pt x="3844" y="2102"/>
-                </a:lnTo>
-                <a:lnTo>
-                  <a:pt x="3977" y="2063"/>
-                </a:lnTo>
-                <a:lnTo>
-                  <a:pt x="4110" y="2022"/>
-                </a:lnTo>
-                <a:lnTo>
-                  <a:pt x="4242" y="1979"/>
-                </a:lnTo>
-                <a:lnTo>
-                  <a:pt x="4375" y="1935"/>
-                </a:lnTo>
-                <a:lnTo>
-                  <a:pt x="4507" y="1889"/>
-                </a:lnTo>
-                <a:lnTo>
-                  <a:pt x="4640" y="1842"/>
-                </a:lnTo>
-                <a:lnTo>
-                  <a:pt x="4772" y="1792"/>
-                </a:lnTo>
-                <a:lnTo>
-                  <a:pt x="4905" y="1741"/>
-                </a:lnTo>
-                <a:lnTo>
-                  <a:pt x="5037" y="1689"/>
-                </a:lnTo>
-                <a:lnTo>
-                  <a:pt x="5170" y="1634"/>
-                </a:lnTo>
-                <a:lnTo>
-                  <a:pt x="5303" y="1577"/>
-                </a:lnTo>
-                <a:lnTo>
-                  <a:pt x="5436" y="1518"/>
-                </a:lnTo>
-                <a:lnTo>
-                  <a:pt x="5569" y="1457"/>
-                </a:lnTo>
-                <a:lnTo>
-                  <a:pt x="5701" y="1394"/>
-                </a:lnTo>
-                <a:lnTo>
-                  <a:pt x="5834" y="1328"/>
-                </a:lnTo>
-                <a:lnTo>
-                  <a:pt x="5966" y="1260"/>
-                </a:lnTo>
-                <a:lnTo>
-                  <a:pt x="6099" y="1190"/>
-                </a:lnTo>
-                <a:lnTo>
-                  <a:pt x="6231" y="1117"/>
-                </a:lnTo>
-                <a:lnTo>
-                  <a:pt x="6364" y="1041"/>
-                </a:lnTo>
-                <a:lnTo>
-                  <a:pt x="6497" y="962"/>
-                </a:lnTo>
-                <a:lnTo>
-                  <a:pt x="6629" y="881"/>
-                </a:lnTo>
-                <a:lnTo>
-                  <a:pt x="6762" y="797"/>
-                </a:lnTo>
-                <a:lnTo>
-                  <a:pt x="6894" y="709"/>
-                </a:lnTo>
-                <a:lnTo>
-                  <a:pt x="7027" y="617"/>
-                </a:lnTo>
-                <a:lnTo>
-                  <a:pt x="7159" y="524"/>
-                </a:lnTo>
-                <a:lnTo>
-                  <a:pt x="7292" y="426"/>
-                </a:lnTo>
-                <a:lnTo>
-                  <a:pt x="7424" y="325"/>
-                </a:lnTo>
-                <a:lnTo>
-                  <a:pt x="7557" y="221"/>
-                </a:lnTo>
-                <a:lnTo>
-                  <a:pt x="7689" y="112"/>
+                  <a:pt x="133" y="2838"/>
+                </a:lnTo>
+                <a:lnTo>
+                  <a:pt x="266" y="2824"/>
+                </a:lnTo>
+                <a:lnTo>
+                  <a:pt x="398" y="2810"/>
+                </a:lnTo>
+                <a:lnTo>
+                  <a:pt x="531" y="2795"/>
+                </a:lnTo>
+                <a:lnTo>
+                  <a:pt x="663" y="2779"/>
+                </a:lnTo>
+                <a:lnTo>
+                  <a:pt x="796" y="2763"/>
+                </a:lnTo>
+                <a:lnTo>
+                  <a:pt x="928" y="2746"/>
+                </a:lnTo>
+                <a:lnTo>
+                  <a:pt x="1061" y="2728"/>
+                </a:lnTo>
+                <a:lnTo>
+                  <a:pt x="1193" y="2710"/>
+                </a:lnTo>
+                <a:lnTo>
+                  <a:pt x="1326" y="2691"/>
+                </a:lnTo>
+                <a:lnTo>
+                  <a:pt x="1459" y="2671"/>
+                </a:lnTo>
+                <a:lnTo>
+                  <a:pt x="1591" y="2651"/>
+                </a:lnTo>
+                <a:lnTo>
+                  <a:pt x="1724" y="2630"/>
+                </a:lnTo>
+                <a:lnTo>
+                  <a:pt x="1856" y="2607"/>
+                </a:lnTo>
+                <a:lnTo>
+                  <a:pt x="1989" y="2585"/>
+                </a:lnTo>
+                <a:lnTo>
+                  <a:pt x="2121" y="2561"/>
+                </a:lnTo>
+                <a:lnTo>
+                  <a:pt x="2254" y="2536"/>
+                </a:lnTo>
+                <a:lnTo>
+                  <a:pt x="2386" y="2511"/>
+                </a:lnTo>
+                <a:lnTo>
+                  <a:pt x="2519" y="2484"/>
+                </a:lnTo>
+                <a:lnTo>
+                  <a:pt x="2652" y="2457"/>
+                </a:lnTo>
+                <a:lnTo>
+                  <a:pt x="2784" y="2428"/>
+                </a:lnTo>
+                <a:lnTo>
+                  <a:pt x="2917" y="2399"/>
+                </a:lnTo>
+                <a:lnTo>
+                  <a:pt x="3049" y="2368"/>
+                </a:lnTo>
+                <a:lnTo>
+                  <a:pt x="3182" y="2336"/>
+                </a:lnTo>
+                <a:lnTo>
+                  <a:pt x="3314" y="2303"/>
+                </a:lnTo>
+                <a:lnTo>
+                  <a:pt x="3447" y="2269"/>
+                </a:lnTo>
+                <a:lnTo>
+                  <a:pt x="3579" y="2233"/>
+                </a:lnTo>
+                <a:lnTo>
+                  <a:pt x="3712" y="2196"/>
+                </a:lnTo>
+                <a:lnTo>
+                  <a:pt x="3844" y="2158"/>
+                </a:lnTo>
+                <a:lnTo>
+                  <a:pt x="3977" y="2118"/>
+                </a:lnTo>
+                <a:lnTo>
+                  <a:pt x="4110" y="2076"/>
+                </a:lnTo>
+                <a:lnTo>
+                  <a:pt x="4242" y="2033"/>
+                </a:lnTo>
+                <a:lnTo>
+                  <a:pt x="4375" y="1989"/>
+                </a:lnTo>
+                <a:lnTo>
+                  <a:pt x="4507" y="1943"/>
+                </a:lnTo>
+                <a:lnTo>
+                  <a:pt x="4640" y="1895"/>
+                </a:lnTo>
+                <a:lnTo>
+                  <a:pt x="4772" y="1845"/>
+                </a:lnTo>
+                <a:lnTo>
+                  <a:pt x="4905" y="1793"/>
+                </a:lnTo>
+                <a:lnTo>
+                  <a:pt x="5037" y="1739"/>
+                </a:lnTo>
+                <a:lnTo>
+                  <a:pt x="5170" y="1684"/>
+                </a:lnTo>
+                <a:lnTo>
+                  <a:pt x="5303" y="1626"/>
+                </a:lnTo>
+                <a:lnTo>
+                  <a:pt x="5436" y="1566"/>
+                </a:lnTo>
+                <a:lnTo>
+                  <a:pt x="5569" y="1504"/>
+                </a:lnTo>
+                <a:lnTo>
+                  <a:pt x="5701" y="1439"/>
+                </a:lnTo>
+                <a:lnTo>
+                  <a:pt x="5834" y="1372"/>
+                </a:lnTo>
+                <a:lnTo>
+                  <a:pt x="5966" y="1302"/>
+                </a:lnTo>
+                <a:lnTo>
+                  <a:pt x="6099" y="1230"/>
+                </a:lnTo>
+                <a:lnTo>
+                  <a:pt x="6231" y="1155"/>
+                </a:lnTo>
+                <a:lnTo>
+                  <a:pt x="6364" y="1078"/>
+                </a:lnTo>
+                <a:lnTo>
+                  <a:pt x="6497" y="997"/>
+                </a:lnTo>
+                <a:lnTo>
+                  <a:pt x="6629" y="913"/>
+                </a:lnTo>
+                <a:lnTo>
+                  <a:pt x="6762" y="826"/>
+                </a:lnTo>
+                <a:lnTo>
+                  <a:pt x="6894" y="735"/>
+                </a:lnTo>
+                <a:lnTo>
+                  <a:pt x="7027" y="641"/>
+                </a:lnTo>
+                <a:lnTo>
+                  <a:pt x="7159" y="544"/>
+                </a:lnTo>
+                <a:lnTo>
+                  <a:pt x="7292" y="443"/>
+                </a:lnTo>
+                <a:lnTo>
+                  <a:pt x="7424" y="339"/>
+                </a:lnTo>
+                <a:lnTo>
+                  <a:pt x="7557" y="230"/>
+                </a:lnTo>
+                <a:lnTo>
+                  <a:pt x="7689" y="117"/>
                 </a:lnTo>
                 <a:lnTo>
                   <a:pt x="7822" y="0"/>
@@ -6354,8 +6354,8 @@
         </p:nvSpPr>
         <p:spPr>
           <a:xfrm>
-            <a:off x="5102280" y="1233000"/>
-            <a:ext cx="2815920" cy="846720"/>
+            <a:off x="5102280" y="1227960"/>
+            <a:ext cx="2815920" cy="851760"/>
           </a:xfrm>
           <a:custGeom>
             <a:avLst/>
@@ -6363,183 +6363,183 @@
             <a:ahLst/>
             <a:rect l="0" t="0" r="r" b="b"/>
             <a:pathLst>
-              <a:path fill="none" w="7822" h="2352">
+              <a:path fill="none" w="7822" h="2366">
                 <a:moveTo>
-                  <a:pt x="0" y="2352"/>
+                  <a:pt x="0" y="2366"/>
                 </a:moveTo>
                 <a:lnTo>
-                  <a:pt x="133" y="2332"/>
-                </a:lnTo>
-                <a:lnTo>
-                  <a:pt x="266" y="2312"/>
-                </a:lnTo>
-                <a:lnTo>
-                  <a:pt x="398" y="2291"/>
-                </a:lnTo>
-                <a:lnTo>
-                  <a:pt x="531" y="2270"/>
-                </a:lnTo>
-                <a:lnTo>
-                  <a:pt x="663" y="2248"/>
-                </a:lnTo>
-                <a:lnTo>
-                  <a:pt x="796" y="2226"/>
-                </a:lnTo>
-                <a:lnTo>
-                  <a:pt x="928" y="2203"/>
-                </a:lnTo>
-                <a:lnTo>
-                  <a:pt x="1061" y="2180"/>
-                </a:lnTo>
-                <a:lnTo>
-                  <a:pt x="1193" y="2157"/>
-                </a:lnTo>
-                <a:lnTo>
-                  <a:pt x="1326" y="2132"/>
-                </a:lnTo>
-                <a:lnTo>
-                  <a:pt x="1459" y="2108"/>
-                </a:lnTo>
-                <a:lnTo>
-                  <a:pt x="1591" y="2082"/>
-                </a:lnTo>
-                <a:lnTo>
-                  <a:pt x="1724" y="2057"/>
-                </a:lnTo>
-                <a:lnTo>
-                  <a:pt x="1856" y="2030"/>
-                </a:lnTo>
-                <a:lnTo>
-                  <a:pt x="1989" y="2003"/>
-                </a:lnTo>
-                <a:lnTo>
-                  <a:pt x="2121" y="1976"/>
-                </a:lnTo>
-                <a:lnTo>
-                  <a:pt x="2254" y="1947"/>
-                </a:lnTo>
-                <a:lnTo>
-                  <a:pt x="2386" y="1919"/>
-                </a:lnTo>
-                <a:lnTo>
-                  <a:pt x="2519" y="1889"/>
-                </a:lnTo>
-                <a:lnTo>
-                  <a:pt x="2652" y="1859"/>
-                </a:lnTo>
-                <a:lnTo>
-                  <a:pt x="2784" y="1829"/>
-                </a:lnTo>
-                <a:lnTo>
-                  <a:pt x="2917" y="1797"/>
-                </a:lnTo>
-                <a:lnTo>
-                  <a:pt x="3049" y="1765"/>
-                </a:lnTo>
-                <a:lnTo>
-                  <a:pt x="3182" y="1733"/>
-                </a:lnTo>
-                <a:lnTo>
-                  <a:pt x="3314" y="1699"/>
-                </a:lnTo>
-                <a:lnTo>
-                  <a:pt x="3447" y="1665"/>
-                </a:lnTo>
-                <a:lnTo>
-                  <a:pt x="3579" y="1630"/>
-                </a:lnTo>
-                <a:lnTo>
-                  <a:pt x="3712" y="1594"/>
-                </a:lnTo>
-                <a:lnTo>
-                  <a:pt x="3844" y="1558"/>
-                </a:lnTo>
-                <a:lnTo>
-                  <a:pt x="3977" y="1521"/>
-                </a:lnTo>
-                <a:lnTo>
-                  <a:pt x="4110" y="1482"/>
-                </a:lnTo>
-                <a:lnTo>
-                  <a:pt x="4242" y="1444"/>
-                </a:lnTo>
-                <a:lnTo>
-                  <a:pt x="4375" y="1404"/>
-                </a:lnTo>
-                <a:lnTo>
-                  <a:pt x="4507" y="1363"/>
-                </a:lnTo>
-                <a:lnTo>
-                  <a:pt x="4640" y="1322"/>
-                </a:lnTo>
-                <a:lnTo>
-                  <a:pt x="4772" y="1279"/>
-                </a:lnTo>
-                <a:lnTo>
-                  <a:pt x="4905" y="1236"/>
-                </a:lnTo>
-                <a:lnTo>
-                  <a:pt x="5037" y="1192"/>
-                </a:lnTo>
-                <a:lnTo>
-                  <a:pt x="5170" y="1146"/>
-                </a:lnTo>
-                <a:lnTo>
-                  <a:pt x="5303" y="1100"/>
-                </a:lnTo>
-                <a:lnTo>
-                  <a:pt x="5436" y="1053"/>
-                </a:lnTo>
-                <a:lnTo>
-                  <a:pt x="5569" y="1004"/>
-                </a:lnTo>
-                <a:lnTo>
-                  <a:pt x="5701" y="955"/>
-                </a:lnTo>
-                <a:lnTo>
-                  <a:pt x="5834" y="905"/>
-                </a:lnTo>
-                <a:lnTo>
-                  <a:pt x="5966" y="853"/>
-                </a:lnTo>
-                <a:lnTo>
-                  <a:pt x="6099" y="800"/>
-                </a:lnTo>
-                <a:lnTo>
-                  <a:pt x="6231" y="747"/>
-                </a:lnTo>
-                <a:lnTo>
-                  <a:pt x="6364" y="692"/>
-                </a:lnTo>
-                <a:lnTo>
-                  <a:pt x="6497" y="635"/>
-                </a:lnTo>
-                <a:lnTo>
-                  <a:pt x="6629" y="578"/>
-                </a:lnTo>
-                <a:lnTo>
-                  <a:pt x="6762" y="519"/>
-                </a:lnTo>
-                <a:lnTo>
-                  <a:pt x="6894" y="459"/>
-                </a:lnTo>
-                <a:lnTo>
-                  <a:pt x="7027" y="398"/>
-                </a:lnTo>
-                <a:lnTo>
-                  <a:pt x="7159" y="335"/>
-                </a:lnTo>
-                <a:lnTo>
-                  <a:pt x="7292" y="272"/>
-                </a:lnTo>
-                <a:lnTo>
-                  <a:pt x="7424" y="206"/>
-                </a:lnTo>
-                <a:lnTo>
-                  <a:pt x="7557" y="139"/>
-                </a:lnTo>
-                <a:lnTo>
-                  <a:pt x="7689" y="70"/>
+                  <a:pt x="133" y="2346"/>
+                </a:lnTo>
+                <a:lnTo>
+                  <a:pt x="266" y="2326"/>
+                </a:lnTo>
+                <a:lnTo>
+                  <a:pt x="398" y="2305"/>
+                </a:lnTo>
+                <a:lnTo>
+                  <a:pt x="531" y="2284"/>
+                </a:lnTo>
+                <a:lnTo>
+                  <a:pt x="663" y="2262"/>
+                </a:lnTo>
+                <a:lnTo>
+                  <a:pt x="796" y="2240"/>
+                </a:lnTo>
+                <a:lnTo>
+                  <a:pt x="928" y="2218"/>
+                </a:lnTo>
+                <a:lnTo>
+                  <a:pt x="1061" y="2195"/>
+                </a:lnTo>
+                <a:lnTo>
+                  <a:pt x="1193" y="2171"/>
+                </a:lnTo>
+                <a:lnTo>
+                  <a:pt x="1326" y="2147"/>
+                </a:lnTo>
+                <a:lnTo>
+                  <a:pt x="1459" y="2122"/>
+                </a:lnTo>
+                <a:lnTo>
+                  <a:pt x="1591" y="2097"/>
+                </a:lnTo>
+                <a:lnTo>
+                  <a:pt x="1724" y="2071"/>
+                </a:lnTo>
+                <a:lnTo>
+                  <a:pt x="1856" y="2044"/>
+                </a:lnTo>
+                <a:lnTo>
+                  <a:pt x="1989" y="2018"/>
+                </a:lnTo>
+                <a:lnTo>
+                  <a:pt x="2121" y="1990"/>
+                </a:lnTo>
+                <a:lnTo>
+                  <a:pt x="2254" y="1962"/>
+                </a:lnTo>
+                <a:lnTo>
+                  <a:pt x="2386" y="1933"/>
+                </a:lnTo>
+                <a:lnTo>
+                  <a:pt x="2519" y="1904"/>
+                </a:lnTo>
+                <a:lnTo>
+                  <a:pt x="2652" y="1873"/>
+                </a:lnTo>
+                <a:lnTo>
+                  <a:pt x="2784" y="1843"/>
+                </a:lnTo>
+                <a:lnTo>
+                  <a:pt x="2917" y="1811"/>
+                </a:lnTo>
+                <a:lnTo>
+                  <a:pt x="3049" y="1779"/>
+                </a:lnTo>
+                <a:lnTo>
+                  <a:pt x="3182" y="1746"/>
+                </a:lnTo>
+                <a:lnTo>
+                  <a:pt x="3314" y="1713"/>
+                </a:lnTo>
+                <a:lnTo>
+                  <a:pt x="3447" y="1678"/>
+                </a:lnTo>
+                <a:lnTo>
+                  <a:pt x="3579" y="1643"/>
+                </a:lnTo>
+                <a:lnTo>
+                  <a:pt x="3712" y="1608"/>
+                </a:lnTo>
+                <a:lnTo>
+                  <a:pt x="3844" y="1571"/>
+                </a:lnTo>
+                <a:lnTo>
+                  <a:pt x="3977" y="1534"/>
+                </a:lnTo>
+                <a:lnTo>
+                  <a:pt x="4110" y="1495"/>
+                </a:lnTo>
+                <a:lnTo>
+                  <a:pt x="4242" y="1456"/>
+                </a:lnTo>
+                <a:lnTo>
+                  <a:pt x="4375" y="1416"/>
+                </a:lnTo>
+                <a:lnTo>
+                  <a:pt x="4507" y="1375"/>
+                </a:lnTo>
+                <a:lnTo>
+                  <a:pt x="4640" y="1334"/>
+                </a:lnTo>
+                <a:lnTo>
+                  <a:pt x="4772" y="1291"/>
+                </a:lnTo>
+                <a:lnTo>
+                  <a:pt x="4905" y="1247"/>
+                </a:lnTo>
+                <a:lnTo>
+                  <a:pt x="5037" y="1203"/>
+                </a:lnTo>
+                <a:lnTo>
+                  <a:pt x="5170" y="1157"/>
+                </a:lnTo>
+                <a:lnTo>
+                  <a:pt x="5303" y="1110"/>
+                </a:lnTo>
+                <a:lnTo>
+                  <a:pt x="5436" y="1063"/>
+                </a:lnTo>
+                <a:lnTo>
+                  <a:pt x="5569" y="1014"/>
+                </a:lnTo>
+                <a:lnTo>
+                  <a:pt x="5701" y="964"/>
+                </a:lnTo>
+                <a:lnTo>
+                  <a:pt x="5834" y="913"/>
+                </a:lnTo>
+                <a:lnTo>
+                  <a:pt x="5966" y="862"/>
+                </a:lnTo>
+                <a:lnTo>
+                  <a:pt x="6099" y="809"/>
+                </a:lnTo>
+                <a:lnTo>
+                  <a:pt x="6231" y="754"/>
+                </a:lnTo>
+                <a:lnTo>
+                  <a:pt x="6364" y="699"/>
+                </a:lnTo>
+                <a:lnTo>
+                  <a:pt x="6497" y="642"/>
+                </a:lnTo>
+                <a:lnTo>
+                  <a:pt x="6629" y="584"/>
+                </a:lnTo>
+                <a:lnTo>
+                  <a:pt x="6762" y="525"/>
+                </a:lnTo>
+                <a:lnTo>
+                  <a:pt x="6894" y="464"/>
+                </a:lnTo>
+                <a:lnTo>
+                  <a:pt x="7027" y="402"/>
+                </a:lnTo>
+                <a:lnTo>
+                  <a:pt x="7159" y="339"/>
+                </a:lnTo>
+                <a:lnTo>
+                  <a:pt x="7292" y="274"/>
+                </a:lnTo>
+                <a:lnTo>
+                  <a:pt x="7424" y="208"/>
+                </a:lnTo>
+                <a:lnTo>
+                  <a:pt x="7557" y="141"/>
+                </a:lnTo>
+                <a:lnTo>
+                  <a:pt x="7689" y="71"/>
                 </a:lnTo>
                 <a:lnTo>
                   <a:pt x="7822" y="0"/>
@@ -6578,8 +6578,8 @@
         </p:nvSpPr>
         <p:spPr>
           <a:xfrm>
-            <a:off x="5102280" y="1202040"/>
-            <a:ext cx="2815920" cy="352800"/>
+            <a:off x="5102280" y="1206360"/>
+            <a:ext cx="2815920" cy="282240"/>
           </a:xfrm>
           <a:custGeom>
             <a:avLst/>
@@ -6587,129 +6587,132 @@
             <a:ahLst/>
             <a:rect l="0" t="0" r="r" b="b"/>
             <a:pathLst>
-              <a:path fill="none" w="7822" h="980">
+              <a:path fill="none" w="7822" h="784">
                 <a:moveTo>
-                  <a:pt x="0" y="980"/>
+                  <a:pt x="0" y="784"/>
                 </a:moveTo>
                 <a:lnTo>
-                  <a:pt x="133" y="966"/>
-                </a:lnTo>
-                <a:lnTo>
-                  <a:pt x="398" y="938"/>
-                </a:lnTo>
-                <a:lnTo>
-                  <a:pt x="663" y="909"/>
-                </a:lnTo>
-                <a:lnTo>
-                  <a:pt x="796" y="895"/>
-                </a:lnTo>
-                <a:lnTo>
-                  <a:pt x="928" y="881"/>
-                </a:lnTo>
-                <a:lnTo>
-                  <a:pt x="1061" y="866"/>
-                </a:lnTo>
-                <a:lnTo>
-                  <a:pt x="1193" y="851"/>
-                </a:lnTo>
-                <a:lnTo>
-                  <a:pt x="1459" y="822"/>
-                </a:lnTo>
-                <a:lnTo>
-                  <a:pt x="1724" y="792"/>
-                </a:lnTo>
-                <a:lnTo>
-                  <a:pt x="1856" y="777"/>
-                </a:lnTo>
-                <a:lnTo>
-                  <a:pt x="1989" y="762"/>
-                </a:lnTo>
-                <a:lnTo>
-                  <a:pt x="2121" y="747"/>
-                </a:lnTo>
-                <a:lnTo>
-                  <a:pt x="2254" y="732"/>
-                </a:lnTo>
-                <a:lnTo>
-                  <a:pt x="2519" y="701"/>
-                </a:lnTo>
-                <a:lnTo>
-                  <a:pt x="2652" y="685"/>
-                </a:lnTo>
-                <a:lnTo>
-                  <a:pt x="2917" y="654"/>
-                </a:lnTo>
-                <a:lnTo>
-                  <a:pt x="3182" y="622"/>
-                </a:lnTo>
-                <a:lnTo>
-                  <a:pt x="3314" y="606"/>
-                </a:lnTo>
-                <a:lnTo>
-                  <a:pt x="3579" y="574"/>
-                </a:lnTo>
-                <a:lnTo>
-                  <a:pt x="3977" y="524"/>
-                </a:lnTo>
-                <a:lnTo>
-                  <a:pt x="4242" y="491"/>
-                </a:lnTo>
-                <a:lnTo>
-                  <a:pt x="4375" y="474"/>
-                </a:lnTo>
-                <a:lnTo>
-                  <a:pt x="4507" y="457"/>
-                </a:lnTo>
-                <a:lnTo>
-                  <a:pt x="4905" y="406"/>
-                </a:lnTo>
-                <a:lnTo>
-                  <a:pt x="5170" y="371"/>
-                </a:lnTo>
-                <a:lnTo>
-                  <a:pt x="5303" y="354"/>
-                </a:lnTo>
-                <a:lnTo>
-                  <a:pt x="5436" y="336"/>
-                </a:lnTo>
-                <a:lnTo>
-                  <a:pt x="5569" y="319"/>
-                </a:lnTo>
-                <a:lnTo>
-                  <a:pt x="5701" y="301"/>
-                </a:lnTo>
-                <a:lnTo>
-                  <a:pt x="5834" y="283"/>
-                </a:lnTo>
-                <a:lnTo>
-                  <a:pt x="5966" y="265"/>
-                </a:lnTo>
-                <a:lnTo>
-                  <a:pt x="6231" y="229"/>
-                </a:lnTo>
-                <a:lnTo>
-                  <a:pt x="6364" y="210"/>
-                </a:lnTo>
-                <a:lnTo>
-                  <a:pt x="6497" y="192"/>
-                </a:lnTo>
-                <a:lnTo>
-                  <a:pt x="6629" y="173"/>
-                </a:lnTo>
-                <a:lnTo>
-                  <a:pt x="6894" y="136"/>
-                </a:lnTo>
-                <a:lnTo>
-                  <a:pt x="7027" y="117"/>
-                </a:lnTo>
-                <a:lnTo>
-                  <a:pt x="7292" y="78"/>
-                </a:lnTo>
-                <a:lnTo>
-                  <a:pt x="7557" y="39"/>
-                </a:lnTo>
-                <a:lnTo>
-                  <a:pt x="7689" y="20"/>
+                  <a:pt x="266" y="760"/>
+                </a:lnTo>
+                <a:lnTo>
+                  <a:pt x="398" y="749"/>
+                </a:lnTo>
+                <a:lnTo>
+                  <a:pt x="531" y="737"/>
+                </a:lnTo>
+                <a:lnTo>
+                  <a:pt x="663" y="725"/>
+                </a:lnTo>
+                <a:lnTo>
+                  <a:pt x="796" y="713"/>
+                </a:lnTo>
+                <a:lnTo>
+                  <a:pt x="928" y="701"/>
+                </a:lnTo>
+                <a:lnTo>
+                  <a:pt x="1061" y="689"/>
+                </a:lnTo>
+                <a:lnTo>
+                  <a:pt x="1193" y="677"/>
+                </a:lnTo>
+                <a:lnTo>
+                  <a:pt x="1591" y="641"/>
+                </a:lnTo>
+                <a:lnTo>
+                  <a:pt x="1724" y="629"/>
+                </a:lnTo>
+                <a:lnTo>
+                  <a:pt x="1856" y="616"/>
+                </a:lnTo>
+                <a:lnTo>
+                  <a:pt x="1989" y="604"/>
+                </a:lnTo>
+                <a:lnTo>
+                  <a:pt x="2121" y="592"/>
+                </a:lnTo>
+                <a:lnTo>
+                  <a:pt x="2519" y="554"/>
+                </a:lnTo>
+                <a:lnTo>
+                  <a:pt x="2784" y="529"/>
+                </a:lnTo>
+                <a:lnTo>
+                  <a:pt x="3182" y="490"/>
+                </a:lnTo>
+                <a:lnTo>
+                  <a:pt x="3314" y="477"/>
+                </a:lnTo>
+                <a:lnTo>
+                  <a:pt x="3447" y="464"/>
+                </a:lnTo>
+                <a:lnTo>
+                  <a:pt x="3712" y="438"/>
+                </a:lnTo>
+                <a:lnTo>
+                  <a:pt x="4110" y="398"/>
+                </a:lnTo>
+                <a:lnTo>
+                  <a:pt x="4242" y="385"/>
+                </a:lnTo>
+                <a:lnTo>
+                  <a:pt x="4375" y="372"/>
+                </a:lnTo>
+                <a:lnTo>
+                  <a:pt x="4507" y="358"/>
+                </a:lnTo>
+                <a:lnTo>
+                  <a:pt x="4640" y="345"/>
+                </a:lnTo>
+                <a:lnTo>
+                  <a:pt x="4772" y="331"/>
+                </a:lnTo>
+                <a:lnTo>
+                  <a:pt x="4905" y="317"/>
+                </a:lnTo>
+                <a:lnTo>
+                  <a:pt x="5170" y="290"/>
+                </a:lnTo>
+                <a:lnTo>
+                  <a:pt x="5303" y="276"/>
+                </a:lnTo>
+                <a:lnTo>
+                  <a:pt x="5436" y="262"/>
+                </a:lnTo>
+                <a:lnTo>
+                  <a:pt x="5569" y="248"/>
+                </a:lnTo>
+                <a:lnTo>
+                  <a:pt x="5834" y="220"/>
+                </a:lnTo>
+                <a:lnTo>
+                  <a:pt x="6099" y="192"/>
+                </a:lnTo>
+                <a:lnTo>
+                  <a:pt x="6364" y="162"/>
+                </a:lnTo>
+                <a:lnTo>
+                  <a:pt x="6497" y="147"/>
+                </a:lnTo>
+                <a:lnTo>
+                  <a:pt x="6629" y="133"/>
+                </a:lnTo>
+                <a:lnTo>
+                  <a:pt x="7027" y="89"/>
+                </a:lnTo>
+                <a:lnTo>
+                  <a:pt x="7159" y="74"/>
+                </a:lnTo>
+                <a:lnTo>
+                  <a:pt x="7292" y="60"/>
+                </a:lnTo>
+                <a:lnTo>
+                  <a:pt x="7424" y="45"/>
+                </a:lnTo>
+                <a:lnTo>
+                  <a:pt x="7557" y="30"/>
+                </a:lnTo>
+                <a:lnTo>
+                  <a:pt x="7689" y="15"/>
                 </a:lnTo>
                 <a:lnTo>
                   <a:pt x="7822" y="0"/>
@@ -6839,7 +6842,7 @@
         </p:nvSpPr>
         <p:spPr>
           <a:xfrm>
-            <a:off x="4777920" y="2356200"/>
+            <a:off x="4777920" y="2351160"/>
             <a:ext cx="142560" cy="102600"/>
           </a:xfrm>
           <a:prstGeom prst="rect">
@@ -6887,7 +6890,7 @@
         </p:nvSpPr>
         <p:spPr>
           <a:xfrm>
-            <a:off x="4777920" y="1830960"/>
+            <a:off x="4777920" y="1828800"/>
             <a:ext cx="142560" cy="102600"/>
           </a:xfrm>
           <a:prstGeom prst="rect">
@@ -6935,7 +6938,7 @@
         </p:nvSpPr>
         <p:spPr>
           <a:xfrm>
-            <a:off x="4777920" y="1305360"/>
+            <a:off x="4777920" y="1306440"/>
             <a:ext cx="142560" cy="102600"/>
           </a:xfrm>
           <a:prstGeom prst="rect">
@@ -6983,7 +6986,7 @@
         </p:nvSpPr>
         <p:spPr>
           <a:xfrm>
-            <a:off x="4930200" y="2406960"/>
+            <a:off x="4930200" y="2401920"/>
             <a:ext cx="31320" cy="0"/>
           </a:xfrm>
           <a:prstGeom prst="line">
@@ -7026,7 +7029,7 @@
         </p:nvSpPr>
         <p:spPr>
           <a:xfrm>
-            <a:off x="4930200" y="1881360"/>
+            <a:off x="4930200" y="1879560"/>
             <a:ext cx="31320" cy="0"/>
           </a:xfrm>
           <a:prstGeom prst="line">
@@ -7069,7 +7072,7 @@
         </p:nvSpPr>
         <p:spPr>
           <a:xfrm>
-            <a:off x="4930200" y="1355760"/>
+            <a:off x="4930200" y="1356840"/>
             <a:ext cx="31320" cy="0"/>
           </a:xfrm>
           <a:prstGeom prst="line">
@@ -7112,7 +7115,7 @@
         </p:nvSpPr>
         <p:spPr>
           <a:xfrm>
-            <a:off x="4930200" y="830520"/>
+            <a:off x="4930200" y="834480"/>
             <a:ext cx="31320" cy="0"/>
           </a:xfrm>
           <a:prstGeom prst="line">
@@ -7241,7 +7244,7 @@
         </p:nvSpPr>
         <p:spPr>
           <a:xfrm flipV="1">
-            <a:off x="5875560" y="2411280"/>
+            <a:off x="5875920" y="2411280"/>
             <a:ext cx="0" cy="31320"/>
           </a:xfrm>
           <a:prstGeom prst="line">
@@ -7284,7 +7287,7 @@
         </p:nvSpPr>
         <p:spPr>
           <a:xfrm flipV="1">
-            <a:off x="6565320" y="2411280"/>
+            <a:off x="6565680" y="2411280"/>
             <a:ext cx="0" cy="31320"/>
           </a:xfrm>
           <a:prstGeom prst="line">
@@ -7327,7 +7330,7 @@
         </p:nvSpPr>
         <p:spPr>
           <a:xfrm flipV="1">
-            <a:off x="7254720" y="2411280"/>
+            <a:off x="7255440" y="2411280"/>
             <a:ext cx="0" cy="31320"/>
           </a:xfrm>
           <a:prstGeom prst="line">
@@ -7370,7 +7373,7 @@
         </p:nvSpPr>
         <p:spPr>
           <a:xfrm flipV="1">
-            <a:off x="7944480" y="2411280"/>
+            <a:off x="7945200" y="2411280"/>
             <a:ext cx="0" cy="31320"/>
           </a:xfrm>
           <a:prstGeom prst="line">
@@ -7413,7 +7416,7 @@
         </p:nvSpPr>
         <p:spPr>
           <a:xfrm>
-            <a:off x="4777920" y="779760"/>
+            <a:off x="4777920" y="783720"/>
             <a:ext cx="142560" cy="102600"/>
           </a:xfrm>
           <a:prstGeom prst="rect">
@@ -7509,7 +7512,7 @@
         </p:nvSpPr>
         <p:spPr>
           <a:xfrm>
-            <a:off x="5831280" y="2455560"/>
+            <a:off x="5831640" y="2455560"/>
             <a:ext cx="101160" cy="102600"/>
           </a:xfrm>
           <a:prstGeom prst="rect">
@@ -7557,7 +7560,7 @@
         </p:nvSpPr>
         <p:spPr>
           <a:xfrm>
-            <a:off x="6540120" y="2455560"/>
+            <a:off x="6540480" y="2455560"/>
             <a:ext cx="101160" cy="102600"/>
           </a:xfrm>
           <a:prstGeom prst="rect">
@@ -7605,7 +7608,7 @@
         </p:nvSpPr>
         <p:spPr>
           <a:xfrm>
-            <a:off x="7229520" y="2455560"/>
+            <a:off x="7230240" y="2455560"/>
             <a:ext cx="101160" cy="102600"/>
           </a:xfrm>
           <a:prstGeom prst="rect">
@@ -7653,7 +7656,7 @@
         </p:nvSpPr>
         <p:spPr>
           <a:xfrm>
-            <a:off x="7919280" y="2455560"/>
+            <a:off x="7920000" y="2455560"/>
             <a:ext cx="101160" cy="102600"/>
           </a:xfrm>
           <a:prstGeom prst="rect">
@@ -8592,7 +8595,7 @@
         </p:nvSpPr>
         <p:spPr>
           <a:xfrm flipV="1">
-            <a:off x="1377000" y="3653280"/>
+            <a:off x="1372680" y="3653280"/>
             <a:ext cx="0" cy="1872360"/>
           </a:xfrm>
           <a:prstGeom prst="line">
@@ -8635,7 +8638,7 @@
         </p:nvSpPr>
         <p:spPr>
           <a:xfrm flipV="1">
-            <a:off x="1573200" y="3653280"/>
+            <a:off x="1546920" y="3653280"/>
             <a:ext cx="0" cy="1872360"/>
           </a:xfrm>
           <a:prstGeom prst="line">
@@ -8678,7 +8681,7 @@
         </p:nvSpPr>
         <p:spPr>
           <a:xfrm flipV="1">
-            <a:off x="1769760" y="3653280"/>
+            <a:off x="1721520" y="3653280"/>
             <a:ext cx="0" cy="1872360"/>
           </a:xfrm>
           <a:prstGeom prst="line">
@@ -8721,7 +8724,7 @@
         </p:nvSpPr>
         <p:spPr>
           <a:xfrm flipV="1">
-            <a:off x="1965960" y="3653280"/>
+            <a:off x="1896120" y="3653280"/>
             <a:ext cx="0" cy="1872360"/>
           </a:xfrm>
           <a:prstGeom prst="line">
@@ -8764,8 +8767,8 @@
         </p:nvSpPr>
         <p:spPr>
           <a:xfrm>
-            <a:off x="1377000" y="5113440"/>
-            <a:ext cx="564120" cy="290160"/>
+            <a:off x="1372680" y="5113440"/>
+            <a:ext cx="583200" cy="290160"/>
           </a:xfrm>
           <a:custGeom>
             <a:avLst/>
@@ -8773,15 +8776,15 @@
             <a:ahLst/>
             <a:rect l="0" t="0" r="r" b="b"/>
             <a:pathLst>
-              <a:path w="1567" h="806">
+              <a:path w="1620" h="806">
                 <a:moveTo>
                   <a:pt x="0" y="0"/>
                 </a:moveTo>
                 <a:lnTo>
-                  <a:pt x="1567" y="0"/>
-                </a:lnTo>
-                <a:lnTo>
-                  <a:pt x="1567" y="806"/>
+                  <a:pt x="1620" y="0"/>
+                </a:lnTo>
+                <a:lnTo>
+                  <a:pt x="1620" y="806"/>
                 </a:lnTo>
                 <a:lnTo>
                   <a:pt x="0" y="806"/>
@@ -8824,8 +8827,8 @@
         </p:nvSpPr>
         <p:spPr>
           <a:xfrm>
-            <a:off x="1377000" y="4667400"/>
-            <a:ext cx="578880" cy="290160"/>
+            <a:off x="1372680" y="4667400"/>
+            <a:ext cx="522360" cy="290160"/>
           </a:xfrm>
           <a:custGeom>
             <a:avLst/>
@@ -8833,15 +8836,15 @@
             <a:ahLst/>
             <a:rect l="0" t="0" r="r" b="b"/>
             <a:pathLst>
-              <a:path w="1608" h="806">
+              <a:path w="1451" h="806">
                 <a:moveTo>
                   <a:pt x="0" y="0"/>
                 </a:moveTo>
                 <a:lnTo>
-                  <a:pt x="1608" y="0"/>
-                </a:lnTo>
-                <a:lnTo>
-                  <a:pt x="1608" y="806"/>
+                  <a:pt x="1451" y="0"/>
+                </a:lnTo>
+                <a:lnTo>
+                  <a:pt x="1451" y="806"/>
                 </a:lnTo>
                 <a:lnTo>
                   <a:pt x="0" y="806"/>
@@ -8884,8 +8887,8 @@
         </p:nvSpPr>
         <p:spPr>
           <a:xfrm>
-            <a:off x="1377000" y="4221720"/>
-            <a:ext cx="127080" cy="290160"/>
+            <a:off x="1372680" y="4221720"/>
+            <a:ext cx="136440" cy="290160"/>
           </a:xfrm>
           <a:custGeom>
             <a:avLst/>
@@ -8893,15 +8896,15 @@
             <a:ahLst/>
             <a:rect l="0" t="0" r="r" b="b"/>
             <a:pathLst>
-              <a:path w="353" h="806">
+              <a:path w="379" h="806">
                 <a:moveTo>
                   <a:pt x="0" y="0"/>
                 </a:moveTo>
                 <a:lnTo>
-                  <a:pt x="353" y="0"/>
-                </a:lnTo>
-                <a:lnTo>
-                  <a:pt x="353" y="806"/>
+                  <a:pt x="379" y="0"/>
+                </a:lnTo>
+                <a:lnTo>
+                  <a:pt x="379" y="806"/>
                 </a:lnTo>
                 <a:lnTo>
                   <a:pt x="0" y="806"/>
@@ -8945,7 +8948,7 @@
         <p:spPr>
           <a:xfrm>
             <a:off x="1337760" y="3775680"/>
-            <a:ext cx="39600" cy="290160"/>
+            <a:ext cx="35280" cy="290160"/>
           </a:xfrm>
           <a:custGeom>
             <a:avLst/>
@@ -8953,15 +8956,15 @@
             <a:ahLst/>
             <a:rect l="0" t="0" r="r" b="b"/>
             <a:pathLst>
-              <a:path w="110" h="806">
+              <a:path w="98" h="806">
                 <a:moveTo>
                   <a:pt x="0" y="0"/>
                 </a:moveTo>
                 <a:lnTo>
-                  <a:pt x="110" y="0"/>
-                </a:lnTo>
-                <a:lnTo>
-                  <a:pt x="110" y="806"/>
+                  <a:pt x="98" y="0"/>
+                </a:lnTo>
+                <a:lnTo>
+                  <a:pt x="98" y="806"/>
                 </a:lnTo>
                 <a:lnTo>
                   <a:pt x="0" y="806"/>
@@ -9004,7 +9007,7 @@
         </p:nvSpPr>
         <p:spPr>
           <a:xfrm flipV="1">
-            <a:off x="1377000" y="3653280"/>
+            <a:off x="1372680" y="3653280"/>
             <a:ext cx="0" cy="1872360"/>
           </a:xfrm>
           <a:prstGeom prst="line">
@@ -9150,7 +9153,7 @@
         </p:nvSpPr>
         <p:spPr>
           <a:xfrm flipV="1">
-            <a:off x="2377800" y="3653280"/>
+            <a:off x="2377080" y="3653280"/>
             <a:ext cx="0" cy="1872360"/>
           </a:xfrm>
           <a:prstGeom prst="line">
@@ -9193,7 +9196,7 @@
         </p:nvSpPr>
         <p:spPr>
           <a:xfrm flipV="1">
-            <a:off x="2612160" y="3653280"/>
+            <a:off x="2610360" y="3653280"/>
             <a:ext cx="0" cy="1872360"/>
           </a:xfrm>
           <a:prstGeom prst="line">
@@ -9237,7 +9240,7 @@
         <p:spPr>
           <a:xfrm>
             <a:off x="2143800" y="5113440"/>
-            <a:ext cx="617760" cy="290160"/>
+            <a:ext cx="384840" cy="290160"/>
           </a:xfrm>
           <a:custGeom>
             <a:avLst/>
@@ -9245,15 +9248,15 @@
             <a:ahLst/>
             <a:rect l="0" t="0" r="r" b="b"/>
             <a:pathLst>
-              <a:path w="1716" h="806">
+              <a:path w="1069" h="806">
                 <a:moveTo>
                   <a:pt x="0" y="0"/>
                 </a:moveTo>
                 <a:lnTo>
-                  <a:pt x="1716" y="0"/>
-                </a:lnTo>
-                <a:lnTo>
-                  <a:pt x="1716" y="806"/>
+                  <a:pt x="1069" y="0"/>
+                </a:lnTo>
+                <a:lnTo>
+                  <a:pt x="1069" y="806"/>
                 </a:lnTo>
                 <a:lnTo>
                   <a:pt x="0" y="806"/>
@@ -9297,7 +9300,7 @@
         <p:spPr>
           <a:xfrm>
             <a:off x="2143800" y="4667400"/>
-            <a:ext cx="377640" cy="290160"/>
+            <a:ext cx="617760" cy="290160"/>
           </a:xfrm>
           <a:custGeom>
             <a:avLst/>
@@ -9305,15 +9308,15 @@
             <a:ahLst/>
             <a:rect l="0" t="0" r="r" b="b"/>
             <a:pathLst>
-              <a:path w="1049" h="806">
+              <a:path w="1716" h="806">
                 <a:moveTo>
                   <a:pt x="0" y="0"/>
                 </a:moveTo>
                 <a:lnTo>
-                  <a:pt x="1049" y="0"/>
-                </a:lnTo>
-                <a:lnTo>
-                  <a:pt x="1049" y="806"/>
+                  <a:pt x="1716" y="0"/>
+                </a:lnTo>
+                <a:lnTo>
+                  <a:pt x="1716" y="806"/>
                 </a:lnTo>
                 <a:lnTo>
                   <a:pt x="0" y="806"/>
@@ -9357,7 +9360,7 @@
         <p:spPr>
           <a:xfrm>
             <a:off x="2143800" y="4221720"/>
-            <a:ext cx="26640" cy="290160"/>
+            <a:ext cx="25920" cy="290160"/>
           </a:xfrm>
           <a:custGeom>
             <a:avLst/>
@@ -9365,15 +9368,15 @@
             <a:ahLst/>
             <a:rect l="0" t="0" r="r" b="b"/>
             <a:pathLst>
-              <a:path w="74" h="806">
+              <a:path w="72" h="806">
                 <a:moveTo>
                   <a:pt x="0" y="0"/>
                 </a:moveTo>
                 <a:lnTo>
-                  <a:pt x="74" y="0"/>
-                </a:lnTo>
-                <a:lnTo>
-                  <a:pt x="74" y="806"/>
+                  <a:pt x="72" y="0"/>
+                </a:lnTo>
+                <a:lnTo>
+                  <a:pt x="72" y="806"/>
                 </a:lnTo>
                 <a:lnTo>
                   <a:pt x="0" y="806"/>
@@ -9417,7 +9420,7 @@
         <p:spPr>
           <a:xfrm>
             <a:off x="2143800" y="3775680"/>
-            <a:ext cx="2520" cy="290160"/>
+            <a:ext cx="2880" cy="290160"/>
           </a:xfrm>
           <a:custGeom>
             <a:avLst/>
@@ -9425,15 +9428,15 @@
             <a:ahLst/>
             <a:rect l="0" t="0" r="r" b="b"/>
             <a:pathLst>
-              <a:path w="7" h="806">
+              <a:path w="8" h="806">
                 <a:moveTo>
                   <a:pt x="0" y="0"/>
                 </a:moveTo>
                 <a:lnTo>
-                  <a:pt x="7" y="0"/>
-                </a:lnTo>
-                <a:lnTo>
-                  <a:pt x="7" y="806"/>
+                  <a:pt x="8" y="0"/>
+                </a:lnTo>
+                <a:lnTo>
+                  <a:pt x="8" y="806"/>
                 </a:lnTo>
                 <a:lnTo>
                   <a:pt x="0" y="806"/>
@@ -9579,7 +9582,7 @@
         </p:nvSpPr>
         <p:spPr>
           <a:xfrm flipV="1">
-            <a:off x="2990160" y="3653280"/>
+            <a:off x="2964600" y="3653280"/>
             <a:ext cx="0" cy="1872360"/>
           </a:xfrm>
           <a:prstGeom prst="line">
@@ -9622,7 +9625,7 @@
         </p:nvSpPr>
         <p:spPr>
           <a:xfrm flipV="1">
-            <a:off x="3282120" y="3653280"/>
+            <a:off x="3227400" y="3653280"/>
             <a:ext cx="0" cy="1872360"/>
           </a:xfrm>
           <a:prstGeom prst="line">
@@ -9665,7 +9668,7 @@
         </p:nvSpPr>
         <p:spPr>
           <a:xfrm flipV="1">
-            <a:off x="3574080" y="3653280"/>
+            <a:off x="3490560" y="3653280"/>
             <a:ext cx="0" cy="1872360"/>
           </a:xfrm>
           <a:prstGeom prst="line">
@@ -9708,8 +9711,8 @@
         </p:nvSpPr>
         <p:spPr>
           <a:xfrm>
-            <a:off x="2990160" y="5113440"/>
-            <a:ext cx="413280" cy="290160"/>
+            <a:off x="2964600" y="5113440"/>
+            <a:ext cx="33840" cy="290160"/>
           </a:xfrm>
           <a:custGeom>
             <a:avLst/>
@@ -9717,15 +9720,15 @@
             <a:ahLst/>
             <a:rect l="0" t="0" r="r" b="b"/>
             <a:pathLst>
-              <a:path w="1148" h="806">
+              <a:path w="94" h="806">
                 <a:moveTo>
                   <a:pt x="0" y="0"/>
                 </a:moveTo>
                 <a:lnTo>
-                  <a:pt x="1148" y="0"/>
-                </a:lnTo>
-                <a:lnTo>
-                  <a:pt x="1148" y="806"/>
+                  <a:pt x="94" y="0"/>
+                </a:lnTo>
+                <a:lnTo>
+                  <a:pt x="94" y="806"/>
                 </a:lnTo>
                 <a:lnTo>
                   <a:pt x="0" y="806"/>
@@ -9768,8 +9771,8 @@
         </p:nvSpPr>
         <p:spPr>
           <a:xfrm>
-            <a:off x="2949480" y="4667400"/>
-            <a:ext cx="41040" cy="290160"/>
+            <a:off x="2964600" y="4667400"/>
+            <a:ext cx="453240" cy="290160"/>
           </a:xfrm>
           <a:custGeom>
             <a:avLst/>
@@ -9777,15 +9780,15 @@
             <a:ahLst/>
             <a:rect l="0" t="0" r="r" b="b"/>
             <a:pathLst>
-              <a:path w="114" h="806">
+              <a:path w="1259" h="806">
                 <a:moveTo>
                   <a:pt x="0" y="0"/>
                 </a:moveTo>
                 <a:lnTo>
-                  <a:pt x="114" y="0"/>
-                </a:lnTo>
-                <a:lnTo>
-                  <a:pt x="114" y="806"/>
+                  <a:pt x="1259" y="0"/>
+                </a:lnTo>
+                <a:lnTo>
+                  <a:pt x="1259" y="806"/>
                 </a:lnTo>
                 <a:lnTo>
                   <a:pt x="0" y="806"/>
@@ -9828,8 +9831,8 @@
         </p:nvSpPr>
         <p:spPr>
           <a:xfrm>
-            <a:off x="2990160" y="4221720"/>
-            <a:ext cx="577440" cy="290160"/>
+            <a:off x="2964600" y="4221720"/>
+            <a:ext cx="603000" cy="290160"/>
           </a:xfrm>
           <a:custGeom>
             <a:avLst/>
@@ -9837,15 +9840,15 @@
             <a:ahLst/>
             <a:rect l="0" t="0" r="r" b="b"/>
             <a:pathLst>
-              <a:path w="1604" h="806">
+              <a:path w="1675" h="806">
                 <a:moveTo>
                   <a:pt x="0" y="0"/>
                 </a:moveTo>
                 <a:lnTo>
-                  <a:pt x="1604" y="0"/>
-                </a:lnTo>
-                <a:lnTo>
-                  <a:pt x="1604" y="806"/>
+                  <a:pt x="1675" y="0"/>
+                </a:lnTo>
+                <a:lnTo>
+                  <a:pt x="1675" y="806"/>
                 </a:lnTo>
                 <a:lnTo>
                   <a:pt x="0" y="806"/>
@@ -9888,8 +9891,8 @@
         </p:nvSpPr>
         <p:spPr>
           <a:xfrm>
-            <a:off x="2975400" y="3775680"/>
-            <a:ext cx="15120" cy="290160"/>
+            <a:off x="2949480" y="3775680"/>
+            <a:ext cx="15480" cy="290160"/>
           </a:xfrm>
           <a:custGeom>
             <a:avLst/>
@@ -9897,15 +9900,15 @@
             <a:ahLst/>
             <a:rect l="0" t="0" r="r" b="b"/>
             <a:pathLst>
-              <a:path w="42" h="806">
+              <a:path w="43" h="806">
                 <a:moveTo>
                   <a:pt x="0" y="0"/>
                 </a:moveTo>
                 <a:lnTo>
-                  <a:pt x="42" y="0"/>
-                </a:lnTo>
-                <a:lnTo>
-                  <a:pt x="42" y="806"/>
+                  <a:pt x="43" y="0"/>
+                </a:lnTo>
+                <a:lnTo>
+                  <a:pt x="43" y="806"/>
                 </a:lnTo>
                 <a:lnTo>
                   <a:pt x="0" y="806"/>
@@ -9948,7 +9951,7 @@
         </p:nvSpPr>
         <p:spPr>
           <a:xfrm flipV="1">
-            <a:off x="2990160" y="3653280"/>
+            <a:off x="2964600" y="3653280"/>
             <a:ext cx="0" cy="1872360"/>
           </a:xfrm>
           <a:prstGeom prst="line">
@@ -10094,7 +10097,7 @@
         </p:nvSpPr>
         <p:spPr>
           <a:xfrm flipV="1">
-            <a:off x="3937680" y="3653280"/>
+            <a:off x="3928320" y="3653280"/>
             <a:ext cx="0" cy="1872360"/>
           </a:xfrm>
           <a:prstGeom prst="line">
@@ -10137,7 +10140,7 @@
         </p:nvSpPr>
         <p:spPr>
           <a:xfrm flipV="1">
-            <a:off x="4119840" y="3653280"/>
+            <a:off x="4101480" y="3653280"/>
             <a:ext cx="0" cy="1872360"/>
           </a:xfrm>
           <a:prstGeom prst="line">
@@ -10180,7 +10183,7 @@
         </p:nvSpPr>
         <p:spPr>
           <a:xfrm flipV="1">
-            <a:off x="4301640" y="3653280"/>
+            <a:off x="4274280" y="3653280"/>
             <a:ext cx="0" cy="1872360"/>
           </a:xfrm>
           <a:prstGeom prst="line">
@@ -10224,7 +10227,7 @@
         <p:spPr>
           <a:xfrm>
             <a:off x="3755520" y="5113440"/>
-            <a:ext cx="562320" cy="290160"/>
+            <a:ext cx="618120" cy="290160"/>
           </a:xfrm>
           <a:custGeom>
             <a:avLst/>
@@ -10232,15 +10235,15 @@
             <a:ahLst/>
             <a:rect l="0" t="0" r="r" b="b"/>
             <a:pathLst>
-              <a:path w="1562" h="806">
+              <a:path w="1717" h="806">
                 <a:moveTo>
                   <a:pt x="0" y="0"/>
                 </a:moveTo>
                 <a:lnTo>
-                  <a:pt x="1562" y="0"/>
-                </a:lnTo>
-                <a:lnTo>
-                  <a:pt x="1562" y="806"/>
+                  <a:pt x="1717" y="0"/>
+                </a:lnTo>
+                <a:lnTo>
+                  <a:pt x="1717" y="806"/>
                 </a:lnTo>
                 <a:lnTo>
                   <a:pt x="0" y="806"/>
@@ -10284,7 +10287,7 @@
         <p:spPr>
           <a:xfrm>
             <a:off x="3755520" y="4667400"/>
-            <a:ext cx="618120" cy="290160"/>
+            <a:ext cx="538200" cy="290160"/>
           </a:xfrm>
           <a:custGeom>
             <a:avLst/>
@@ -10292,15 +10295,15 @@
             <a:ahLst/>
             <a:rect l="0" t="0" r="r" b="b"/>
             <a:pathLst>
-              <a:path w="1717" h="806">
+              <a:path w="1495" h="806">
                 <a:moveTo>
                   <a:pt x="0" y="0"/>
                 </a:moveTo>
                 <a:lnTo>
-                  <a:pt x="1717" y="0"/>
-                </a:lnTo>
-                <a:lnTo>
-                  <a:pt x="1717" y="806"/>
+                  <a:pt x="1495" y="0"/>
+                </a:lnTo>
+                <a:lnTo>
+                  <a:pt x="1495" y="806"/>
                 </a:lnTo>
                 <a:lnTo>
                   <a:pt x="0" y="806"/>
@@ -10344,7 +10347,7 @@
         <p:spPr>
           <a:xfrm>
             <a:off x="3755520" y="4221720"/>
-            <a:ext cx="298080" cy="290160"/>
+            <a:ext cx="304200" cy="290160"/>
           </a:xfrm>
           <a:custGeom>
             <a:avLst/>
@@ -10352,15 +10355,15 @@
             <a:ahLst/>
             <a:rect l="0" t="0" r="r" b="b"/>
             <a:pathLst>
-              <a:path w="828" h="806">
+              <a:path w="845" h="806">
                 <a:moveTo>
                   <a:pt x="0" y="0"/>
                 </a:moveTo>
                 <a:lnTo>
-                  <a:pt x="828" y="0"/>
-                </a:lnTo>
-                <a:lnTo>
-                  <a:pt x="828" y="806"/>
+                  <a:pt x="845" y="0"/>
+                </a:lnTo>
+                <a:lnTo>
+                  <a:pt x="845" y="806"/>
                 </a:lnTo>
                 <a:lnTo>
                   <a:pt x="0" y="806"/>
@@ -10404,7 +10407,7 @@
         <p:spPr>
           <a:xfrm>
             <a:off x="3755520" y="3775680"/>
-            <a:ext cx="9360" cy="290160"/>
+            <a:ext cx="9720" cy="290160"/>
           </a:xfrm>
           <a:custGeom>
             <a:avLst/>
@@ -10412,15 +10415,15 @@
             <a:ahLst/>
             <a:rect l="0" t="0" r="r" b="b"/>
             <a:pathLst>
-              <a:path w="26" h="806">
+              <a:path w="27" h="806">
                 <a:moveTo>
                   <a:pt x="0" y="0"/>
                 </a:moveTo>
                 <a:lnTo>
-                  <a:pt x="26" y="0"/>
-                </a:lnTo>
-                <a:lnTo>
-                  <a:pt x="26" y="806"/>
+                  <a:pt x="27" y="0"/>
+                </a:lnTo>
+                <a:lnTo>
+                  <a:pt x="27" y="806"/>
                 </a:lnTo>
                 <a:lnTo>
                   <a:pt x="0" y="806"/>
@@ -10741,7 +10744,7 @@
         </p:nvSpPr>
         <p:spPr>
           <a:xfrm flipV="1">
-            <a:off x="1377000" y="5525640"/>
+            <a:off x="1372680" y="5525640"/>
             <a:ext cx="0" cy="31680"/>
           </a:xfrm>
           <a:prstGeom prst="line">
@@ -10784,7 +10787,7 @@
         </p:nvSpPr>
         <p:spPr>
           <a:xfrm flipV="1">
-            <a:off x="1573200" y="5525640"/>
+            <a:off x="1546920" y="5525640"/>
             <a:ext cx="0" cy="31680"/>
           </a:xfrm>
           <a:prstGeom prst="line">
@@ -10827,7 +10830,7 @@
         </p:nvSpPr>
         <p:spPr>
           <a:xfrm flipV="1">
-            <a:off x="1769760" y="5525640"/>
+            <a:off x="1721520" y="5525640"/>
             <a:ext cx="0" cy="31680"/>
           </a:xfrm>
           <a:prstGeom prst="line">
@@ -10870,7 +10873,7 @@
         </p:nvSpPr>
         <p:spPr>
           <a:xfrm flipV="1">
-            <a:off x="1965960" y="5525640"/>
+            <a:off x="1896120" y="5525640"/>
             <a:ext cx="0" cy="31680"/>
           </a:xfrm>
           <a:prstGeom prst="line">
@@ -10961,7 +10964,7 @@
         </p:nvSpPr>
         <p:spPr>
           <a:xfrm>
-            <a:off x="1351800" y="5570280"/>
+            <a:off x="1347480" y="5570280"/>
             <a:ext cx="101160" cy="102600"/>
           </a:xfrm>
           <a:prstGeom prst="rect">
@@ -11004,13 +11007,185 @@
       <p:sp>
         <p:nvSpPr>
           <p:cNvPr id="190" name=""/>
+          <p:cNvSpPr/>
+          <p:nvPr/>
+        </p:nvSpPr>
+        <p:spPr>
+          <a:xfrm>
+            <a:off x="2112840" y="5525640"/>
+            <a:ext cx="679320" cy="0"/>
+          </a:xfrm>
+          <a:prstGeom prst="line">
+            <a:avLst/>
+          </a:prstGeom>
+          <a:ln cap="sq" w="9360">
+            <a:solidFill>
+              <a:srgbClr val="333333"/>
+            </a:solidFill>
+            <a:round/>
+          </a:ln>
+        </p:spPr>
+        <p:style>
+          <a:lnRef idx="0"/>
+          <a:fillRef idx="0"/>
+          <a:effectRef idx="0"/>
+          <a:fontRef idx="minor"/>
+        </p:style>
+        <p:txBody>
+          <a:bodyPr lIns="4680" tIns="-4680" rIns="4680" bIns="-4680" anchor="t">
+            <a:noAutofit/>
+          </a:bodyPr>
+          <a:p>
+            <a:endParaRPr lang="en-US" sz="2400" b="0" u="none" strike="noStrike">
+              <a:solidFill>
+                <a:srgbClr val="000000"/>
+              </a:solidFill>
+              <a:effectLst/>
+              <a:uFillTx/>
+              <a:latin typeface="Times New Roman"/>
+            </a:endParaRPr>
+          </a:p>
+        </p:txBody>
+      </p:sp>
+      <p:sp>
+        <p:nvSpPr>
+          <p:cNvPr id="191" name=""/>
+          <p:cNvSpPr/>
+          <p:nvPr/>
+        </p:nvSpPr>
+        <p:spPr>
+          <a:xfrm flipV="1">
+            <a:off x="2143800" y="5525640"/>
+            <a:ext cx="0" cy="31680"/>
+          </a:xfrm>
+          <a:prstGeom prst="line">
+            <a:avLst/>
+          </a:prstGeom>
+          <a:ln w="7920">
+            <a:solidFill>
+              <a:srgbClr val="333333"/>
+            </a:solidFill>
+            <a:round/>
+          </a:ln>
+        </p:spPr>
+        <p:style>
+          <a:lnRef idx="0"/>
+          <a:fillRef idx="0"/>
+          <a:effectRef idx="0"/>
+          <a:fontRef idx="minor"/>
+        </p:style>
+        <p:txBody>
+          <a:bodyPr lIns="3960" tIns="3960" rIns="3960" bIns="3960" anchor="t">
+            <a:noAutofit/>
+          </a:bodyPr>
+          <a:p>
+            <a:endParaRPr lang="en-US" sz="2400" b="0" u="none" strike="noStrike">
+              <a:solidFill>
+                <a:srgbClr val="000000"/>
+              </a:solidFill>
+              <a:effectLst/>
+              <a:uFillTx/>
+              <a:latin typeface="Times New Roman"/>
+            </a:endParaRPr>
+          </a:p>
+        </p:txBody>
+      </p:sp>
+      <p:sp>
+        <p:nvSpPr>
+          <p:cNvPr id="192" name=""/>
+          <p:cNvSpPr/>
+          <p:nvPr/>
+        </p:nvSpPr>
+        <p:spPr>
+          <a:xfrm flipV="1">
+            <a:off x="2377080" y="5525640"/>
+            <a:ext cx="0" cy="31680"/>
+          </a:xfrm>
+          <a:prstGeom prst="line">
+            <a:avLst/>
+          </a:prstGeom>
+          <a:ln w="7920">
+            <a:solidFill>
+              <a:srgbClr val="333333"/>
+            </a:solidFill>
+            <a:round/>
+          </a:ln>
+        </p:spPr>
+        <p:style>
+          <a:lnRef idx="0"/>
+          <a:fillRef idx="0"/>
+          <a:effectRef idx="0"/>
+          <a:fontRef idx="minor"/>
+        </p:style>
+        <p:txBody>
+          <a:bodyPr lIns="3960" tIns="3960" rIns="3960" bIns="3960" anchor="t">
+            <a:noAutofit/>
+          </a:bodyPr>
+          <a:p>
+            <a:endParaRPr lang="en-US" sz="2400" b="0" u="none" strike="noStrike">
+              <a:solidFill>
+                <a:srgbClr val="000000"/>
+              </a:solidFill>
+              <a:effectLst/>
+              <a:uFillTx/>
+              <a:latin typeface="Times New Roman"/>
+            </a:endParaRPr>
+          </a:p>
+        </p:txBody>
+      </p:sp>
+      <p:sp>
+        <p:nvSpPr>
+          <p:cNvPr id="193" name=""/>
+          <p:cNvSpPr/>
+          <p:nvPr/>
+        </p:nvSpPr>
+        <p:spPr>
+          <a:xfrm flipV="1">
+            <a:off x="2610360" y="5525640"/>
+            <a:ext cx="0" cy="31680"/>
+          </a:xfrm>
+          <a:prstGeom prst="line">
+            <a:avLst/>
+          </a:prstGeom>
+          <a:ln w="7920">
+            <a:solidFill>
+              <a:srgbClr val="333333"/>
+            </a:solidFill>
+            <a:round/>
+          </a:ln>
+        </p:spPr>
+        <p:style>
+          <a:lnRef idx="0"/>
+          <a:fillRef idx="0"/>
+          <a:effectRef idx="0"/>
+          <a:fontRef idx="minor"/>
+        </p:style>
+        <p:txBody>
+          <a:bodyPr lIns="3960" tIns="3960" rIns="3960" bIns="3960" anchor="t">
+            <a:noAutofit/>
+          </a:bodyPr>
+          <a:p>
+            <a:endParaRPr lang="en-US" sz="2400" b="0" u="none" strike="noStrike">
+              <a:solidFill>
+                <a:srgbClr val="000000"/>
+              </a:solidFill>
+              <a:effectLst/>
+              <a:uFillTx/>
+              <a:latin typeface="Times New Roman"/>
+            </a:endParaRPr>
+          </a:p>
+        </p:txBody>
+      </p:sp>
+      <p:sp>
+        <p:nvSpPr>
+          <p:cNvPr id="194" name=""/>
           <p:cNvSpPr txBox="1"/>
           <p:nvPr/>
         </p:nvSpPr>
         <p:spPr>
           <a:xfrm>
-            <a:off x="1522800" y="5570280"/>
-            <a:ext cx="114120" cy="102600"/>
+            <a:off x="1496520" y="5570280"/>
+            <a:ext cx="398160" cy="102600"/>
           </a:xfrm>
           <a:prstGeom prst="rect">
             <a:avLst/>
@@ -11036,7 +11211,7 @@
                 <a:latin typeface="Arial"/>
                 <a:ea typeface="Arial"/>
               </a:rPr>
-              <a:t>10</a:t>
+              <a:t>10 20 30</a:t>
             </a:r>
             <a:endParaRPr lang="en-US" sz="800" b="0" u="none" strike="noStrike">
               <a:solidFill>
@@ -11051,275 +11226,7 @@
       </p:sp>
       <p:sp>
         <p:nvSpPr>
-          <p:cNvPr id="191" name=""/>
-          <p:cNvSpPr txBox="1"/>
-          <p:nvPr/>
-        </p:nvSpPr>
-        <p:spPr>
-          <a:xfrm>
-            <a:off x="1719000" y="5570280"/>
-            <a:ext cx="114120" cy="102600"/>
-          </a:xfrm>
-          <a:prstGeom prst="rect">
-            <a:avLst/>
-          </a:prstGeom>
-          <a:noFill/>
-          <a:ln w="0">
-            <a:noFill/>
-          </a:ln>
-        </p:spPr>
-        <p:txBody>
-          <a:bodyPr wrap="none" lIns="0" tIns="0" rIns="0" bIns="0" anchor="t">
-            <a:spAutoFit/>
-          </a:bodyPr>
-          <a:p>
-            <a:pPr/>
-            <a:r>
-              <a:rPr lang="en-US" sz="800" b="0" u="none" strike="noStrike">
-                <a:solidFill>
-                  <a:srgbClr val="262626"/>
-                </a:solidFill>
-                <a:effectLst/>
-                <a:uFillTx/>
-                <a:latin typeface="Arial"/>
-                <a:ea typeface="Arial"/>
-              </a:rPr>
-              <a:t>20</a:t>
-            </a:r>
-            <a:endParaRPr lang="en-US" sz="800" b="0" u="none" strike="noStrike">
-              <a:solidFill>
-                <a:srgbClr val="000000"/>
-              </a:solidFill>
-              <a:effectLst/>
-              <a:uFillTx/>
-              <a:latin typeface="Times New Roman"/>
-            </a:endParaRPr>
-          </a:p>
-        </p:txBody>
-      </p:sp>
-      <p:sp>
-        <p:nvSpPr>
-          <p:cNvPr id="192" name=""/>
-          <p:cNvSpPr/>
-          <p:nvPr/>
-        </p:nvSpPr>
-        <p:spPr>
-          <a:xfrm>
-            <a:off x="2112840" y="5525640"/>
-            <a:ext cx="679320" cy="0"/>
-          </a:xfrm>
-          <a:prstGeom prst="line">
-            <a:avLst/>
-          </a:prstGeom>
-          <a:ln cap="sq" w="9360">
-            <a:solidFill>
-              <a:srgbClr val="333333"/>
-            </a:solidFill>
-            <a:round/>
-          </a:ln>
-        </p:spPr>
-        <p:style>
-          <a:lnRef idx="0"/>
-          <a:fillRef idx="0"/>
-          <a:effectRef idx="0"/>
-          <a:fontRef idx="minor"/>
-        </p:style>
-        <p:txBody>
-          <a:bodyPr lIns="4680" tIns="-4680" rIns="4680" bIns="-4680" anchor="t">
-            <a:noAutofit/>
-          </a:bodyPr>
-          <a:p>
-            <a:endParaRPr lang="en-US" sz="2400" b="0" u="none" strike="noStrike">
-              <a:solidFill>
-                <a:srgbClr val="000000"/>
-              </a:solidFill>
-              <a:effectLst/>
-              <a:uFillTx/>
-              <a:latin typeface="Times New Roman"/>
-            </a:endParaRPr>
-          </a:p>
-        </p:txBody>
-      </p:sp>
-      <p:sp>
-        <p:nvSpPr>
-          <p:cNvPr id="193" name=""/>
-          <p:cNvSpPr/>
-          <p:nvPr/>
-        </p:nvSpPr>
-        <p:spPr>
-          <a:xfrm flipV="1">
-            <a:off x="2143800" y="5525640"/>
-            <a:ext cx="0" cy="31680"/>
-          </a:xfrm>
-          <a:prstGeom prst="line">
-            <a:avLst/>
-          </a:prstGeom>
-          <a:ln w="7920">
-            <a:solidFill>
-              <a:srgbClr val="333333"/>
-            </a:solidFill>
-            <a:round/>
-          </a:ln>
-        </p:spPr>
-        <p:style>
-          <a:lnRef idx="0"/>
-          <a:fillRef idx="0"/>
-          <a:effectRef idx="0"/>
-          <a:fontRef idx="minor"/>
-        </p:style>
-        <p:txBody>
-          <a:bodyPr lIns="3960" tIns="3960" rIns="3960" bIns="3960" anchor="t">
-            <a:noAutofit/>
-          </a:bodyPr>
-          <a:p>
-            <a:endParaRPr lang="en-US" sz="2400" b="0" u="none" strike="noStrike">
-              <a:solidFill>
-                <a:srgbClr val="000000"/>
-              </a:solidFill>
-              <a:effectLst/>
-              <a:uFillTx/>
-              <a:latin typeface="Times New Roman"/>
-            </a:endParaRPr>
-          </a:p>
-        </p:txBody>
-      </p:sp>
-      <p:sp>
-        <p:nvSpPr>
-          <p:cNvPr id="194" name=""/>
-          <p:cNvSpPr/>
-          <p:nvPr/>
-        </p:nvSpPr>
-        <p:spPr>
-          <a:xfrm flipV="1">
-            <a:off x="2377800" y="5525640"/>
-            <a:ext cx="0" cy="31680"/>
-          </a:xfrm>
-          <a:prstGeom prst="line">
-            <a:avLst/>
-          </a:prstGeom>
-          <a:ln w="7920">
-            <a:solidFill>
-              <a:srgbClr val="333333"/>
-            </a:solidFill>
-            <a:round/>
-          </a:ln>
-        </p:spPr>
-        <p:style>
-          <a:lnRef idx="0"/>
-          <a:fillRef idx="0"/>
-          <a:effectRef idx="0"/>
-          <a:fontRef idx="minor"/>
-        </p:style>
-        <p:txBody>
-          <a:bodyPr lIns="3960" tIns="3960" rIns="3960" bIns="3960" anchor="t">
-            <a:noAutofit/>
-          </a:bodyPr>
-          <a:p>
-            <a:endParaRPr lang="en-US" sz="2400" b="0" u="none" strike="noStrike">
-              <a:solidFill>
-                <a:srgbClr val="000000"/>
-              </a:solidFill>
-              <a:effectLst/>
-              <a:uFillTx/>
-              <a:latin typeface="Times New Roman"/>
-            </a:endParaRPr>
-          </a:p>
-        </p:txBody>
-      </p:sp>
-      <p:sp>
-        <p:nvSpPr>
           <p:cNvPr id="195" name=""/>
-          <p:cNvSpPr/>
-          <p:nvPr/>
-        </p:nvSpPr>
-        <p:spPr>
-          <a:xfrm flipV="1">
-            <a:off x="2612160" y="5525640"/>
-            <a:ext cx="0" cy="31680"/>
-          </a:xfrm>
-          <a:prstGeom prst="line">
-            <a:avLst/>
-          </a:prstGeom>
-          <a:ln w="7920">
-            <a:solidFill>
-              <a:srgbClr val="333333"/>
-            </a:solidFill>
-            <a:round/>
-          </a:ln>
-        </p:spPr>
-        <p:style>
-          <a:lnRef idx="0"/>
-          <a:fillRef idx="0"/>
-          <a:effectRef idx="0"/>
-          <a:fontRef idx="minor"/>
-        </p:style>
-        <p:txBody>
-          <a:bodyPr lIns="3960" tIns="3960" rIns="3960" bIns="3960" anchor="t">
-            <a:noAutofit/>
-          </a:bodyPr>
-          <a:p>
-            <a:endParaRPr lang="en-US" sz="2400" b="0" u="none" strike="noStrike">
-              <a:solidFill>
-                <a:srgbClr val="000000"/>
-              </a:solidFill>
-              <a:effectLst/>
-              <a:uFillTx/>
-              <a:latin typeface="Times New Roman"/>
-            </a:endParaRPr>
-          </a:p>
-        </p:txBody>
-      </p:sp>
-      <p:sp>
-        <p:nvSpPr>
-          <p:cNvPr id="196" name=""/>
-          <p:cNvSpPr txBox="1"/>
-          <p:nvPr/>
-        </p:nvSpPr>
-        <p:spPr>
-          <a:xfrm>
-            <a:off x="1915560" y="5570280"/>
-            <a:ext cx="114120" cy="102600"/>
-          </a:xfrm>
-          <a:prstGeom prst="rect">
-            <a:avLst/>
-          </a:prstGeom>
-          <a:noFill/>
-          <a:ln w="0">
-            <a:noFill/>
-          </a:ln>
-        </p:spPr>
-        <p:txBody>
-          <a:bodyPr wrap="none" lIns="0" tIns="0" rIns="0" bIns="0" anchor="t">
-            <a:spAutoFit/>
-          </a:bodyPr>
-          <a:p>
-            <a:pPr/>
-            <a:r>
-              <a:rPr lang="en-US" sz="800" b="0" u="none" strike="noStrike">
-                <a:solidFill>
-                  <a:srgbClr val="262626"/>
-                </a:solidFill>
-                <a:effectLst/>
-                <a:uFillTx/>
-                <a:latin typeface="Arial"/>
-                <a:ea typeface="Arial"/>
-              </a:rPr>
-              <a:t>30</a:t>
-            </a:r>
-            <a:endParaRPr lang="en-US" sz="800" b="0" u="none" strike="noStrike">
-              <a:solidFill>
-                <a:srgbClr val="000000"/>
-              </a:solidFill>
-              <a:effectLst/>
-              <a:uFillTx/>
-              <a:latin typeface="Times New Roman"/>
-            </a:endParaRPr>
-          </a:p>
-        </p:txBody>
-      </p:sp>
-      <p:sp>
-        <p:nvSpPr>
-          <p:cNvPr id="197" name=""/>
           <p:cNvSpPr txBox="1"/>
           <p:nvPr/>
         </p:nvSpPr>
@@ -11367,7 +11274,7 @@
       </p:sp>
       <p:sp>
         <p:nvSpPr>
-          <p:cNvPr id="198" name=""/>
+          <p:cNvPr id="196" name=""/>
           <p:cNvSpPr/>
           <p:nvPr/>
         </p:nvSpPr>
@@ -11410,13 +11317,13 @@
       </p:sp>
       <p:sp>
         <p:nvSpPr>
-          <p:cNvPr id="199" name=""/>
+          <p:cNvPr id="197" name=""/>
           <p:cNvSpPr/>
           <p:nvPr/>
         </p:nvSpPr>
         <p:spPr>
           <a:xfrm flipV="1">
-            <a:off x="2990160" y="5525640"/>
+            <a:off x="2964600" y="5525640"/>
             <a:ext cx="0" cy="31680"/>
           </a:xfrm>
           <a:prstGeom prst="line">
@@ -11453,13 +11360,13 @@
       </p:sp>
       <p:sp>
         <p:nvSpPr>
-          <p:cNvPr id="200" name=""/>
+          <p:cNvPr id="198" name=""/>
           <p:cNvSpPr/>
           <p:nvPr/>
         </p:nvSpPr>
         <p:spPr>
           <a:xfrm flipV="1">
-            <a:off x="3282120" y="5525640"/>
+            <a:off x="3227400" y="5525640"/>
             <a:ext cx="0" cy="31680"/>
           </a:xfrm>
           <a:prstGeom prst="line">
@@ -11496,13 +11403,13 @@
       </p:sp>
       <p:sp>
         <p:nvSpPr>
-          <p:cNvPr id="201" name=""/>
+          <p:cNvPr id="199" name=""/>
           <p:cNvSpPr/>
           <p:nvPr/>
         </p:nvSpPr>
         <p:spPr>
           <a:xfrm flipV="1">
-            <a:off x="3574080" y="5525640"/>
+            <a:off x="3490560" y="5525640"/>
             <a:ext cx="0" cy="31680"/>
           </a:xfrm>
           <a:prstGeom prst="line">
@@ -11539,13 +11446,13 @@
       </p:sp>
       <p:sp>
         <p:nvSpPr>
-          <p:cNvPr id="202" name=""/>
+          <p:cNvPr id="200" name=""/>
           <p:cNvSpPr txBox="1"/>
           <p:nvPr/>
         </p:nvSpPr>
         <p:spPr>
           <a:xfrm>
-            <a:off x="2289240" y="5570280"/>
+            <a:off x="2288520" y="5570280"/>
             <a:ext cx="426600" cy="102600"/>
           </a:xfrm>
           <a:prstGeom prst="rect">
@@ -11587,13 +11494,13 @@
       </p:sp>
       <p:sp>
         <p:nvSpPr>
-          <p:cNvPr id="203" name=""/>
+          <p:cNvPr id="201" name=""/>
           <p:cNvSpPr txBox="1"/>
           <p:nvPr/>
         </p:nvSpPr>
         <p:spPr>
           <a:xfrm>
-            <a:off x="2964960" y="5570280"/>
+            <a:off x="2939400" y="5570280"/>
             <a:ext cx="101160" cy="102600"/>
           </a:xfrm>
           <a:prstGeom prst="rect">
@@ -11635,14 +11542,229 @@
       </p:sp>
       <p:sp>
         <p:nvSpPr>
+          <p:cNvPr id="202" name=""/>
+          <p:cNvSpPr/>
+          <p:nvPr/>
+        </p:nvSpPr>
+        <p:spPr>
+          <a:xfrm>
+            <a:off x="3724560" y="5525640"/>
+            <a:ext cx="679320" cy="0"/>
+          </a:xfrm>
+          <a:prstGeom prst="line">
+            <a:avLst/>
+          </a:prstGeom>
+          <a:ln cap="sq" w="9360">
+            <a:solidFill>
+              <a:srgbClr val="333333"/>
+            </a:solidFill>
+            <a:round/>
+          </a:ln>
+        </p:spPr>
+        <p:style>
+          <a:lnRef idx="0"/>
+          <a:fillRef idx="0"/>
+          <a:effectRef idx="0"/>
+          <a:fontRef idx="minor"/>
+        </p:style>
+        <p:txBody>
+          <a:bodyPr lIns="4680" tIns="-4680" rIns="4680" bIns="-4680" anchor="t">
+            <a:noAutofit/>
+          </a:bodyPr>
+          <a:p>
+            <a:endParaRPr lang="en-US" sz="2400" b="0" u="none" strike="noStrike">
+              <a:solidFill>
+                <a:srgbClr val="000000"/>
+              </a:solidFill>
+              <a:effectLst/>
+              <a:uFillTx/>
+              <a:latin typeface="Times New Roman"/>
+            </a:endParaRPr>
+          </a:p>
+        </p:txBody>
+      </p:sp>
+      <p:sp>
+        <p:nvSpPr>
+          <p:cNvPr id="203" name=""/>
+          <p:cNvSpPr/>
+          <p:nvPr/>
+        </p:nvSpPr>
+        <p:spPr>
+          <a:xfrm flipV="1">
+            <a:off x="3755520" y="5525640"/>
+            <a:ext cx="0" cy="31680"/>
+          </a:xfrm>
+          <a:prstGeom prst="line">
+            <a:avLst/>
+          </a:prstGeom>
+          <a:ln w="7920">
+            <a:solidFill>
+              <a:srgbClr val="333333"/>
+            </a:solidFill>
+            <a:round/>
+          </a:ln>
+        </p:spPr>
+        <p:style>
+          <a:lnRef idx="0"/>
+          <a:fillRef idx="0"/>
+          <a:effectRef idx="0"/>
+          <a:fontRef idx="minor"/>
+        </p:style>
+        <p:txBody>
+          <a:bodyPr lIns="3960" tIns="3960" rIns="3960" bIns="3960" anchor="t">
+            <a:noAutofit/>
+          </a:bodyPr>
+          <a:p>
+            <a:endParaRPr lang="en-US" sz="2400" b="0" u="none" strike="noStrike">
+              <a:solidFill>
+                <a:srgbClr val="000000"/>
+              </a:solidFill>
+              <a:effectLst/>
+              <a:uFillTx/>
+              <a:latin typeface="Times New Roman"/>
+            </a:endParaRPr>
+          </a:p>
+        </p:txBody>
+      </p:sp>
+      <p:sp>
+        <p:nvSpPr>
           <p:cNvPr id="204" name=""/>
+          <p:cNvSpPr/>
+          <p:nvPr/>
+        </p:nvSpPr>
+        <p:spPr>
+          <a:xfrm flipV="1">
+            <a:off x="3928320" y="5525640"/>
+            <a:ext cx="0" cy="31680"/>
+          </a:xfrm>
+          <a:prstGeom prst="line">
+            <a:avLst/>
+          </a:prstGeom>
+          <a:ln w="7920">
+            <a:solidFill>
+              <a:srgbClr val="333333"/>
+            </a:solidFill>
+            <a:round/>
+          </a:ln>
+        </p:spPr>
+        <p:style>
+          <a:lnRef idx="0"/>
+          <a:fillRef idx="0"/>
+          <a:effectRef idx="0"/>
+          <a:fontRef idx="minor"/>
+        </p:style>
+        <p:txBody>
+          <a:bodyPr lIns="3960" tIns="3960" rIns="3960" bIns="3960" anchor="t">
+            <a:noAutofit/>
+          </a:bodyPr>
+          <a:p>
+            <a:endParaRPr lang="en-US" sz="2400" b="0" u="none" strike="noStrike">
+              <a:solidFill>
+                <a:srgbClr val="000000"/>
+              </a:solidFill>
+              <a:effectLst/>
+              <a:uFillTx/>
+              <a:latin typeface="Times New Roman"/>
+            </a:endParaRPr>
+          </a:p>
+        </p:txBody>
+      </p:sp>
+      <p:sp>
+        <p:nvSpPr>
+          <p:cNvPr id="205" name=""/>
+          <p:cNvSpPr/>
+          <p:nvPr/>
+        </p:nvSpPr>
+        <p:spPr>
+          <a:xfrm flipV="1">
+            <a:off x="4101480" y="5525640"/>
+            <a:ext cx="0" cy="31680"/>
+          </a:xfrm>
+          <a:prstGeom prst="line">
+            <a:avLst/>
+          </a:prstGeom>
+          <a:ln w="7920">
+            <a:solidFill>
+              <a:srgbClr val="333333"/>
+            </a:solidFill>
+            <a:round/>
+          </a:ln>
+        </p:spPr>
+        <p:style>
+          <a:lnRef idx="0"/>
+          <a:fillRef idx="0"/>
+          <a:effectRef idx="0"/>
+          <a:fontRef idx="minor"/>
+        </p:style>
+        <p:txBody>
+          <a:bodyPr lIns="3960" tIns="3960" rIns="3960" bIns="3960" anchor="t">
+            <a:noAutofit/>
+          </a:bodyPr>
+          <a:p>
+            <a:endParaRPr lang="en-US" sz="2400" b="0" u="none" strike="noStrike">
+              <a:solidFill>
+                <a:srgbClr val="000000"/>
+              </a:solidFill>
+              <a:effectLst/>
+              <a:uFillTx/>
+              <a:latin typeface="Times New Roman"/>
+            </a:endParaRPr>
+          </a:p>
+        </p:txBody>
+      </p:sp>
+      <p:sp>
+        <p:nvSpPr>
+          <p:cNvPr id="206" name=""/>
+          <p:cNvSpPr/>
+          <p:nvPr/>
+        </p:nvSpPr>
+        <p:spPr>
+          <a:xfrm flipV="1">
+            <a:off x="4274280" y="5525640"/>
+            <a:ext cx="0" cy="31680"/>
+          </a:xfrm>
+          <a:prstGeom prst="line">
+            <a:avLst/>
+          </a:prstGeom>
+          <a:ln w="7920">
+            <a:solidFill>
+              <a:srgbClr val="333333"/>
+            </a:solidFill>
+            <a:round/>
+          </a:ln>
+        </p:spPr>
+        <p:style>
+          <a:lnRef idx="0"/>
+          <a:fillRef idx="0"/>
+          <a:effectRef idx="0"/>
+          <a:fontRef idx="minor"/>
+        </p:style>
+        <p:txBody>
+          <a:bodyPr lIns="3960" tIns="3960" rIns="3960" bIns="3960" anchor="t">
+            <a:noAutofit/>
+          </a:bodyPr>
+          <a:p>
+            <a:endParaRPr lang="en-US" sz="2400" b="0" u="none" strike="noStrike">
+              <a:solidFill>
+                <a:srgbClr val="000000"/>
+              </a:solidFill>
+              <a:effectLst/>
+              <a:uFillTx/>
+              <a:latin typeface="Times New Roman"/>
+            </a:endParaRPr>
+          </a:p>
+        </p:txBody>
+      </p:sp>
+      <p:sp>
+        <p:nvSpPr>
+          <p:cNvPr id="207" name=""/>
           <p:cNvSpPr txBox="1"/>
           <p:nvPr/>
         </p:nvSpPr>
         <p:spPr>
           <a:xfrm>
-            <a:off x="3168000" y="5570280"/>
-            <a:ext cx="256320" cy="102600"/>
+            <a:off x="3113640" y="5570280"/>
+            <a:ext cx="483480" cy="102600"/>
           </a:xfrm>
           <a:prstGeom prst="rect">
             <a:avLst/>
@@ -11668,7 +11790,7 @@
                 <a:latin typeface="Arial"/>
                 <a:ea typeface="Arial"/>
               </a:rPr>
-              <a:t>0.005</a:t>
+              <a:t>0.005 0.01</a:t>
             </a:r>
             <a:endParaRPr lang="en-US" sz="800" b="0" u="none" strike="noStrike">
               <a:solidFill>
@@ -11683,229 +11805,14 @@
       </p:sp>
       <p:sp>
         <p:nvSpPr>
-          <p:cNvPr id="205" name=""/>
-          <p:cNvSpPr/>
-          <p:nvPr/>
-        </p:nvSpPr>
-        <p:spPr>
-          <a:xfrm>
-            <a:off x="3724560" y="5525640"/>
-            <a:ext cx="679320" cy="0"/>
-          </a:xfrm>
-          <a:prstGeom prst="line">
-            <a:avLst/>
-          </a:prstGeom>
-          <a:ln cap="sq" w="9360">
-            <a:solidFill>
-              <a:srgbClr val="333333"/>
-            </a:solidFill>
-            <a:round/>
-          </a:ln>
-        </p:spPr>
-        <p:style>
-          <a:lnRef idx="0"/>
-          <a:fillRef idx="0"/>
-          <a:effectRef idx="0"/>
-          <a:fontRef idx="minor"/>
-        </p:style>
-        <p:txBody>
-          <a:bodyPr lIns="4680" tIns="-4680" rIns="4680" bIns="-4680" anchor="t">
-            <a:noAutofit/>
-          </a:bodyPr>
-          <a:p>
-            <a:endParaRPr lang="en-US" sz="2400" b="0" u="none" strike="noStrike">
-              <a:solidFill>
-                <a:srgbClr val="000000"/>
-              </a:solidFill>
-              <a:effectLst/>
-              <a:uFillTx/>
-              <a:latin typeface="Times New Roman"/>
-            </a:endParaRPr>
-          </a:p>
-        </p:txBody>
-      </p:sp>
-      <p:sp>
-        <p:nvSpPr>
-          <p:cNvPr id="206" name=""/>
-          <p:cNvSpPr/>
-          <p:nvPr/>
-        </p:nvSpPr>
-        <p:spPr>
-          <a:xfrm flipV="1">
-            <a:off x="3755520" y="5525640"/>
-            <a:ext cx="0" cy="31680"/>
-          </a:xfrm>
-          <a:prstGeom prst="line">
-            <a:avLst/>
-          </a:prstGeom>
-          <a:ln w="7920">
-            <a:solidFill>
-              <a:srgbClr val="333333"/>
-            </a:solidFill>
-            <a:round/>
-          </a:ln>
-        </p:spPr>
-        <p:style>
-          <a:lnRef idx="0"/>
-          <a:fillRef idx="0"/>
-          <a:effectRef idx="0"/>
-          <a:fontRef idx="minor"/>
-        </p:style>
-        <p:txBody>
-          <a:bodyPr lIns="3960" tIns="3960" rIns="3960" bIns="3960" anchor="t">
-            <a:noAutofit/>
-          </a:bodyPr>
-          <a:p>
-            <a:endParaRPr lang="en-US" sz="2400" b="0" u="none" strike="noStrike">
-              <a:solidFill>
-                <a:srgbClr val="000000"/>
-              </a:solidFill>
-              <a:effectLst/>
-              <a:uFillTx/>
-              <a:latin typeface="Times New Roman"/>
-            </a:endParaRPr>
-          </a:p>
-        </p:txBody>
-      </p:sp>
-      <p:sp>
-        <p:nvSpPr>
-          <p:cNvPr id="207" name=""/>
-          <p:cNvSpPr/>
-          <p:nvPr/>
-        </p:nvSpPr>
-        <p:spPr>
-          <a:xfrm flipV="1">
-            <a:off x="3937680" y="5525640"/>
-            <a:ext cx="0" cy="31680"/>
-          </a:xfrm>
-          <a:prstGeom prst="line">
-            <a:avLst/>
-          </a:prstGeom>
-          <a:ln w="7920">
-            <a:solidFill>
-              <a:srgbClr val="333333"/>
-            </a:solidFill>
-            <a:round/>
-          </a:ln>
-        </p:spPr>
-        <p:style>
-          <a:lnRef idx="0"/>
-          <a:fillRef idx="0"/>
-          <a:effectRef idx="0"/>
-          <a:fontRef idx="minor"/>
-        </p:style>
-        <p:txBody>
-          <a:bodyPr lIns="3960" tIns="3960" rIns="3960" bIns="3960" anchor="t">
-            <a:noAutofit/>
-          </a:bodyPr>
-          <a:p>
-            <a:endParaRPr lang="en-US" sz="2400" b="0" u="none" strike="noStrike">
-              <a:solidFill>
-                <a:srgbClr val="000000"/>
-              </a:solidFill>
-              <a:effectLst/>
-              <a:uFillTx/>
-              <a:latin typeface="Times New Roman"/>
-            </a:endParaRPr>
-          </a:p>
-        </p:txBody>
-      </p:sp>
-      <p:sp>
-        <p:nvSpPr>
           <p:cNvPr id="208" name=""/>
-          <p:cNvSpPr/>
-          <p:nvPr/>
-        </p:nvSpPr>
-        <p:spPr>
-          <a:xfrm flipV="1">
-            <a:off x="4119840" y="5525640"/>
-            <a:ext cx="0" cy="31680"/>
-          </a:xfrm>
-          <a:prstGeom prst="line">
-            <a:avLst/>
-          </a:prstGeom>
-          <a:ln w="7920">
-            <a:solidFill>
-              <a:srgbClr val="333333"/>
-            </a:solidFill>
-            <a:round/>
-          </a:ln>
-        </p:spPr>
-        <p:style>
-          <a:lnRef idx="0"/>
-          <a:fillRef idx="0"/>
-          <a:effectRef idx="0"/>
-          <a:fontRef idx="minor"/>
-        </p:style>
-        <p:txBody>
-          <a:bodyPr lIns="3960" tIns="3960" rIns="3960" bIns="3960" anchor="t">
-            <a:noAutofit/>
-          </a:bodyPr>
-          <a:p>
-            <a:endParaRPr lang="en-US" sz="2400" b="0" u="none" strike="noStrike">
-              <a:solidFill>
-                <a:srgbClr val="000000"/>
-              </a:solidFill>
-              <a:effectLst/>
-              <a:uFillTx/>
-              <a:latin typeface="Times New Roman"/>
-            </a:endParaRPr>
-          </a:p>
-        </p:txBody>
-      </p:sp>
-      <p:sp>
-        <p:nvSpPr>
-          <p:cNvPr id="209" name=""/>
-          <p:cNvSpPr/>
-          <p:nvPr/>
-        </p:nvSpPr>
-        <p:spPr>
-          <a:xfrm flipV="1">
-            <a:off x="4301640" y="5525640"/>
-            <a:ext cx="0" cy="31680"/>
-          </a:xfrm>
-          <a:prstGeom prst="line">
-            <a:avLst/>
-          </a:prstGeom>
-          <a:ln w="7920">
-            <a:solidFill>
-              <a:srgbClr val="333333"/>
-            </a:solidFill>
-            <a:round/>
-          </a:ln>
-        </p:spPr>
-        <p:style>
-          <a:lnRef idx="0"/>
-          <a:fillRef idx="0"/>
-          <a:effectRef idx="0"/>
-          <a:fontRef idx="minor"/>
-        </p:style>
-        <p:txBody>
-          <a:bodyPr lIns="3960" tIns="3960" rIns="3960" bIns="3960" anchor="t">
-            <a:noAutofit/>
-          </a:bodyPr>
-          <a:p>
-            <a:endParaRPr lang="en-US" sz="2400" b="0" u="none" strike="noStrike">
-              <a:solidFill>
-                <a:srgbClr val="000000"/>
-              </a:solidFill>
-              <a:effectLst/>
-              <a:uFillTx/>
-              <a:latin typeface="Times New Roman"/>
-            </a:endParaRPr>
-          </a:p>
-        </p:txBody>
-      </p:sp>
-      <p:sp>
-        <p:nvSpPr>
-          <p:cNvPr id="210" name=""/>
           <p:cNvSpPr txBox="1"/>
           <p:nvPr/>
         </p:nvSpPr>
         <p:spPr>
           <a:xfrm>
-            <a:off x="3485520" y="5570280"/>
-            <a:ext cx="284760" cy="102600"/>
+            <a:off x="3730320" y="5570280"/>
+            <a:ext cx="101160" cy="102600"/>
           </a:xfrm>
           <a:prstGeom prst="rect">
             <a:avLst/>
@@ -11931,7 +11838,7 @@
                 <a:latin typeface="Arial"/>
                 <a:ea typeface="Arial"/>
               </a:rPr>
-              <a:t>0.01 0</a:t>
+              <a:t>0</a:t>
             </a:r>
             <a:endParaRPr lang="en-US" sz="800" b="0" u="none" strike="noStrike">
               <a:solidFill>
@@ -11946,7 +11853,7 @@
       </p:sp>
       <p:sp>
         <p:nvSpPr>
-          <p:cNvPr id="211" name=""/>
+          <p:cNvPr id="209" name=""/>
           <p:cNvSpPr/>
           <p:nvPr/>
         </p:nvSpPr>
@@ -11989,13 +11896,13 @@
       </p:sp>
       <p:sp>
         <p:nvSpPr>
-          <p:cNvPr id="212" name=""/>
+          <p:cNvPr id="210" name=""/>
           <p:cNvSpPr txBox="1"/>
           <p:nvPr/>
         </p:nvSpPr>
         <p:spPr>
           <a:xfrm>
-            <a:off x="3874320" y="5570280"/>
+            <a:off x="3865320" y="5570280"/>
             <a:ext cx="483120" cy="102600"/>
           </a:xfrm>
           <a:prstGeom prst="rect">
@@ -12037,13 +11944,61 @@
       </p:sp>
       <p:sp>
         <p:nvSpPr>
-          <p:cNvPr id="213" name=""/>
+          <p:cNvPr id="211" name=""/>
           <p:cNvSpPr txBox="1"/>
           <p:nvPr/>
         </p:nvSpPr>
         <p:spPr>
           <a:xfrm>
-            <a:off x="297720" y="5207760"/>
+            <a:off x="716760" y="5207760"/>
+            <a:ext cx="562680" cy="102600"/>
+          </a:xfrm>
+          <a:prstGeom prst="rect">
+            <a:avLst/>
+          </a:prstGeom>
+          <a:noFill/>
+          <a:ln w="0">
+            <a:noFill/>
+          </a:ln>
+        </p:spPr>
+        <p:txBody>
+          <a:bodyPr wrap="none" lIns="0" tIns="0" rIns="0" bIns="0" anchor="t">
+            <a:spAutoFit/>
+          </a:bodyPr>
+          <a:p>
+            <a:pPr/>
+            <a:r>
+              <a:rPr lang="en-US" sz="800" b="0" u="none" strike="noStrike">
+                <a:solidFill>
+                  <a:srgbClr val="262626"/>
+                </a:solidFill>
+                <a:effectLst/>
+                <a:uFillTx/>
+                <a:latin typeface="Arial"/>
+                <a:ea typeface="Arial"/>
+              </a:rPr>
+              <a:t>survey effort</a:t>
+            </a:r>
+            <a:endParaRPr lang="en-US" sz="800" b="0" u="none" strike="noStrike">
+              <a:solidFill>
+                <a:srgbClr val="000000"/>
+              </a:solidFill>
+              <a:effectLst/>
+              <a:uFillTx/>
+              <a:latin typeface="Times New Roman"/>
+            </a:endParaRPr>
+          </a:p>
+        </p:txBody>
+      </p:sp>
+      <p:sp>
+        <p:nvSpPr>
+          <p:cNvPr id="212" name=""/>
+          <p:cNvSpPr txBox="1"/>
+          <p:nvPr/>
+        </p:nvSpPr>
+        <p:spPr>
+          <a:xfrm>
+            <a:off x="297720" y="4761720"/>
             <a:ext cx="993960" cy="102600"/>
           </a:xfrm>
           <a:prstGeom prst="rect">
@@ -12085,55 +12040,7 @@
       </p:sp>
       <p:sp>
         <p:nvSpPr>
-          <p:cNvPr id="214" name=""/>
-          <p:cNvSpPr txBox="1"/>
-          <p:nvPr/>
-        </p:nvSpPr>
-        <p:spPr>
-          <a:xfrm>
-            <a:off x="716760" y="4761720"/>
-            <a:ext cx="562680" cy="102600"/>
-          </a:xfrm>
-          <a:prstGeom prst="rect">
-            <a:avLst/>
-          </a:prstGeom>
-          <a:noFill/>
-          <a:ln w="0">
-            <a:noFill/>
-          </a:ln>
-        </p:spPr>
-        <p:txBody>
-          <a:bodyPr wrap="none" lIns="0" tIns="0" rIns="0" bIns="0" anchor="t">
-            <a:spAutoFit/>
-          </a:bodyPr>
-          <a:p>
-            <a:pPr/>
-            <a:r>
-              <a:rPr lang="en-US" sz="800" b="0" u="none" strike="noStrike">
-                <a:solidFill>
-                  <a:srgbClr val="262626"/>
-                </a:solidFill>
-                <a:effectLst/>
-                <a:uFillTx/>
-                <a:latin typeface="Arial"/>
-                <a:ea typeface="Arial"/>
-              </a:rPr>
-              <a:t>survey effort</a:t>
-            </a:r>
-            <a:endParaRPr lang="en-US" sz="800" b="0" u="none" strike="noStrike">
-              <a:solidFill>
-                <a:srgbClr val="000000"/>
-              </a:solidFill>
-              <a:effectLst/>
-              <a:uFillTx/>
-              <a:latin typeface="Times New Roman"/>
-            </a:endParaRPr>
-          </a:p>
-        </p:txBody>
-      </p:sp>
-      <p:sp>
-        <p:nvSpPr>
-          <p:cNvPr id="215" name=""/>
+          <p:cNvPr id="213" name=""/>
           <p:cNvSpPr txBox="1"/>
           <p:nvPr/>
         </p:nvSpPr>
@@ -12181,7 +12088,7 @@
       </p:sp>
       <p:sp>
         <p:nvSpPr>
-          <p:cNvPr id="216" name=""/>
+          <p:cNvPr id="214" name=""/>
           <p:cNvSpPr/>
           <p:nvPr/>
         </p:nvSpPr>
@@ -12224,7 +12131,7 @@
       </p:sp>
       <p:sp>
         <p:nvSpPr>
-          <p:cNvPr id="217" name=""/>
+          <p:cNvPr id="215" name=""/>
           <p:cNvSpPr/>
           <p:nvPr/>
         </p:nvSpPr>
@@ -12267,7 +12174,7 @@
       </p:sp>
       <p:sp>
         <p:nvSpPr>
-          <p:cNvPr id="218" name=""/>
+          <p:cNvPr id="216" name=""/>
           <p:cNvSpPr/>
           <p:nvPr/>
         </p:nvSpPr>
@@ -12310,7 +12217,7 @@
       </p:sp>
       <p:sp>
         <p:nvSpPr>
-          <p:cNvPr id="219" name=""/>
+          <p:cNvPr id="217" name=""/>
           <p:cNvSpPr/>
           <p:nvPr/>
         </p:nvSpPr>
@@ -12353,7 +12260,7 @@
       </p:sp>
       <p:sp>
         <p:nvSpPr>
-          <p:cNvPr id="220" name=""/>
+          <p:cNvPr id="218" name=""/>
           <p:cNvSpPr txBox="1"/>
           <p:nvPr/>
         </p:nvSpPr>
@@ -12401,7 +12308,7 @@
       </p:sp>
       <p:sp>
         <p:nvSpPr>
-          <p:cNvPr id="221" name=""/>
+          <p:cNvPr id="219" name=""/>
           <p:cNvSpPr txBox="1"/>
           <p:nvPr/>
         </p:nvSpPr>
@@ -12449,7 +12356,7 @@
       </p:sp>
       <p:sp>
         <p:nvSpPr>
-          <p:cNvPr id="222" name=""/>
+          <p:cNvPr id="220" name=""/>
           <p:cNvSpPr txBox="1"/>
           <p:nvPr/>
         </p:nvSpPr>
@@ -12497,7 +12404,7 @@
       </p:sp>
       <p:sp>
         <p:nvSpPr>
-          <p:cNvPr id="223" name=""/>
+          <p:cNvPr id="221" name=""/>
           <p:cNvSpPr txBox="1"/>
           <p:nvPr/>
         </p:nvSpPr>
@@ -12545,7 +12452,7 @@
       </p:sp>
       <p:sp>
         <p:nvSpPr>
-          <p:cNvPr id="224" name=""/>
+          <p:cNvPr id="222" name=""/>
           <p:cNvSpPr txBox="1"/>
           <p:nvPr/>
         </p:nvSpPr>
@@ -12593,7 +12500,7 @@
       </p:sp>
       <p:sp>
         <p:nvSpPr>
-          <p:cNvPr id="225" name=""/>
+          <p:cNvPr id="223" name=""/>
           <p:cNvSpPr/>
           <p:nvPr/>
         </p:nvSpPr>
@@ -12653,7 +12560,7 @@
       </p:sp>
       <p:sp>
         <p:nvSpPr>
-          <p:cNvPr id="226" name=""/>
+          <p:cNvPr id="224" name=""/>
           <p:cNvSpPr/>
           <p:nvPr/>
         </p:nvSpPr>
@@ -12696,7 +12603,7 @@
       </p:sp>
       <p:sp>
         <p:nvSpPr>
-          <p:cNvPr id="227" name=""/>
+          <p:cNvPr id="225" name=""/>
           <p:cNvSpPr/>
           <p:nvPr/>
         </p:nvSpPr>
@@ -12739,7 +12646,7 @@
       </p:sp>
       <p:sp>
         <p:nvSpPr>
-          <p:cNvPr id="228" name=""/>
+          <p:cNvPr id="226" name=""/>
           <p:cNvSpPr/>
           <p:nvPr/>
         </p:nvSpPr>
@@ -12782,7 +12689,7 @@
       </p:sp>
       <p:sp>
         <p:nvSpPr>
-          <p:cNvPr id="229" name=""/>
+          <p:cNvPr id="227" name=""/>
           <p:cNvSpPr/>
           <p:nvPr/>
         </p:nvSpPr>
@@ -12828,14 +12735,14 @@
       </p:sp>
       <p:sp>
         <p:nvSpPr>
-          <p:cNvPr id="230" name=""/>
-          <p:cNvSpPr/>
-          <p:nvPr/>
-        </p:nvSpPr>
-        <p:spPr>
-          <a:xfrm>
-            <a:off x="5261400" y="4125960"/>
-            <a:ext cx="2498040" cy="1138320"/>
+          <p:cNvPr id="228" name=""/>
+          <p:cNvSpPr/>
+          <p:nvPr/>
+        </p:nvSpPr>
+        <p:spPr>
+          <a:xfrm>
+            <a:off x="5261400" y="4125240"/>
+            <a:ext cx="2498040" cy="1143720"/>
           </a:xfrm>
           <a:custGeom>
             <a:avLst/>
@@ -12843,18 +12750,18 @@
             <a:ahLst/>
             <a:rect l="0" t="0" r="r" b="b"/>
             <a:pathLst>
-              <a:path fill="none" w="6939" h="3162">
+              <a:path fill="none" w="6939" h="3177">
                 <a:moveTo>
-                  <a:pt x="0" y="3162"/>
+                  <a:pt x="0" y="3177"/>
                 </a:moveTo>
                 <a:lnTo>
-                  <a:pt x="1388" y="832"/>
-                </a:lnTo>
-                <a:lnTo>
-                  <a:pt x="2776" y="496"/>
-                </a:lnTo>
-                <a:lnTo>
-                  <a:pt x="4163" y="32"/>
+                  <a:pt x="1388" y="837"/>
+                </a:lnTo>
+                <a:lnTo>
+                  <a:pt x="2776" y="508"/>
+                </a:lnTo>
+                <a:lnTo>
+                  <a:pt x="4163" y="31"/>
                 </a:lnTo>
                 <a:lnTo>
                   <a:pt x="5551" y="35"/>
@@ -12890,13 +12797,13 @@
       </p:sp>
       <p:sp>
         <p:nvSpPr>
-          <p:cNvPr id="231" name=""/>
-          <p:cNvSpPr/>
-          <p:nvPr/>
-        </p:nvSpPr>
-        <p:spPr>
-          <a:xfrm>
-            <a:off x="5224680" y="5227200"/>
+          <p:cNvPr id="229" name=""/>
+          <p:cNvSpPr/>
+          <p:nvPr/>
+        </p:nvSpPr>
+        <p:spPr>
+          <a:xfrm>
+            <a:off x="5224680" y="5232240"/>
             <a:ext cx="73800" cy="73800"/>
           </a:xfrm>
           <a:custGeom>
@@ -12907,16 +12814,131 @@
             <a:pathLst>
               <a:path w="205" h="205">
                 <a:moveTo>
+                  <a:pt x="0" y="102"/>
+                </a:moveTo>
+                <a:cubicBezTo>
+                  <a:pt x="0" y="-34"/>
+                  <a:pt x="205" y="-34"/>
+                  <a:pt x="205" y="102"/>
+                </a:cubicBezTo>
+                <a:cubicBezTo>
+                  <a:pt x="205" y="239"/>
+                  <a:pt x="0" y="239"/>
+                  <a:pt x="0" y="102"/>
+                </a:cubicBezTo>
+                <a:close/>
+              </a:path>
+            </a:pathLst>
+          </a:custGeom>
+          <a:solidFill>
+            <a:srgbClr val="0072B2"/>
+          </a:solidFill>
+          <a:ln w="0">
+            <a:noFill/>
+          </a:ln>
+        </p:spPr>
+        <p:txBody>
+          <a:bodyPr lIns="0" tIns="0" rIns="0" bIns="0" anchor="t">
+            <a:noAutofit/>
+          </a:bodyPr>
+          <a:p>
+            <a:endParaRPr lang="en-US" sz="2400" b="0" u="none" strike="noStrike">
+              <a:solidFill>
+                <a:srgbClr val="FFFFFF"/>
+              </a:solidFill>
+              <a:effectLst/>
+              <a:uFillTx/>
+              <a:latin typeface="Times New Roman"/>
+            </a:endParaRPr>
+          </a:p>
+        </p:txBody>
+      </p:sp>
+      <p:sp>
+        <p:nvSpPr>
+          <p:cNvPr id="230" name=""/>
+          <p:cNvSpPr/>
+          <p:nvPr/>
+        </p:nvSpPr>
+        <p:spPr>
+          <a:xfrm>
+            <a:off x="5224680" y="5232240"/>
+            <a:ext cx="73800" cy="73800"/>
+          </a:xfrm>
+          <a:custGeom>
+            <a:avLst/>
+            <a:gdLst/>
+            <a:ahLst/>
+            <a:rect l="0" t="0" r="r" b="b"/>
+            <a:pathLst>
+              <a:path fill="none" w="205" h="205">
+                <a:moveTo>
+                  <a:pt x="205" y="102"/>
+                </a:moveTo>
+                <a:cubicBezTo>
+                  <a:pt x="205" y="239"/>
+                  <a:pt x="0" y="239"/>
+                  <a:pt x="0" y="102"/>
+                </a:cubicBezTo>
+                <a:cubicBezTo>
+                  <a:pt x="0" y="-34"/>
+                  <a:pt x="205" y="-34"/>
+                  <a:pt x="205" y="102"/>
+                </a:cubicBezTo>
+              </a:path>
+            </a:pathLst>
+          </a:custGeom>
+          <a:ln cap="rnd" w="7920">
+            <a:solidFill>
+              <a:srgbClr val="0072B2"/>
+            </a:solidFill>
+            <a:round/>
+          </a:ln>
+        </p:spPr>
+        <p:txBody>
+          <a:bodyPr lIns="3960" tIns="3960" rIns="3960" bIns="3960" anchor="t">
+            <a:noAutofit/>
+          </a:bodyPr>
+          <a:p>
+            <a:endParaRPr lang="en-US" sz="2400" b="0" u="none" strike="noStrike">
+              <a:solidFill>
+                <a:srgbClr val="000000"/>
+              </a:solidFill>
+              <a:effectLst/>
+              <a:uFillTx/>
+              <a:latin typeface="Times New Roman"/>
+            </a:endParaRPr>
+          </a:p>
+        </p:txBody>
+      </p:sp>
+      <p:sp>
+        <p:nvSpPr>
+          <p:cNvPr id="231" name=""/>
+          <p:cNvSpPr/>
+          <p:nvPr/>
+        </p:nvSpPr>
+        <p:spPr>
+          <a:xfrm>
+            <a:off x="5724360" y="4389840"/>
+            <a:ext cx="73440" cy="73440"/>
+          </a:xfrm>
+          <a:custGeom>
+            <a:avLst/>
+            <a:gdLst/>
+            <a:ahLst/>
+            <a:rect l="0" t="0" r="r" b="b"/>
+            <a:pathLst>
+              <a:path w="204" h="204">
+                <a:moveTo>
                   <a:pt x="0" y="103"/>
                 </a:moveTo>
                 <a:cubicBezTo>
                   <a:pt x="0" y="-34"/>
-                  <a:pt x="205" y="-34"/>
-                  <a:pt x="205" y="103"/>
+                  <a:pt x="204" y="-34"/>
+                  <a:pt x="204" y="103"/>
                 </a:cubicBezTo>
                 <a:cubicBezTo>
-                  <a:pt x="205" y="239"/>
-                  <a:pt x="0" y="239"/>
+                  <a:pt x="204" y="238"/>
+                  <a:pt x="0" y="238"/>
                   <a:pt x="0" y="103"/>
                 </a:cubicBezTo>
                 <a:close/>
@@ -12954,8 +12976,8 @@
         </p:nvSpPr>
         <p:spPr>
           <a:xfrm>
-            <a:off x="5224680" y="5227200"/>
-            <a:ext cx="73800" cy="73800"/>
+            <a:off x="5724360" y="4389840"/>
+            <a:ext cx="73440" cy="73440"/>
           </a:xfrm>
           <a:custGeom>
             <a:avLst/>
@@ -12963,13 +12985,128 @@
             <a:ahLst/>
             <a:rect l="0" t="0" r="r" b="b"/>
             <a:pathLst>
-              <a:path fill="none" w="205" h="205">
+              <a:path fill="none" w="204" h="204">
+                <a:moveTo>
+                  <a:pt x="204" y="103"/>
+                </a:moveTo>
+                <a:cubicBezTo>
+                  <a:pt x="204" y="238"/>
+                  <a:pt x="0" y="238"/>
+                  <a:pt x="0" y="103"/>
+                </a:cubicBezTo>
+                <a:cubicBezTo>
+                  <a:pt x="0" y="-34"/>
+                  <a:pt x="204" y="-34"/>
+                  <a:pt x="204" y="103"/>
+                </a:cubicBezTo>
+              </a:path>
+            </a:pathLst>
+          </a:custGeom>
+          <a:ln cap="rnd" w="7920">
+            <a:solidFill>
+              <a:srgbClr val="0072B2"/>
+            </a:solidFill>
+            <a:round/>
+          </a:ln>
+        </p:spPr>
+        <p:txBody>
+          <a:bodyPr lIns="3960" tIns="3960" rIns="3960" bIns="3960" anchor="t">
+            <a:noAutofit/>
+          </a:bodyPr>
+          <a:p>
+            <a:endParaRPr lang="en-US" sz="2400" b="0" u="none" strike="noStrike">
+              <a:solidFill>
+                <a:srgbClr val="000000"/>
+              </a:solidFill>
+              <a:effectLst/>
+              <a:uFillTx/>
+              <a:latin typeface="Times New Roman"/>
+            </a:endParaRPr>
+          </a:p>
+        </p:txBody>
+      </p:sp>
+      <p:sp>
+        <p:nvSpPr>
+          <p:cNvPr id="233" name=""/>
+          <p:cNvSpPr/>
+          <p:nvPr/>
+        </p:nvSpPr>
+        <p:spPr>
+          <a:xfrm>
+            <a:off x="6223680" y="4271400"/>
+            <a:ext cx="73800" cy="74160"/>
+          </a:xfrm>
+          <a:custGeom>
+            <a:avLst/>
+            <a:gdLst/>
+            <a:ahLst/>
+            <a:rect l="0" t="0" r="r" b="b"/>
+            <a:pathLst>
+              <a:path w="205" h="206">
+                <a:moveTo>
+                  <a:pt x="0" y="103"/>
+                </a:moveTo>
+                <a:cubicBezTo>
+                  <a:pt x="0" y="-34"/>
+                  <a:pt x="205" y="-34"/>
+                  <a:pt x="205" y="103"/>
+                </a:cubicBezTo>
+                <a:cubicBezTo>
+                  <a:pt x="205" y="240"/>
+                  <a:pt x="0" y="240"/>
+                  <a:pt x="0" y="103"/>
+                </a:cubicBezTo>
+                <a:close/>
+              </a:path>
+            </a:pathLst>
+          </a:custGeom>
+          <a:solidFill>
+            <a:srgbClr val="0072B2"/>
+          </a:solidFill>
+          <a:ln w="0">
+            <a:noFill/>
+          </a:ln>
+        </p:spPr>
+        <p:txBody>
+          <a:bodyPr lIns="0" tIns="0" rIns="0" bIns="0" anchor="t">
+            <a:noAutofit/>
+          </a:bodyPr>
+          <a:p>
+            <a:endParaRPr lang="en-US" sz="2400" b="0" u="none" strike="noStrike">
+              <a:solidFill>
+                <a:srgbClr val="FFFFFF"/>
+              </a:solidFill>
+              <a:effectLst/>
+              <a:uFillTx/>
+              <a:latin typeface="Times New Roman"/>
+            </a:endParaRPr>
+          </a:p>
+        </p:txBody>
+      </p:sp>
+      <p:sp>
+        <p:nvSpPr>
+          <p:cNvPr id="234" name=""/>
+          <p:cNvSpPr/>
+          <p:nvPr/>
+        </p:nvSpPr>
+        <p:spPr>
+          <a:xfrm>
+            <a:off x="6223680" y="4271400"/>
+            <a:ext cx="73800" cy="74160"/>
+          </a:xfrm>
+          <a:custGeom>
+            <a:avLst/>
+            <a:gdLst/>
+            <a:ahLst/>
+            <a:rect l="0" t="0" r="r" b="b"/>
+            <a:pathLst>
+              <a:path fill="none" w="205" h="206">
                 <a:moveTo>
                   <a:pt x="205" y="103"/>
                 </a:moveTo>
                 <a:cubicBezTo>
-                  <a:pt x="205" y="239"/>
-                  <a:pt x="0" y="239"/>
+                  <a:pt x="205" y="240"/>
+                  <a:pt x="0" y="240"/>
                   <a:pt x="0" y="103"/>
                 </a:cubicBezTo>
                 <a:cubicBezTo>
@@ -13005,13 +13142,13 @@
       </p:sp>
       <p:sp>
         <p:nvSpPr>
-          <p:cNvPr id="233" name=""/>
-          <p:cNvSpPr/>
-          <p:nvPr/>
-        </p:nvSpPr>
-        <p:spPr>
-          <a:xfrm>
-            <a:off x="5724360" y="4389120"/>
+          <p:cNvPr id="235" name=""/>
+          <p:cNvSpPr/>
+          <p:nvPr/>
+        </p:nvSpPr>
+        <p:spPr>
+          <a:xfrm>
+            <a:off x="6723360" y="4100040"/>
             <a:ext cx="73440" cy="73440"/>
           </a:xfrm>
           <a:custGeom>
@@ -13063,13 +13200,13 @@
       </p:sp>
       <p:sp>
         <p:nvSpPr>
-          <p:cNvPr id="234" name=""/>
-          <p:cNvSpPr/>
-          <p:nvPr/>
-        </p:nvSpPr>
-        <p:spPr>
-          <a:xfrm>
-            <a:off x="5724360" y="4389120"/>
+          <p:cNvPr id="236" name=""/>
+          <p:cNvSpPr/>
+          <p:nvPr/>
+        </p:nvSpPr>
+        <p:spPr>
+          <a:xfrm>
+            <a:off x="6723360" y="4100040"/>
             <a:ext cx="73440" cy="73440"/>
           </a:xfrm>
           <a:custGeom>
@@ -13120,14 +13257,14 @@
       </p:sp>
       <p:sp>
         <p:nvSpPr>
-          <p:cNvPr id="235" name=""/>
-          <p:cNvSpPr/>
-          <p:nvPr/>
-        </p:nvSpPr>
-        <p:spPr>
-          <a:xfrm>
-            <a:off x="6223680" y="4268160"/>
-            <a:ext cx="73800" cy="73800"/>
+          <p:cNvPr id="237" name=""/>
+          <p:cNvSpPr/>
+          <p:nvPr/>
+        </p:nvSpPr>
+        <p:spPr>
+          <a:xfrm>
+            <a:off x="7222680" y="4101120"/>
+            <a:ext cx="73800" cy="73440"/>
           </a:xfrm>
           <a:custGeom>
             <a:avLst/>
@@ -13135,133 +13272,18 @@
             <a:ahLst/>
             <a:rect l="0" t="0" r="r" b="b"/>
             <a:pathLst>
-              <a:path w="205" h="205">
-                <a:moveTo>
-                  <a:pt x="0" y="102"/>
-                </a:moveTo>
-                <a:cubicBezTo>
-                  <a:pt x="0" y="-34"/>
-                  <a:pt x="205" y="-34"/>
-                  <a:pt x="205" y="102"/>
-                </a:cubicBezTo>
-                <a:cubicBezTo>
-                  <a:pt x="205" y="239"/>
-                  <a:pt x="0" y="239"/>
-                  <a:pt x="0" y="102"/>
-                </a:cubicBezTo>
-                <a:close/>
-              </a:path>
-            </a:pathLst>
-          </a:custGeom>
-          <a:solidFill>
-            <a:srgbClr val="0072B2"/>
-          </a:solidFill>
-          <a:ln w="0">
-            <a:noFill/>
-          </a:ln>
-        </p:spPr>
-        <p:txBody>
-          <a:bodyPr lIns="0" tIns="0" rIns="0" bIns="0" anchor="t">
-            <a:noAutofit/>
-          </a:bodyPr>
-          <a:p>
-            <a:endParaRPr lang="en-US" sz="2400" b="0" u="none" strike="noStrike">
-              <a:solidFill>
-                <a:srgbClr val="FFFFFF"/>
-              </a:solidFill>
-              <a:effectLst/>
-              <a:uFillTx/>
-              <a:latin typeface="Times New Roman"/>
-            </a:endParaRPr>
-          </a:p>
-        </p:txBody>
-      </p:sp>
-      <p:sp>
-        <p:nvSpPr>
-          <p:cNvPr id="236" name=""/>
-          <p:cNvSpPr/>
-          <p:nvPr/>
-        </p:nvSpPr>
-        <p:spPr>
-          <a:xfrm>
-            <a:off x="6223680" y="4268160"/>
-            <a:ext cx="73800" cy="73800"/>
-          </a:xfrm>
-          <a:custGeom>
-            <a:avLst/>
-            <a:gdLst/>
-            <a:ahLst/>
-            <a:rect l="0" t="0" r="r" b="b"/>
-            <a:pathLst>
-              <a:path fill="none" w="205" h="205">
-                <a:moveTo>
-                  <a:pt x="205" y="102"/>
-                </a:moveTo>
-                <a:cubicBezTo>
-                  <a:pt x="205" y="239"/>
-                  <a:pt x="0" y="239"/>
-                  <a:pt x="0" y="102"/>
-                </a:cubicBezTo>
-                <a:cubicBezTo>
-                  <a:pt x="0" y="-34"/>
-                  <a:pt x="205" y="-34"/>
-                  <a:pt x="205" y="102"/>
-                </a:cubicBezTo>
-              </a:path>
-            </a:pathLst>
-          </a:custGeom>
-          <a:ln cap="rnd" w="7920">
-            <a:solidFill>
-              <a:srgbClr val="0072B2"/>
-            </a:solidFill>
-            <a:round/>
-          </a:ln>
-        </p:spPr>
-        <p:txBody>
-          <a:bodyPr lIns="3960" tIns="3960" rIns="3960" bIns="3960" anchor="t">
-            <a:noAutofit/>
-          </a:bodyPr>
-          <a:p>
-            <a:endParaRPr lang="en-US" sz="2400" b="0" u="none" strike="noStrike">
-              <a:solidFill>
-                <a:srgbClr val="000000"/>
-              </a:solidFill>
-              <a:effectLst/>
-              <a:uFillTx/>
-              <a:latin typeface="Times New Roman"/>
-            </a:endParaRPr>
-          </a:p>
-        </p:txBody>
-      </p:sp>
-      <p:sp>
-        <p:nvSpPr>
-          <p:cNvPr id="237" name=""/>
-          <p:cNvSpPr/>
-          <p:nvPr/>
-        </p:nvSpPr>
-        <p:spPr>
-          <a:xfrm>
-            <a:off x="6723360" y="4100760"/>
-            <a:ext cx="73440" cy="73800"/>
-          </a:xfrm>
-          <a:custGeom>
-            <a:avLst/>
-            <a:gdLst/>
-            <a:ahLst/>
-            <a:rect l="0" t="0" r="r" b="b"/>
-            <a:pathLst>
-              <a:path w="204" h="205">
+              <a:path w="205" h="204">
                 <a:moveTo>
                   <a:pt x="0" y="103"/>
                 </a:moveTo>
                 <a:cubicBezTo>
                   <a:pt x="0" y="-34"/>
-                  <a:pt x="204" y="-34"/>
-                  <a:pt x="204" y="103"/>
+                  <a:pt x="205" y="-34"/>
+                  <a:pt x="205" y="103"/>
                 </a:cubicBezTo>
                 <a:cubicBezTo>
-                  <a:pt x="204" y="239"/>
-                  <a:pt x="0" y="239"/>
+                  <a:pt x="205" y="238"/>
+                  <a:pt x="0" y="238"/>
                   <a:pt x="0" y="103"/>
                 </a:cubicBezTo>
                 <a:close/>
@@ -13299,8 +13321,8 @@
         </p:nvSpPr>
         <p:spPr>
           <a:xfrm>
-            <a:off x="6723360" y="4100760"/>
-            <a:ext cx="73440" cy="73800"/>
+            <a:off x="7222680" y="4101120"/>
+            <a:ext cx="73800" cy="73440"/>
           </a:xfrm>
           <a:custGeom>
             <a:avLst/>
@@ -13308,19 +13330,19 @@
             <a:ahLst/>
             <a:rect l="0" t="0" r="r" b="b"/>
             <a:pathLst>
-              <a:path fill="none" w="204" h="205">
+              <a:path fill="none" w="205" h="204">
                 <a:moveTo>
-                  <a:pt x="204" y="103"/>
+                  <a:pt x="205" y="103"/>
                 </a:moveTo>
                 <a:cubicBezTo>
-                  <a:pt x="204" y="239"/>
-                  <a:pt x="0" y="239"/>
+                  <a:pt x="205" y="238"/>
+                  <a:pt x="0" y="238"/>
                   <a:pt x="0" y="103"/>
                 </a:cubicBezTo>
                 <a:cubicBezTo>
                   <a:pt x="0" y="-34"/>
-                  <a:pt x="204" y="-34"/>
-                  <a:pt x="204" y="103"/>
+                  <a:pt x="205" y="-34"/>
+                  <a:pt x="205" y="103"/>
                 </a:cubicBezTo>
               </a:path>
             </a:pathLst>
@@ -13356,8 +13378,8 @@
         </p:nvSpPr>
         <p:spPr>
           <a:xfrm>
-            <a:off x="7222680" y="4102200"/>
-            <a:ext cx="73800" cy="73440"/>
+            <a:off x="7722360" y="4088880"/>
+            <a:ext cx="73440" cy="73440"/>
           </a:xfrm>
           <a:custGeom>
             <a:avLst/>
@@ -13365,19 +13387,19 @@
             <a:ahLst/>
             <a:rect l="0" t="0" r="r" b="b"/>
             <a:pathLst>
-              <a:path w="205" h="204">
+              <a:path w="204" h="204">
                 <a:moveTo>
-                  <a:pt x="0" y="102"/>
+                  <a:pt x="0" y="101"/>
                 </a:moveTo>
                 <a:cubicBezTo>
                   <a:pt x="0" y="-34"/>
-                  <a:pt x="205" y="-34"/>
-                  <a:pt x="205" y="102"/>
+                  <a:pt x="204" y="-34"/>
+                  <a:pt x="204" y="101"/>
                 </a:cubicBezTo>
                 <a:cubicBezTo>
-                  <a:pt x="205" y="238"/>
+                  <a:pt x="204" y="238"/>
                   <a:pt x="0" y="238"/>
-                  <a:pt x="0" y="102"/>
+                  <a:pt x="0" y="101"/>
                 </a:cubicBezTo>
                 <a:close/>
               </a:path>
@@ -13414,8 +13436,8 @@
         </p:nvSpPr>
         <p:spPr>
           <a:xfrm>
-            <a:off x="7222680" y="4102200"/>
-            <a:ext cx="73800" cy="73440"/>
+            <a:off x="7722360" y="4088880"/>
+            <a:ext cx="73440" cy="73440"/>
           </a:xfrm>
           <a:custGeom>
             <a:avLst/>
@@ -13423,19 +13445,19 @@
             <a:ahLst/>
             <a:rect l="0" t="0" r="r" b="b"/>
             <a:pathLst>
-              <a:path fill="none" w="205" h="204">
+              <a:path fill="none" w="204" h="204">
                 <a:moveTo>
-                  <a:pt x="205" y="102"/>
+                  <a:pt x="204" y="101"/>
                 </a:moveTo>
                 <a:cubicBezTo>
-                  <a:pt x="205" y="238"/>
+                  <a:pt x="204" y="238"/>
                   <a:pt x="0" y="238"/>
-                  <a:pt x="0" y="102"/>
+                  <a:pt x="0" y="101"/>
                 </a:cubicBezTo>
                 <a:cubicBezTo>
                   <a:pt x="0" y="-34"/>
-                  <a:pt x="205" y="-34"/>
-                  <a:pt x="205" y="102"/>
+                  <a:pt x="204" y="-34"/>
+                  <a:pt x="204" y="101"/>
                 </a:cubicBezTo>
               </a:path>
             </a:pathLst>
@@ -13466,121 +13488,6 @@
       <p:sp>
         <p:nvSpPr>
           <p:cNvPr id="241" name=""/>
-          <p:cNvSpPr/>
-          <p:nvPr/>
-        </p:nvSpPr>
-        <p:spPr>
-          <a:xfrm>
-            <a:off x="7722360" y="4089240"/>
-            <a:ext cx="73440" cy="73800"/>
-          </a:xfrm>
-          <a:custGeom>
-            <a:avLst/>
-            <a:gdLst/>
-            <a:ahLst/>
-            <a:rect l="0" t="0" r="r" b="b"/>
-            <a:pathLst>
-              <a:path w="204" h="205">
-                <a:moveTo>
-                  <a:pt x="0" y="102"/>
-                </a:moveTo>
-                <a:cubicBezTo>
-                  <a:pt x="0" y="-34"/>
-                  <a:pt x="204" y="-34"/>
-                  <a:pt x="204" y="102"/>
-                </a:cubicBezTo>
-                <a:cubicBezTo>
-                  <a:pt x="204" y="239"/>
-                  <a:pt x="0" y="239"/>
-                  <a:pt x="0" y="102"/>
-                </a:cubicBezTo>
-                <a:close/>
-              </a:path>
-            </a:pathLst>
-          </a:custGeom>
-          <a:solidFill>
-            <a:srgbClr val="0072B2"/>
-          </a:solidFill>
-          <a:ln w="0">
-            <a:noFill/>
-          </a:ln>
-        </p:spPr>
-        <p:txBody>
-          <a:bodyPr lIns="0" tIns="0" rIns="0" bIns="0" anchor="t">
-            <a:noAutofit/>
-          </a:bodyPr>
-          <a:p>
-            <a:endParaRPr lang="en-US" sz="2400" b="0" u="none" strike="noStrike">
-              <a:solidFill>
-                <a:srgbClr val="FFFFFF"/>
-              </a:solidFill>
-              <a:effectLst/>
-              <a:uFillTx/>
-              <a:latin typeface="Times New Roman"/>
-            </a:endParaRPr>
-          </a:p>
-        </p:txBody>
-      </p:sp>
-      <p:sp>
-        <p:nvSpPr>
-          <p:cNvPr id="242" name=""/>
-          <p:cNvSpPr/>
-          <p:nvPr/>
-        </p:nvSpPr>
-        <p:spPr>
-          <a:xfrm>
-            <a:off x="7722360" y="4089240"/>
-            <a:ext cx="73440" cy="73800"/>
-          </a:xfrm>
-          <a:custGeom>
-            <a:avLst/>
-            <a:gdLst/>
-            <a:ahLst/>
-            <a:rect l="0" t="0" r="r" b="b"/>
-            <a:pathLst>
-              <a:path fill="none" w="204" h="205">
-                <a:moveTo>
-                  <a:pt x="204" y="102"/>
-                </a:moveTo>
-                <a:cubicBezTo>
-                  <a:pt x="204" y="239"/>
-                  <a:pt x="0" y="239"/>
-                  <a:pt x="0" y="102"/>
-                </a:cubicBezTo>
-                <a:cubicBezTo>
-                  <a:pt x="0" y="-34"/>
-                  <a:pt x="204" y="-34"/>
-                  <a:pt x="204" y="102"/>
-                </a:cubicBezTo>
-              </a:path>
-            </a:pathLst>
-          </a:custGeom>
-          <a:ln cap="rnd" w="7920">
-            <a:solidFill>
-              <a:srgbClr val="0072B2"/>
-            </a:solidFill>
-            <a:round/>
-          </a:ln>
-        </p:spPr>
-        <p:txBody>
-          <a:bodyPr lIns="3960" tIns="3960" rIns="3960" bIns="3960" anchor="t">
-            <a:noAutofit/>
-          </a:bodyPr>
-          <a:p>
-            <a:endParaRPr lang="en-US" sz="2400" b="0" u="none" strike="noStrike">
-              <a:solidFill>
-                <a:srgbClr val="000000"/>
-              </a:solidFill>
-              <a:effectLst/>
-              <a:uFillTx/>
-              <a:latin typeface="Times New Roman"/>
-            </a:endParaRPr>
-          </a:p>
-        </p:txBody>
-      </p:sp>
-      <p:sp>
-        <p:nvSpPr>
-          <p:cNvPr id="243" name=""/>
           <p:cNvSpPr txBox="1"/>
           <p:nvPr/>
         </p:nvSpPr>
@@ -13628,13 +13535,13 @@
       </p:sp>
       <p:sp>
         <p:nvSpPr>
-          <p:cNvPr id="244" name=""/>
+          <p:cNvPr id="242" name=""/>
           <p:cNvSpPr txBox="1"/>
           <p:nvPr/>
         </p:nvSpPr>
         <p:spPr>
           <a:xfrm>
-            <a:off x="5134680" y="5091480"/>
+            <a:off x="5121720" y="5096160"/>
             <a:ext cx="259920" cy="104040"/>
           </a:xfrm>
           <a:prstGeom prst="rect">
@@ -13661,7 +13568,7 @@
                 <a:latin typeface="Arial"/>
                 <a:ea typeface="Arial"/>
               </a:rPr>
-              <a:t>0.411</a:t>
+              <a:t>0.410</a:t>
             </a:r>
             <a:endParaRPr lang="en-US" sz="810" b="0" u="none" strike="noStrike">
               <a:solidFill>
@@ -13676,13 +13583,13 @@
       </p:sp>
       <p:sp>
         <p:nvSpPr>
-          <p:cNvPr id="245" name=""/>
+          <p:cNvPr id="243" name=""/>
           <p:cNvSpPr txBox="1"/>
           <p:nvPr/>
         </p:nvSpPr>
         <p:spPr>
           <a:xfrm>
-            <a:off x="5621400" y="4253040"/>
+            <a:off x="5621400" y="4253760"/>
             <a:ext cx="259920" cy="104040"/>
           </a:xfrm>
           <a:prstGeom prst="rect">
@@ -13724,13 +13631,13 @@
       </p:sp>
       <p:sp>
         <p:nvSpPr>
-          <p:cNvPr id="246" name=""/>
+          <p:cNvPr id="244" name=""/>
           <p:cNvSpPr txBox="1"/>
           <p:nvPr/>
         </p:nvSpPr>
         <p:spPr>
           <a:xfrm>
-            <a:off x="6121080" y="4132080"/>
+            <a:off x="6121080" y="4135680"/>
             <a:ext cx="259920" cy="104040"/>
           </a:xfrm>
           <a:prstGeom prst="rect">
@@ -13772,13 +13679,13 @@
       </p:sp>
       <p:sp>
         <p:nvSpPr>
-          <p:cNvPr id="247" name=""/>
+          <p:cNvPr id="245" name=""/>
           <p:cNvSpPr txBox="1"/>
           <p:nvPr/>
         </p:nvSpPr>
         <p:spPr>
           <a:xfrm>
-            <a:off x="6620400" y="3965040"/>
+            <a:off x="6620400" y="3963960"/>
             <a:ext cx="259920" cy="104040"/>
           </a:xfrm>
           <a:prstGeom prst="rect">
@@ -13820,13 +13727,13 @@
       </p:sp>
       <p:sp>
         <p:nvSpPr>
-          <p:cNvPr id="248" name=""/>
+          <p:cNvPr id="246" name=""/>
           <p:cNvSpPr txBox="1"/>
           <p:nvPr/>
         </p:nvSpPr>
         <p:spPr>
           <a:xfrm>
-            <a:off x="7119720" y="3966120"/>
+            <a:off x="7119720" y="3965400"/>
             <a:ext cx="259920" cy="104040"/>
           </a:xfrm>
           <a:prstGeom prst="rect">
@@ -13853,7 +13760,7 @@
                 <a:latin typeface="Arial"/>
                 <a:ea typeface="Arial"/>
               </a:rPr>
-              <a:t>0.609</a:t>
+              <a:t>0.610</a:t>
             </a:r>
             <a:endParaRPr lang="en-US" sz="810" b="0" u="none" strike="noStrike">
               <a:solidFill>
@@ -13868,7 +13775,7 @@
       </p:sp>
       <p:sp>
         <p:nvSpPr>
-          <p:cNvPr id="249" name=""/>
+          <p:cNvPr id="247" name=""/>
           <p:cNvSpPr/>
           <p:nvPr/>
         </p:nvSpPr>
@@ -13911,13 +13818,13 @@
       </p:sp>
       <p:sp>
         <p:nvSpPr>
-          <p:cNvPr id="250" name=""/>
+          <p:cNvPr id="248" name=""/>
           <p:cNvSpPr txBox="1"/>
           <p:nvPr/>
         </p:nvSpPr>
         <p:spPr>
           <a:xfrm>
-            <a:off x="7619400" y="3953520"/>
+            <a:off x="7619400" y="3952800"/>
             <a:ext cx="259920" cy="104040"/>
           </a:xfrm>
           <a:prstGeom prst="rect">
@@ -13959,7 +13866,7 @@
       </p:sp>
       <p:sp>
         <p:nvSpPr>
-          <p:cNvPr id="251" name=""/>
+          <p:cNvPr id="249" name=""/>
           <p:cNvSpPr txBox="1"/>
           <p:nvPr/>
         </p:nvSpPr>
@@ -14007,7 +13914,7 @@
       </p:sp>
       <p:sp>
         <p:nvSpPr>
-          <p:cNvPr id="252" name=""/>
+          <p:cNvPr id="250" name=""/>
           <p:cNvSpPr txBox="1"/>
           <p:nvPr/>
         </p:nvSpPr>
@@ -14055,7 +13962,7 @@
       </p:sp>
       <p:sp>
         <p:nvSpPr>
-          <p:cNvPr id="253" name=""/>
+          <p:cNvPr id="251" name=""/>
           <p:cNvSpPr/>
           <p:nvPr/>
         </p:nvSpPr>
@@ -14098,7 +14005,7 @@
       </p:sp>
       <p:sp>
         <p:nvSpPr>
-          <p:cNvPr id="254" name=""/>
+          <p:cNvPr id="252" name=""/>
           <p:cNvSpPr/>
           <p:nvPr/>
         </p:nvSpPr>
@@ -14141,7 +14048,7 @@
       </p:sp>
       <p:sp>
         <p:nvSpPr>
-          <p:cNvPr id="255" name=""/>
+          <p:cNvPr id="253" name=""/>
           <p:cNvSpPr/>
           <p:nvPr/>
         </p:nvSpPr>
@@ -14184,7 +14091,7 @@
       </p:sp>
       <p:sp>
         <p:nvSpPr>
-          <p:cNvPr id="256" name=""/>
+          <p:cNvPr id="254" name=""/>
           <p:cNvSpPr/>
           <p:nvPr/>
         </p:nvSpPr>
@@ -14227,7 +14134,7 @@
       </p:sp>
       <p:sp>
         <p:nvSpPr>
-          <p:cNvPr id="257" name=""/>
+          <p:cNvPr id="255" name=""/>
           <p:cNvSpPr/>
           <p:nvPr/>
         </p:nvSpPr>
@@ -14270,7 +14177,7 @@
       </p:sp>
       <p:sp>
         <p:nvSpPr>
-          <p:cNvPr id="258" name=""/>
+          <p:cNvPr id="256" name=""/>
           <p:cNvSpPr/>
           <p:nvPr/>
         </p:nvSpPr>
@@ -14313,7 +14220,7 @@
       </p:sp>
       <p:sp>
         <p:nvSpPr>
-          <p:cNvPr id="259" name=""/>
+          <p:cNvPr id="257" name=""/>
           <p:cNvSpPr/>
           <p:nvPr/>
         </p:nvSpPr>
@@ -14356,7 +14263,7 @@
       </p:sp>
       <p:sp>
         <p:nvSpPr>
-          <p:cNvPr id="260" name=""/>
+          <p:cNvPr id="258" name=""/>
           <p:cNvSpPr/>
           <p:nvPr/>
         </p:nvSpPr>
@@ -14399,7 +14306,7 @@
       </p:sp>
       <p:sp>
         <p:nvSpPr>
-          <p:cNvPr id="261" name=""/>
+          <p:cNvPr id="259" name=""/>
           <p:cNvSpPr/>
           <p:nvPr/>
         </p:nvSpPr>
@@ -14442,7 +14349,7 @@
       </p:sp>
       <p:sp>
         <p:nvSpPr>
-          <p:cNvPr id="262" name=""/>
+          <p:cNvPr id="260" name=""/>
           <p:cNvSpPr/>
           <p:nvPr/>
         </p:nvSpPr>
@@ -14485,7 +14392,7 @@
       </p:sp>
       <p:sp>
         <p:nvSpPr>
-          <p:cNvPr id="263" name=""/>
+          <p:cNvPr id="261" name=""/>
           <p:cNvSpPr txBox="1"/>
           <p:nvPr/>
         </p:nvSpPr>
@@ -14533,7 +14440,7 @@
       </p:sp>
       <p:sp>
         <p:nvSpPr>
-          <p:cNvPr id="264" name=""/>
+          <p:cNvPr id="262" name=""/>
           <p:cNvSpPr txBox="1"/>
           <p:nvPr/>
         </p:nvSpPr>
@@ -14581,7 +14488,7 @@
       </p:sp>
       <p:sp>
         <p:nvSpPr>
-          <p:cNvPr id="265" name=""/>
+          <p:cNvPr id="263" name=""/>
           <p:cNvSpPr txBox="1"/>
           <p:nvPr/>
         </p:nvSpPr>
@@ -14629,7 +14536,7 @@
       </p:sp>
       <p:sp>
         <p:nvSpPr>
-          <p:cNvPr id="266" name=""/>
+          <p:cNvPr id="264" name=""/>
           <p:cNvSpPr txBox="1"/>
           <p:nvPr/>
         </p:nvSpPr>
@@ -14677,7 +14584,7 @@
       </p:sp>
       <p:sp>
         <p:nvSpPr>
-          <p:cNvPr id="267" name=""/>
+          <p:cNvPr id="265" name=""/>
           <p:cNvSpPr txBox="1"/>
           <p:nvPr/>
         </p:nvSpPr>
@@ -14725,7 +14632,7 @@
       </p:sp>
       <p:sp>
         <p:nvSpPr>
-          <p:cNvPr id="268" name=""/>
+          <p:cNvPr id="266" name=""/>
           <p:cNvSpPr txBox="1"/>
           <p:nvPr/>
         </p:nvSpPr>
@@ -14773,7 +14680,7 @@
       </p:sp>
       <p:sp>
         <p:nvSpPr>
-          <p:cNvPr id="269" name=""/>
+          <p:cNvPr id="267" name=""/>
           <p:cNvSpPr txBox="1"/>
           <p:nvPr/>
         </p:nvSpPr>
@@ -14821,7 +14728,7 @@
       </p:sp>
       <p:sp>
         <p:nvSpPr>
-          <p:cNvPr id="270" name=""/>
+          <p:cNvPr id="268" name=""/>
           <p:cNvSpPr txBox="1"/>
           <p:nvPr/>
         </p:nvSpPr>
@@ -14869,7 +14776,7 @@
       </p:sp>
       <p:sp>
         <p:nvSpPr>
-          <p:cNvPr id="271" name=""/>
+          <p:cNvPr id="269" name=""/>
           <p:cNvSpPr txBox="1"/>
           <p:nvPr/>
         </p:nvSpPr>
@@ -14917,7 +14824,7 @@
       </p:sp>
       <p:sp>
         <p:nvSpPr>
-          <p:cNvPr id="272" name=""/>
+          <p:cNvPr id="270" name=""/>
           <p:cNvSpPr txBox="1"/>
           <p:nvPr/>
         </p:nvSpPr>
@@ -14965,7 +14872,7 @@
       </p:sp>
       <p:sp>
         <p:nvSpPr>
-          <p:cNvPr id="273" name=""/>
+          <p:cNvPr id="271" name=""/>
           <p:cNvSpPr txBox="1"/>
           <p:nvPr/>
         </p:nvSpPr>
@@ -15013,7 +14920,7 @@
       </p:sp>
       <p:sp>
         <p:nvSpPr>
-          <p:cNvPr id="274" name=""/>
+          <p:cNvPr id="272" name=""/>
           <p:cNvSpPr txBox="1"/>
           <p:nvPr/>
         </p:nvSpPr>
